--- a/docs/icebreaker/icebreaker-03-whoisit.pptx
+++ b/docs/icebreaker/icebreaker-03-whoisit.pptx
@@ -16,9 +16,12 @@
     <p:sldId id="264" r:id="rId10"/>
     <p:sldId id="265" r:id="rId11"/>
     <p:sldId id="266" r:id="rId12"/>
+    <p:sldId id="267" r:id="rId13"/>
+    <p:sldId id="268" r:id="rId14"/>
+    <p:sldId id="269" r:id="rId15"/>
   </p:sldIdLst>
   <p:notesMasterIdLst>
-    <p:notesMasterId r:id="rId13"/>
+    <p:notesMasterId r:id="rId16"/>
   </p:notesMasterIdLst>
   <p:sldSz cx="12192000" cy="6858000"/>
   <p:notesSz cx="6858000" cy="12192000"/>
@@ -712,6 +715,270 @@
             <a:fld id="{F7021451-1387-4CA6-816F-3879F97B5CBC}" type="slidenum">
               <a:rPr lang="en-US"/>
               <a:t>11</a:t>
+            </a:fld>
+            <a:endParaRPr lang="en-US"/>
+          </a:p>
+        </p:txBody>
+      </p:sp>
+    </p:spTree>
+    <p:extLst>
+      <p:ext uri="{BB962C8B-B14F-4D97-AF65-F5344CB8AC3E}">
+        <p14:creationId xmlns:p14="http://schemas.microsoft.com/office/powerpoint/2010/main" val="1024086991"/>
+      </p:ext>
+    </p:extLst>
+  </p:cSld>
+  <p:clrMapOvr>
+    <a:masterClrMapping/>
+  </p:clrMapOvr>
+</p:notes>
+</file>
+
+<file path=ppt/notesSlides/notesSlide12.xml><?xml version="1.0" encoding="utf-8"?>
+<p:notes xmlns:a="http://schemas.openxmlformats.org/drawingml/2006/main" xmlns:r="http://schemas.openxmlformats.org/officeDocument/2006/relationships" xmlns:p="http://schemas.openxmlformats.org/presentationml/2006/main">
+  <p:cSld>
+    <p:spTree>
+      <p:nvGrpSpPr>
+        <p:cNvPr id="1" name=""/>
+        <p:cNvGrpSpPr/>
+        <p:nvPr/>
+      </p:nvGrpSpPr>
+      <p:grpSpPr>
+        <a:xfrm>
+          <a:off x="0" y="0"/>
+          <a:ext cx="0" cy="0"/>
+          <a:chOff x="0" y="0"/>
+          <a:chExt cx="0" cy="0"/>
+        </a:xfrm>
+      </p:grpSpPr>
+      <p:sp>
+        <p:nvSpPr>
+          <p:cNvPr id="2" name="Slide Image Placeholder 1"/>
+          <p:cNvSpPr>
+            <a:spLocks noGrp="1" noRot="1" noChangeAspect="1"/>
+          </p:cNvSpPr>
+          <p:nvPr>
+            <p:ph type="sldImg"/>
+          </p:nvPr>
+        </p:nvSpPr>
+        <p:spPr/>
+      </p:sp>
+      <p:sp>
+        <p:nvSpPr>
+          <p:cNvPr id="3" name="Notes Placeholder 2"/>
+          <p:cNvSpPr>
+            <a:spLocks noGrp="1"/>
+          </p:cNvSpPr>
+          <p:nvPr>
+            <p:ph type="body" idx="1"/>
+          </p:nvPr>
+        </p:nvSpPr>
+        <p:spPr/>
+        <p:txBody>
+          <a:bodyPr/>
+          <a:lstStyle/>
+          <a:p>
+            <a:r>
+              <a:rPr lang="en-US" dirty="0"/>
+              <a:t/>
+            </a:r>
+            <a:endParaRPr lang="en-US" dirty="0"/>
+          </a:p>
+        </p:txBody>
+      </p:sp>
+      <p:sp>
+        <p:nvSpPr>
+          <p:cNvPr id="4" name="Slide Number Placeholder 3"/>
+          <p:cNvSpPr>
+            <a:spLocks noGrp="1"/>
+          </p:cNvSpPr>
+          <p:nvPr>
+            <p:ph type="sldNum" sz="quarter" idx="10"/>
+          </p:nvPr>
+        </p:nvSpPr>
+        <p:spPr/>
+        <p:txBody>
+          <a:bodyPr/>
+          <a:lstStyle/>
+          <a:p>
+            <a:fld id="{F7021451-1387-4CA6-816F-3879F97B5CBC}" type="slidenum">
+              <a:rPr lang="en-US"/>
+              <a:t>12</a:t>
+            </a:fld>
+            <a:endParaRPr lang="en-US"/>
+          </a:p>
+        </p:txBody>
+      </p:sp>
+    </p:spTree>
+    <p:extLst>
+      <p:ext uri="{BB962C8B-B14F-4D97-AF65-F5344CB8AC3E}">
+        <p14:creationId xmlns:p14="http://schemas.microsoft.com/office/powerpoint/2010/main" val="1024086991"/>
+      </p:ext>
+    </p:extLst>
+  </p:cSld>
+  <p:clrMapOvr>
+    <a:masterClrMapping/>
+  </p:clrMapOvr>
+</p:notes>
+</file>
+
+<file path=ppt/notesSlides/notesSlide13.xml><?xml version="1.0" encoding="utf-8"?>
+<p:notes xmlns:a="http://schemas.openxmlformats.org/drawingml/2006/main" xmlns:r="http://schemas.openxmlformats.org/officeDocument/2006/relationships" xmlns:p="http://schemas.openxmlformats.org/presentationml/2006/main">
+  <p:cSld>
+    <p:spTree>
+      <p:nvGrpSpPr>
+        <p:cNvPr id="1" name=""/>
+        <p:cNvGrpSpPr/>
+        <p:nvPr/>
+      </p:nvGrpSpPr>
+      <p:grpSpPr>
+        <a:xfrm>
+          <a:off x="0" y="0"/>
+          <a:ext cx="0" cy="0"/>
+          <a:chOff x="0" y="0"/>
+          <a:chExt cx="0" cy="0"/>
+        </a:xfrm>
+      </p:grpSpPr>
+      <p:sp>
+        <p:nvSpPr>
+          <p:cNvPr id="2" name="Slide Image Placeholder 1"/>
+          <p:cNvSpPr>
+            <a:spLocks noGrp="1" noRot="1" noChangeAspect="1"/>
+          </p:cNvSpPr>
+          <p:nvPr>
+            <p:ph type="sldImg"/>
+          </p:nvPr>
+        </p:nvSpPr>
+        <p:spPr/>
+      </p:sp>
+      <p:sp>
+        <p:nvSpPr>
+          <p:cNvPr id="3" name="Notes Placeholder 2"/>
+          <p:cNvSpPr>
+            <a:spLocks noGrp="1"/>
+          </p:cNvSpPr>
+          <p:nvPr>
+            <p:ph type="body" idx="1"/>
+          </p:nvPr>
+        </p:nvSpPr>
+        <p:spPr/>
+        <p:txBody>
+          <a:bodyPr/>
+          <a:lstStyle/>
+          <a:p>
+            <a:r>
+              <a:rPr lang="en-US" dirty="0"/>
+              <a:t/>
+            </a:r>
+            <a:endParaRPr lang="en-US" dirty="0"/>
+          </a:p>
+        </p:txBody>
+      </p:sp>
+      <p:sp>
+        <p:nvSpPr>
+          <p:cNvPr id="4" name="Slide Number Placeholder 3"/>
+          <p:cNvSpPr>
+            <a:spLocks noGrp="1"/>
+          </p:cNvSpPr>
+          <p:nvPr>
+            <p:ph type="sldNum" sz="quarter" idx="10"/>
+          </p:nvPr>
+        </p:nvSpPr>
+        <p:spPr/>
+        <p:txBody>
+          <a:bodyPr/>
+          <a:lstStyle/>
+          <a:p>
+            <a:fld id="{F7021451-1387-4CA6-816F-3879F97B5CBC}" type="slidenum">
+              <a:rPr lang="en-US"/>
+              <a:t>13</a:t>
+            </a:fld>
+            <a:endParaRPr lang="en-US"/>
+          </a:p>
+        </p:txBody>
+      </p:sp>
+    </p:spTree>
+    <p:extLst>
+      <p:ext uri="{BB962C8B-B14F-4D97-AF65-F5344CB8AC3E}">
+        <p14:creationId xmlns:p14="http://schemas.microsoft.com/office/powerpoint/2010/main" val="1024086991"/>
+      </p:ext>
+    </p:extLst>
+  </p:cSld>
+  <p:clrMapOvr>
+    <a:masterClrMapping/>
+  </p:clrMapOvr>
+</p:notes>
+</file>
+
+<file path=ppt/notesSlides/notesSlide14.xml><?xml version="1.0" encoding="utf-8"?>
+<p:notes xmlns:a="http://schemas.openxmlformats.org/drawingml/2006/main" xmlns:r="http://schemas.openxmlformats.org/officeDocument/2006/relationships" xmlns:p="http://schemas.openxmlformats.org/presentationml/2006/main">
+  <p:cSld>
+    <p:spTree>
+      <p:nvGrpSpPr>
+        <p:cNvPr id="1" name=""/>
+        <p:cNvGrpSpPr/>
+        <p:nvPr/>
+      </p:nvGrpSpPr>
+      <p:grpSpPr>
+        <a:xfrm>
+          <a:off x="0" y="0"/>
+          <a:ext cx="0" cy="0"/>
+          <a:chOff x="0" y="0"/>
+          <a:chExt cx="0" cy="0"/>
+        </a:xfrm>
+      </p:grpSpPr>
+      <p:sp>
+        <p:nvSpPr>
+          <p:cNvPr id="2" name="Slide Image Placeholder 1"/>
+          <p:cNvSpPr>
+            <a:spLocks noGrp="1" noRot="1" noChangeAspect="1"/>
+          </p:cNvSpPr>
+          <p:nvPr>
+            <p:ph type="sldImg"/>
+          </p:nvPr>
+        </p:nvSpPr>
+        <p:spPr/>
+      </p:sp>
+      <p:sp>
+        <p:nvSpPr>
+          <p:cNvPr id="3" name="Notes Placeholder 2"/>
+          <p:cNvSpPr>
+            <a:spLocks noGrp="1"/>
+          </p:cNvSpPr>
+          <p:nvPr>
+            <p:ph type="body" idx="1"/>
+          </p:nvPr>
+        </p:nvSpPr>
+        <p:spPr/>
+        <p:txBody>
+          <a:bodyPr/>
+          <a:lstStyle/>
+          <a:p>
+            <a:r>
+              <a:rPr lang="en-US" dirty="0"/>
+              <a:t/>
+            </a:r>
+            <a:endParaRPr lang="en-US" dirty="0"/>
+          </a:p>
+        </p:txBody>
+      </p:sp>
+      <p:sp>
+        <p:nvSpPr>
+          <p:cNvPr id="4" name="Slide Number Placeholder 3"/>
+          <p:cNvSpPr>
+            <a:spLocks noGrp="1"/>
+          </p:cNvSpPr>
+          <p:nvPr>
+            <p:ph type="sldNum" sz="quarter" idx="10"/>
+          </p:nvPr>
+        </p:nvSpPr>
+        <p:spPr/>
+        <p:txBody>
+          <a:bodyPr/>
+          <a:lstStyle/>
+          <a:p>
+            <a:fld id="{F7021451-1387-4CA6-816F-3879F97B5CBC}" type="slidenum">
+              <a:rPr lang="en-US"/>
+              <a:t>14</a:t>
             </a:fld>
             <a:endParaRPr lang="en-US"/>
           </a:p>
@@ -1940,7 +2207,7 @@
                 <a:ea typeface="Fraunces" pitchFamily="34" charset="-122"/>
                 <a:cs typeface="Fraunces" pitchFamily="34" charset="-120"/>
               </a:rPr>
-              <a:t>1 / 11</a:t>
+              <a:t>1 / 14</a:t>
             </a:r>
             <a:endParaRPr lang="en-US" sz="1000" dirty="0"/>
           </a:p>
@@ -2469,7 +2736,7 @@
                 <a:ea typeface="Fraunces" pitchFamily="34" charset="-122"/>
                 <a:cs typeface="Fraunces" pitchFamily="34" charset="-120"/>
               </a:rPr>
-              <a:t>10 / 11</a:t>
+              <a:t>10 / 14</a:t>
             </a:r>
             <a:endParaRPr lang="en-US" sz="1000" dirty="0"/>
           </a:p>
@@ -2483,8 +2750,8 @@
         </p:nvSpPr>
         <p:spPr>
           <a:xfrm>
-            <a:off x="548640" y="868680"/>
-            <a:ext cx="9144000" cy="411480"/>
+            <a:off x="548640" y="1371600"/>
+            <a:ext cx="2651760" cy="365760"/>
           </a:xfrm>
           <a:prstGeom prst="rect">
             <a:avLst/>
@@ -2508,7 +2775,7 @@
                 <a:ea typeface="Fraunces" pitchFamily="34" charset="-122"/>
                 <a:cs typeface="Fraunces" pitchFamily="34" charset="-120"/>
               </a:rPr>
-              <a:t>THE REST OF THE STORY · 남은 이야기</a:t>
+              <a:t>PERSON 1</a:t>
             </a:r>
             <a:endParaRPr lang="en-US" sz="1800" dirty="0"/>
           </a:p>
@@ -2516,118 +2783,260 @@
       </p:sp>
       <p:sp>
         <p:nvSpPr>
-          <p:cNvPr id="8" name="Shape 6"/>
-          <p:cNvSpPr/>
-          <p:nvPr/>
-        </p:nvSpPr>
-        <p:spPr>
-          <a:xfrm>
-            <a:off x="493776" y="1362456"/>
-            <a:ext cx="2761488" cy="1841659"/>
-          </a:xfrm>
-          <a:prstGeom prst="rect">
+          <p:cNvPr id="8" name="Text 6"/>
+          <p:cNvSpPr/>
+          <p:nvPr/>
+        </p:nvSpPr>
+        <p:spPr>
+          <a:xfrm>
+            <a:off x="548640" y="1645920"/>
+            <a:ext cx="2651760" cy="2377440"/>
+          </a:xfrm>
+          <a:prstGeom prst="rect">
+            <a:avLst/>
+          </a:prstGeom>
+          <a:noFill/>
+          <a:ln/>
+        </p:spPr>
+        <p:txBody>
+          <a:bodyPr wrap="square" rtlCol="0" anchor="t"/>
+          <a:lstStyle/>
+          <a:p>
+            <a:pPr algn="ctr" indent="0" marL="0">
+              <a:buNone/>
+            </a:pPr>
+            <a:r>
+              <a:rPr lang="en-US" sz="19000" b="1" dirty="0">
+                <a:solidFill>
+                  <a:srgbClr val="F6F1E7"/>
+                </a:solidFill>
+                <a:latin typeface="Fraunces" pitchFamily="34" charset="0"/>
+                <a:ea typeface="Fraunces" pitchFamily="34" charset="-122"/>
+                <a:cs typeface="Fraunces" pitchFamily="34" charset="-120"/>
+              </a:rPr>
+              <a:t>?</a:t>
+            </a:r>
+            <a:endParaRPr lang="en-US" sz="19000" dirty="0"/>
+          </a:p>
+        </p:txBody>
+      </p:sp>
+      <p:sp>
+        <p:nvSpPr>
+          <p:cNvPr id="9" name="Shape 7"/>
+          <p:cNvSpPr/>
+          <p:nvPr/>
+        </p:nvSpPr>
+        <p:spPr>
+          <a:xfrm>
+            <a:off x="594360" y="4343400"/>
+            <a:ext cx="256032" cy="256032"/>
+          </a:xfrm>
+          <a:prstGeom prst="ellipse">
             <a:avLst/>
           </a:prstGeom>
           <a:solidFill>
-            <a:srgbClr val="F6F1E7"/>
+            <a:srgbClr val="C89B3C"/>
           </a:solidFill>
           <a:ln w="12700">
             <a:solidFill>
-              <a:srgbClr val="F6F1E7"/>
+              <a:srgbClr val="C89B3C"/>
             </a:solidFill>
             <a:prstDash val="solid"/>
           </a:ln>
         </p:spPr>
       </p:sp>
-      <p:pic>
-        <p:nvPicPr>
-          <p:cNvPr id="9" name="Image 0" descr="/Users/logosguru/Code/retreat2026/out/icebreaker/people/01-kim-jimi-solo.jpg">    </p:cNvPr>
-          <p:cNvPicPr>
-            <a:picLocks noChangeAspect="1"/>
-          </p:cNvPicPr>
-          <p:nvPr/>
-        </p:nvPicPr>
-        <p:blipFill>
-          <a:blip r:embed="rId1"/>
-          <a:stretch>
-            <a:fillRect/>
-          </a:stretch>
-        </p:blipFill>
-        <p:spPr>
-          <a:xfrm>
-            <a:off x="548640" y="1417320"/>
-            <a:ext cx="2651760" cy="1731931"/>
-          </a:xfrm>
-          <a:prstGeom prst="rect">
-            <a:avLst/>
-          </a:prstGeom>
-        </p:spPr>
-      </p:pic>
-      <p:sp>
-        <p:nvSpPr>
-          <p:cNvPr id="10" name="Text 7"/>
-          <p:cNvSpPr/>
-          <p:nvPr/>
-        </p:nvSpPr>
-        <p:spPr>
-          <a:xfrm>
-            <a:off x="548640" y="3332131"/>
-            <a:ext cx="2651760" cy="914400"/>
-          </a:xfrm>
-          <a:prstGeom prst="rect">
-            <a:avLst/>
-          </a:prstGeom>
-          <a:noFill/>
-          <a:ln/>
-        </p:spPr>
-        <p:txBody>
-          <a:bodyPr wrap="square" rtlCol="0" anchor="t"/>
-          <a:lstStyle/>
-          <a:p>
-            <a:pPr indent="0" marL="0">
-              <a:lnSpc>
-                <a:spcPct val="110000"/>
-              </a:lnSpc>
-              <a:buNone/>
-            </a:pPr>
-            <a:r>
-              <a:rPr lang="en-US" sz="2400" b="1" dirty="0">
-                <a:solidFill>
-                  <a:srgbClr val="F6F1E7"/>
-                </a:solidFill>
-                <a:latin typeface="Nanum Myeongjo" pitchFamily="34" charset="0"/>
-                <a:ea typeface="Nanum Myeongjo" pitchFamily="34" charset="-122"/>
-                <a:cs typeface="Nanum Myeongjo" pitchFamily="34" charset="-120"/>
-              </a:rPr>
-              <a:t>김지미 집사님</a:t>
-            </a:r>
-            <a:endParaRPr lang="en-US" sz="2400" dirty="0"/>
-          </a:p>
-          <a:p>
-            <a:pPr indent="0" marL="0">
-              <a:lnSpc>
-                <a:spcPct val="110000"/>
-              </a:lnSpc>
-              <a:buNone/>
-            </a:pPr>
-            <a:r>
-              <a:rPr lang="en-US" sz="1400" dirty="0">
-                <a:solidFill>
-                  <a:srgbClr val="DCC07F"/>
+      <p:sp>
+        <p:nvSpPr>
+          <p:cNvPr id="10" name="Shape 8"/>
+          <p:cNvSpPr/>
+          <p:nvPr/>
+        </p:nvSpPr>
+        <p:spPr>
+          <a:xfrm>
+            <a:off x="978408" y="4343400"/>
+            <a:ext cx="256032" cy="256032"/>
+          </a:xfrm>
+          <a:prstGeom prst="ellipse">
+            <a:avLst/>
+          </a:prstGeom>
+          <a:solidFill>
+            <a:srgbClr val="C89B3C"/>
+          </a:solidFill>
+          <a:ln w="12700">
+            <a:solidFill>
+              <a:srgbClr val="C89B3C"/>
+            </a:solidFill>
+            <a:prstDash val="solid"/>
+          </a:ln>
+        </p:spPr>
+      </p:sp>
+      <p:sp>
+        <p:nvSpPr>
+          <p:cNvPr id="11" name="Shape 9"/>
+          <p:cNvSpPr/>
+          <p:nvPr/>
+        </p:nvSpPr>
+        <p:spPr>
+          <a:xfrm>
+            <a:off x="1362456" y="4343400"/>
+            <a:ext cx="256032" cy="256032"/>
+          </a:xfrm>
+          <a:prstGeom prst="ellipse">
+            <a:avLst/>
+          </a:prstGeom>
+          <a:solidFill>
+            <a:srgbClr val="C89B3C"/>
+          </a:solidFill>
+          <a:ln w="12700">
+            <a:solidFill>
+              <a:srgbClr val="C89B3C"/>
+            </a:solidFill>
+            <a:prstDash val="solid"/>
+          </a:ln>
+        </p:spPr>
+      </p:sp>
+      <p:sp>
+        <p:nvSpPr>
+          <p:cNvPr id="12" name="Shape 10"/>
+          <p:cNvSpPr/>
+          <p:nvPr/>
+        </p:nvSpPr>
+        <p:spPr>
+          <a:xfrm>
+            <a:off x="1746504" y="4343400"/>
+            <a:ext cx="256032" cy="256032"/>
+          </a:xfrm>
+          <a:prstGeom prst="ellipse">
+            <a:avLst/>
+          </a:prstGeom>
+          <a:solidFill>
+            <a:srgbClr val="C89B3C"/>
+          </a:solidFill>
+          <a:ln w="12700">
+            <a:solidFill>
+              <a:srgbClr val="C89B3C"/>
+            </a:solidFill>
+            <a:prstDash val="solid"/>
+          </a:ln>
+        </p:spPr>
+      </p:sp>
+      <p:sp>
+        <p:nvSpPr>
+          <p:cNvPr id="13" name="Shape 11"/>
+          <p:cNvSpPr/>
+          <p:nvPr/>
+        </p:nvSpPr>
+        <p:spPr>
+          <a:xfrm>
+            <a:off x="2130552" y="4343400"/>
+            <a:ext cx="256032" cy="256032"/>
+          </a:xfrm>
+          <a:prstGeom prst="ellipse">
+            <a:avLst/>
+          </a:prstGeom>
+          <a:solidFill>
+            <a:srgbClr val="C89B3C"/>
+          </a:solidFill>
+          <a:ln w="12700">
+            <a:solidFill>
+              <a:srgbClr val="C89B3C"/>
+            </a:solidFill>
+            <a:prstDash val="solid"/>
+          </a:ln>
+        </p:spPr>
+      </p:sp>
+      <p:sp>
+        <p:nvSpPr>
+          <p:cNvPr id="14" name="Shape 12"/>
+          <p:cNvSpPr/>
+          <p:nvPr/>
+        </p:nvSpPr>
+        <p:spPr>
+          <a:xfrm>
+            <a:off x="2514600" y="4343400"/>
+            <a:ext cx="256032" cy="256032"/>
+          </a:xfrm>
+          <a:prstGeom prst="ellipse">
+            <a:avLst/>
+          </a:prstGeom>
+          <a:solidFill>
+            <a:srgbClr val="C89B3C"/>
+          </a:solidFill>
+          <a:ln w="12700">
+            <a:solidFill>
+              <a:srgbClr val="C89B3C"/>
+            </a:solidFill>
+            <a:prstDash val="solid"/>
+          </a:ln>
+        </p:spPr>
+      </p:sp>
+      <p:sp>
+        <p:nvSpPr>
+          <p:cNvPr id="15" name="Shape 13"/>
+          <p:cNvSpPr/>
+          <p:nvPr/>
+        </p:nvSpPr>
+        <p:spPr>
+          <a:xfrm>
+            <a:off x="2898648" y="4343400"/>
+            <a:ext cx="256032" cy="256032"/>
+          </a:xfrm>
+          <a:prstGeom prst="ellipse">
+            <a:avLst/>
+          </a:prstGeom>
+          <a:solidFill>
+            <a:srgbClr val="C89B3C"/>
+          </a:solidFill>
+          <a:ln w="12700">
+            <a:solidFill>
+              <a:srgbClr val="C89B3C"/>
+            </a:solidFill>
+            <a:prstDash val="solid"/>
+          </a:ln>
+        </p:spPr>
+      </p:sp>
+      <p:sp>
+        <p:nvSpPr>
+          <p:cNvPr id="16" name="Text 14"/>
+          <p:cNvSpPr/>
+          <p:nvPr/>
+        </p:nvSpPr>
+        <p:spPr>
+          <a:xfrm>
+            <a:off x="548640" y="4663440"/>
+            <a:ext cx="2651760" cy="365760"/>
+          </a:xfrm>
+          <a:prstGeom prst="rect">
+            <a:avLst/>
+          </a:prstGeom>
+          <a:noFill/>
+          <a:ln/>
+        </p:spPr>
+        <p:txBody>
+          <a:bodyPr wrap="square" rtlCol="0" anchor="ctr"/>
+          <a:lstStyle/>
+          <a:p>
+            <a:pPr algn="ctr" indent="0" marL="0">
+              <a:buNone/>
+            </a:pPr>
+            <a:r>
+              <a:rPr lang="en-US" sz="1400" spc="200" kern="0" dirty="0">
+                <a:solidFill>
+                  <a:srgbClr val="A8BDB2"/>
                 </a:solidFill>
                 <a:latin typeface="Fraunces" pitchFamily="34" charset="0"/>
                 <a:ea typeface="Fraunces" pitchFamily="34" charset="-122"/>
                 <a:cs typeface="Fraunces" pitchFamily="34" charset="-120"/>
               </a:rPr>
-              <a:t>Deacon Jimi Kim</a:t>
-            </a:r>
-            <a:endParaRPr lang="en-US" sz="2400" dirty="0"/>
-          </a:p>
-        </p:txBody>
-      </p:sp>
-      <p:sp>
-        <p:nvSpPr>
-          <p:cNvPr id="11" name="Shape 8"/>
+              <a:t>HINT 7 / 7</a:t>
+            </a:r>
+            <a:endParaRPr lang="en-US" sz="1400" dirty="0"/>
+          </a:p>
+        </p:txBody>
+      </p:sp>
+      <p:sp>
+        <p:nvSpPr>
+          <p:cNvPr id="17" name="Shape 15"/>
           <p:cNvSpPr/>
           <p:nvPr/>
         </p:nvSpPr>
@@ -2652,14 +3061,117 @@
       </p:sp>
       <p:sp>
         <p:nvSpPr>
-          <p:cNvPr id="12" name="Text 9"/>
-          <p:cNvSpPr/>
-          <p:nvPr/>
-        </p:nvSpPr>
-        <p:spPr>
-          <a:xfrm>
-            <a:off x="3611880" y="1325880"/>
-            <a:ext cx="8031175" cy="1219200"/>
+          <p:cNvPr id="18" name="Text 16"/>
+          <p:cNvSpPr/>
+          <p:nvPr/>
+        </p:nvSpPr>
+        <p:spPr>
+          <a:xfrm>
+            <a:off x="3611880" y="868680"/>
+            <a:ext cx="7315200" cy="411480"/>
+          </a:xfrm>
+          <a:prstGeom prst="rect">
+            <a:avLst/>
+          </a:prstGeom>
+          <a:noFill/>
+          <a:ln/>
+        </p:spPr>
+        <p:txBody>
+          <a:bodyPr wrap="square" rtlCol="0" anchor="ctr"/>
+          <a:lstStyle/>
+          <a:p>
+            <a:pPr indent="0" marL="0">
+              <a:buNone/>
+            </a:pPr>
+            <a:r>
+              <a:rPr lang="en-US" sz="1800" spc="300" kern="0" dirty="0">
+                <a:solidFill>
+                  <a:srgbClr val="C89B3C"/>
+                </a:solidFill>
+                <a:latin typeface="Fraunces" pitchFamily="34" charset="0"/>
+                <a:ea typeface="Fraunces" pitchFamily="34" charset="-122"/>
+                <a:cs typeface="Fraunces" pitchFamily="34" charset="-120"/>
+              </a:rPr>
+              <a:t>HINT · 힌트 · PISTA</a:t>
+            </a:r>
+            <a:endParaRPr lang="en-US" sz="1800" dirty="0"/>
+          </a:p>
+        </p:txBody>
+      </p:sp>
+      <p:sp>
+        <p:nvSpPr>
+          <p:cNvPr id="19" name="Shape 17"/>
+          <p:cNvSpPr/>
+          <p:nvPr/>
+        </p:nvSpPr>
+        <p:spPr>
+          <a:xfrm>
+            <a:off x="3611880" y="1316736"/>
+            <a:ext cx="329184" cy="329184"/>
+          </a:xfrm>
+          <a:prstGeom prst="ellipse">
+            <a:avLst/>
+          </a:prstGeom>
+          <a:solidFill>
+            <a:srgbClr val="14342B"/>
+          </a:solidFill>
+          <a:ln w="12700">
+            <a:solidFill>
+              <a:srgbClr val="DCC07F"/>
+            </a:solidFill>
+            <a:prstDash val="solid"/>
+          </a:ln>
+        </p:spPr>
+      </p:sp>
+      <p:sp>
+        <p:nvSpPr>
+          <p:cNvPr id="20" name="Text 18"/>
+          <p:cNvSpPr/>
+          <p:nvPr/>
+        </p:nvSpPr>
+        <p:spPr>
+          <a:xfrm>
+            <a:off x="3611880" y="1316736"/>
+            <a:ext cx="329184" cy="329184"/>
+          </a:xfrm>
+          <a:prstGeom prst="rect">
+            <a:avLst/>
+          </a:prstGeom>
+          <a:noFill/>
+          <a:ln/>
+        </p:spPr>
+        <p:txBody>
+          <a:bodyPr wrap="square" rtlCol="0" anchor="ctr"/>
+          <a:lstStyle/>
+          <a:p>
+            <a:pPr algn="ctr" indent="0" marL="0">
+              <a:buNone/>
+            </a:pPr>
+            <a:r>
+              <a:rPr lang="en-US" sz="1200" b="1" dirty="0">
+                <a:solidFill>
+                  <a:srgbClr val="DCC07F"/>
+                </a:solidFill>
+                <a:latin typeface="Fraunces" pitchFamily="34" charset="0"/>
+                <a:ea typeface="Fraunces" pitchFamily="34" charset="-122"/>
+                <a:cs typeface="Fraunces" pitchFamily="34" charset="-120"/>
+              </a:rPr>
+              <a:t>1</a:t>
+            </a:r>
+            <a:endParaRPr lang="en-US" sz="1200" dirty="0"/>
+          </a:p>
+        </p:txBody>
+      </p:sp>
+      <p:sp>
+        <p:nvSpPr>
+          <p:cNvPr id="21" name="Text 19"/>
+          <p:cNvSpPr/>
+          <p:nvPr/>
+        </p:nvSpPr>
+        <p:spPr>
+          <a:xfrm>
+            <a:off x="4114800" y="1261872"/>
+            <a:ext cx="7528255" cy="559613"/>
           </a:xfrm>
           <a:prstGeom prst="rect">
             <a:avLst/>
@@ -2673,7 +3185,846 @@
           <a:p>
             <a:pPr indent="0" marL="0">
               <a:lnSpc>
-                <a:spcPct val="108000"/>
+                <a:spcPct val="100000"/>
+              </a:lnSpc>
+              <a:buNone/>
+            </a:pPr>
+            <a:r>
+              <a:rPr lang="en-US" sz="1200" dirty="0">
+                <a:solidFill>
+                  <a:srgbClr val="E7EAE3"/>
+                </a:solidFill>
+                <a:latin typeface="Noto Sans KR" pitchFamily="34" charset="0"/>
+                <a:ea typeface="Noto Sans KR" pitchFamily="34" charset="-122"/>
+                <a:cs typeface="Noto Sans KR" pitchFamily="34" charset="-120"/>
+              </a:rPr>
+              <a:t>제 삶의 모토는 — “현재에 만족하고 최선을 다하자”</a:t>
+            </a:r>
+            <a:endParaRPr lang="en-US" sz="1200" dirty="0"/>
+          </a:p>
+          <a:p>
+            <a:pPr indent="0" marL="0">
+              <a:lnSpc>
+                <a:spcPct val="100000"/>
+              </a:lnSpc>
+              <a:buNone/>
+            </a:pPr>
+            <a:r>
+              <a:rPr lang="en-US" sz="900" dirty="0">
+                <a:solidFill>
+                  <a:srgbClr val="A8BDB2"/>
+                </a:solidFill>
+                <a:latin typeface="Noto Sans KR" pitchFamily="34" charset="0"/>
+                <a:ea typeface="Noto Sans KR" pitchFamily="34" charset="-122"/>
+                <a:cs typeface="Noto Sans KR" pitchFamily="34" charset="-120"/>
+              </a:rPr>
+              <a:t>My life motto: “Be content with today, and give it my best.”</a:t>
+            </a:r>
+            <a:endParaRPr lang="en-US" sz="1200" dirty="0"/>
+          </a:p>
+          <a:p>
+            <a:pPr indent="0" marL="0">
+              <a:lnSpc>
+                <a:spcPct val="100000"/>
+              </a:lnSpc>
+              <a:buNone/>
+            </a:pPr>
+            <a:r>
+              <a:rPr lang="en-US" sz="900" dirty="0">
+                <a:solidFill>
+                  <a:srgbClr val="A8BDB2"/>
+                </a:solidFill>
+                <a:latin typeface="Noto Sans KR" pitchFamily="34" charset="0"/>
+                <a:ea typeface="Noto Sans KR" pitchFamily="34" charset="-122"/>
+                <a:cs typeface="Noto Sans KR" pitchFamily="34" charset="-120"/>
+              </a:rPr>
+              <a:t>Mi lema: «Estar en paz con el presente y dar lo mejor de mí».</a:t>
+            </a:r>
+            <a:endParaRPr lang="en-US" sz="1200" dirty="0"/>
+          </a:p>
+        </p:txBody>
+      </p:sp>
+      <p:sp>
+        <p:nvSpPr>
+          <p:cNvPr id="22" name="Shape 20"/>
+          <p:cNvSpPr/>
+          <p:nvPr/>
+        </p:nvSpPr>
+        <p:spPr>
+          <a:xfrm>
+            <a:off x="3611880" y="1876349"/>
+            <a:ext cx="329184" cy="329184"/>
+          </a:xfrm>
+          <a:prstGeom prst="ellipse">
+            <a:avLst/>
+          </a:prstGeom>
+          <a:solidFill>
+            <a:srgbClr val="14342B"/>
+          </a:solidFill>
+          <a:ln w="12700">
+            <a:solidFill>
+              <a:srgbClr val="DCC07F"/>
+            </a:solidFill>
+            <a:prstDash val="solid"/>
+          </a:ln>
+        </p:spPr>
+      </p:sp>
+      <p:sp>
+        <p:nvSpPr>
+          <p:cNvPr id="23" name="Text 21"/>
+          <p:cNvSpPr/>
+          <p:nvPr/>
+        </p:nvSpPr>
+        <p:spPr>
+          <a:xfrm>
+            <a:off x="3611880" y="1876349"/>
+            <a:ext cx="329184" cy="329184"/>
+          </a:xfrm>
+          <a:prstGeom prst="rect">
+            <a:avLst/>
+          </a:prstGeom>
+          <a:noFill/>
+          <a:ln/>
+        </p:spPr>
+        <p:txBody>
+          <a:bodyPr wrap="square" rtlCol="0" anchor="ctr"/>
+          <a:lstStyle/>
+          <a:p>
+            <a:pPr algn="ctr" indent="0" marL="0">
+              <a:buNone/>
+            </a:pPr>
+            <a:r>
+              <a:rPr lang="en-US" sz="1200" b="1" dirty="0">
+                <a:solidFill>
+                  <a:srgbClr val="DCC07F"/>
+                </a:solidFill>
+                <a:latin typeface="Fraunces" pitchFamily="34" charset="0"/>
+                <a:ea typeface="Fraunces" pitchFamily="34" charset="-122"/>
+                <a:cs typeface="Fraunces" pitchFamily="34" charset="-120"/>
+              </a:rPr>
+              <a:t>2</a:t>
+            </a:r>
+            <a:endParaRPr lang="en-US" sz="1200" dirty="0"/>
+          </a:p>
+        </p:txBody>
+      </p:sp>
+      <p:sp>
+        <p:nvSpPr>
+          <p:cNvPr id="24" name="Text 22"/>
+          <p:cNvSpPr/>
+          <p:nvPr/>
+        </p:nvSpPr>
+        <p:spPr>
+          <a:xfrm>
+            <a:off x="4114800" y="1821485"/>
+            <a:ext cx="7528255" cy="559613"/>
+          </a:xfrm>
+          <a:prstGeom prst="rect">
+            <a:avLst/>
+          </a:prstGeom>
+          <a:noFill/>
+          <a:ln/>
+        </p:spPr>
+        <p:txBody>
+          <a:bodyPr wrap="square" rtlCol="0" anchor="t"/>
+          <a:lstStyle/>
+          <a:p>
+            <a:pPr indent="0" marL="0">
+              <a:lnSpc>
+                <a:spcPct val="100000"/>
+              </a:lnSpc>
+              <a:buNone/>
+            </a:pPr>
+            <a:r>
+              <a:rPr lang="en-US" sz="1200" dirty="0">
+                <a:solidFill>
+                  <a:srgbClr val="E7EAE3"/>
+                </a:solidFill>
+                <a:latin typeface="Noto Sans KR" pitchFamily="34" charset="0"/>
+                <a:ea typeface="Noto Sans KR" pitchFamily="34" charset="-122"/>
+                <a:cs typeface="Noto Sans KR" pitchFamily="34" charset="-120"/>
+              </a:rPr>
+              <a:t>가장 좋아하는 음식은 냉면입니다.</a:t>
+            </a:r>
+            <a:endParaRPr lang="en-US" sz="1200" dirty="0"/>
+          </a:p>
+          <a:p>
+            <a:pPr indent="0" marL="0">
+              <a:lnSpc>
+                <a:spcPct val="100000"/>
+              </a:lnSpc>
+              <a:buNone/>
+            </a:pPr>
+            <a:r>
+              <a:rPr lang="en-US" sz="900" dirty="0">
+                <a:solidFill>
+                  <a:srgbClr val="A8BDB2"/>
+                </a:solidFill>
+                <a:latin typeface="Noto Sans KR" pitchFamily="34" charset="0"/>
+                <a:ea typeface="Noto Sans KR" pitchFamily="34" charset="-122"/>
+                <a:cs typeface="Noto Sans KR" pitchFamily="34" charset="-120"/>
+              </a:rPr>
+              <a:t>My favorite food is naengmyeon — Korean cold noodles.</a:t>
+            </a:r>
+            <a:endParaRPr lang="en-US" sz="1200" dirty="0"/>
+          </a:p>
+          <a:p>
+            <a:pPr indent="0" marL="0">
+              <a:lnSpc>
+                <a:spcPct val="100000"/>
+              </a:lnSpc>
+              <a:buNone/>
+            </a:pPr>
+            <a:r>
+              <a:rPr lang="en-US" sz="900" dirty="0">
+                <a:solidFill>
+                  <a:srgbClr val="A8BDB2"/>
+                </a:solidFill>
+                <a:latin typeface="Noto Sans KR" pitchFamily="34" charset="0"/>
+                <a:ea typeface="Noto Sans KR" pitchFamily="34" charset="-122"/>
+                <a:cs typeface="Noto Sans KR" pitchFamily="34" charset="-120"/>
+              </a:rPr>
+              <a:t>Mi comida favorita es el naengmyeon, fideos fríos coreanos.</a:t>
+            </a:r>
+            <a:endParaRPr lang="en-US" sz="1200" dirty="0"/>
+          </a:p>
+        </p:txBody>
+      </p:sp>
+      <p:sp>
+        <p:nvSpPr>
+          <p:cNvPr id="25" name="Shape 23"/>
+          <p:cNvSpPr/>
+          <p:nvPr/>
+        </p:nvSpPr>
+        <p:spPr>
+          <a:xfrm>
+            <a:off x="3611880" y="2435962"/>
+            <a:ext cx="329184" cy="329184"/>
+          </a:xfrm>
+          <a:prstGeom prst="ellipse">
+            <a:avLst/>
+          </a:prstGeom>
+          <a:solidFill>
+            <a:srgbClr val="14342B"/>
+          </a:solidFill>
+          <a:ln w="12700">
+            <a:solidFill>
+              <a:srgbClr val="DCC07F"/>
+            </a:solidFill>
+            <a:prstDash val="solid"/>
+          </a:ln>
+        </p:spPr>
+      </p:sp>
+      <p:sp>
+        <p:nvSpPr>
+          <p:cNvPr id="26" name="Text 24"/>
+          <p:cNvSpPr/>
+          <p:nvPr/>
+        </p:nvSpPr>
+        <p:spPr>
+          <a:xfrm>
+            <a:off x="3611880" y="2435962"/>
+            <a:ext cx="329184" cy="329184"/>
+          </a:xfrm>
+          <a:prstGeom prst="rect">
+            <a:avLst/>
+          </a:prstGeom>
+          <a:noFill/>
+          <a:ln/>
+        </p:spPr>
+        <p:txBody>
+          <a:bodyPr wrap="square" rtlCol="0" anchor="ctr"/>
+          <a:lstStyle/>
+          <a:p>
+            <a:pPr algn="ctr" indent="0" marL="0">
+              <a:buNone/>
+            </a:pPr>
+            <a:r>
+              <a:rPr lang="en-US" sz="1200" b="1" dirty="0">
+                <a:solidFill>
+                  <a:srgbClr val="DCC07F"/>
+                </a:solidFill>
+                <a:latin typeface="Fraunces" pitchFamily="34" charset="0"/>
+                <a:ea typeface="Fraunces" pitchFamily="34" charset="-122"/>
+                <a:cs typeface="Fraunces" pitchFamily="34" charset="-120"/>
+              </a:rPr>
+              <a:t>3</a:t>
+            </a:r>
+            <a:endParaRPr lang="en-US" sz="1200" dirty="0"/>
+          </a:p>
+        </p:txBody>
+      </p:sp>
+      <p:sp>
+        <p:nvSpPr>
+          <p:cNvPr id="27" name="Text 25"/>
+          <p:cNvSpPr/>
+          <p:nvPr/>
+        </p:nvSpPr>
+        <p:spPr>
+          <a:xfrm>
+            <a:off x="4114800" y="2381098"/>
+            <a:ext cx="7528255" cy="411480"/>
+          </a:xfrm>
+          <a:prstGeom prst="rect">
+            <a:avLst/>
+          </a:prstGeom>
+          <a:noFill/>
+          <a:ln/>
+        </p:spPr>
+        <p:txBody>
+          <a:bodyPr wrap="square" rtlCol="0" anchor="t"/>
+          <a:lstStyle/>
+          <a:p>
+            <a:pPr indent="0" marL="0">
+              <a:lnSpc>
+                <a:spcPct val="100000"/>
+              </a:lnSpc>
+              <a:buNone/>
+            </a:pPr>
+            <a:r>
+              <a:rPr lang="en-US" sz="1200" dirty="0">
+                <a:solidFill>
+                  <a:srgbClr val="E7EAE3"/>
+                </a:solidFill>
+                <a:latin typeface="Noto Sans KR" pitchFamily="34" charset="0"/>
+                <a:ea typeface="Noto Sans KR" pitchFamily="34" charset="-122"/>
+                <a:cs typeface="Noto Sans KR" pitchFamily="34" charset="-120"/>
+              </a:rPr>
+              <a:t>경기도 안성에서 태어났습니다.</a:t>
+            </a:r>
+            <a:endParaRPr lang="en-US" sz="1200" dirty="0"/>
+          </a:p>
+          <a:p>
+            <a:pPr indent="0" marL="0">
+              <a:lnSpc>
+                <a:spcPct val="100000"/>
+              </a:lnSpc>
+              <a:buNone/>
+            </a:pPr>
+            <a:r>
+              <a:rPr lang="en-US" sz="900" dirty="0">
+                <a:solidFill>
+                  <a:srgbClr val="A8BDB2"/>
+                </a:solidFill>
+                <a:latin typeface="Noto Sans KR" pitchFamily="34" charset="0"/>
+                <a:ea typeface="Noto Sans KR" pitchFamily="34" charset="-122"/>
+                <a:cs typeface="Noto Sans KR" pitchFamily="34" charset="-120"/>
+              </a:rPr>
+              <a:t>I was born in Anseong, Gyeonggi Province, Korea.   ·   Nací en Anseong, provincia de Gyeonggi, Corea.</a:t>
+            </a:r>
+            <a:endParaRPr lang="en-US" sz="1200" dirty="0"/>
+          </a:p>
+        </p:txBody>
+      </p:sp>
+      <p:sp>
+        <p:nvSpPr>
+          <p:cNvPr id="28" name="Shape 26"/>
+          <p:cNvSpPr/>
+          <p:nvPr/>
+        </p:nvSpPr>
+        <p:spPr>
+          <a:xfrm>
+            <a:off x="3611880" y="2847442"/>
+            <a:ext cx="329184" cy="329184"/>
+          </a:xfrm>
+          <a:prstGeom prst="ellipse">
+            <a:avLst/>
+          </a:prstGeom>
+          <a:solidFill>
+            <a:srgbClr val="14342B"/>
+          </a:solidFill>
+          <a:ln w="12700">
+            <a:solidFill>
+              <a:srgbClr val="DCC07F"/>
+            </a:solidFill>
+            <a:prstDash val="solid"/>
+          </a:ln>
+        </p:spPr>
+      </p:sp>
+      <p:sp>
+        <p:nvSpPr>
+          <p:cNvPr id="29" name="Text 27"/>
+          <p:cNvSpPr/>
+          <p:nvPr/>
+        </p:nvSpPr>
+        <p:spPr>
+          <a:xfrm>
+            <a:off x="3611880" y="2847442"/>
+            <a:ext cx="329184" cy="329184"/>
+          </a:xfrm>
+          <a:prstGeom prst="rect">
+            <a:avLst/>
+          </a:prstGeom>
+          <a:noFill/>
+          <a:ln/>
+        </p:spPr>
+        <p:txBody>
+          <a:bodyPr wrap="square" rtlCol="0" anchor="ctr"/>
+          <a:lstStyle/>
+          <a:p>
+            <a:pPr algn="ctr" indent="0" marL="0">
+              <a:buNone/>
+            </a:pPr>
+            <a:r>
+              <a:rPr lang="en-US" sz="1200" b="1" dirty="0">
+                <a:solidFill>
+                  <a:srgbClr val="DCC07F"/>
+                </a:solidFill>
+                <a:latin typeface="Fraunces" pitchFamily="34" charset="0"/>
+                <a:ea typeface="Fraunces" pitchFamily="34" charset="-122"/>
+                <a:cs typeface="Fraunces" pitchFamily="34" charset="-120"/>
+              </a:rPr>
+              <a:t>4</a:t>
+            </a:r>
+            <a:endParaRPr lang="en-US" sz="1200" dirty="0"/>
+          </a:p>
+        </p:txBody>
+      </p:sp>
+      <p:sp>
+        <p:nvSpPr>
+          <p:cNvPr id="30" name="Text 28"/>
+          <p:cNvSpPr/>
+          <p:nvPr/>
+        </p:nvSpPr>
+        <p:spPr>
+          <a:xfrm>
+            <a:off x="4114800" y="2792578"/>
+            <a:ext cx="7528255" cy="559613"/>
+          </a:xfrm>
+          <a:prstGeom prst="rect">
+            <a:avLst/>
+          </a:prstGeom>
+          <a:noFill/>
+          <a:ln/>
+        </p:spPr>
+        <p:txBody>
+          <a:bodyPr wrap="square" rtlCol="0" anchor="t"/>
+          <a:lstStyle/>
+          <a:p>
+            <a:pPr indent="0" marL="0">
+              <a:lnSpc>
+                <a:spcPct val="100000"/>
+              </a:lnSpc>
+              <a:buNone/>
+            </a:pPr>
+            <a:r>
+              <a:rPr lang="en-US" sz="1200" dirty="0">
+                <a:solidFill>
+                  <a:srgbClr val="E7EAE3"/>
+                </a:solidFill>
+                <a:latin typeface="Noto Sans KR" pitchFamily="34" charset="0"/>
+                <a:ea typeface="Noto Sans KR" pitchFamily="34" charset="-122"/>
+                <a:cs typeface="Noto Sans KR" pitchFamily="34" charset="-120"/>
+              </a:rPr>
+              <a:t>좋아하는 곳은 시온성전, 좋아하는 시간은 점심 교제와 구역예배입니다.</a:t>
+            </a:r>
+            <a:endParaRPr lang="en-US" sz="1200" dirty="0"/>
+          </a:p>
+          <a:p>
+            <a:pPr indent="0" marL="0">
+              <a:lnSpc>
+                <a:spcPct val="100000"/>
+              </a:lnSpc>
+              <a:buNone/>
+            </a:pPr>
+            <a:r>
+              <a:rPr lang="en-US" sz="900" dirty="0">
+                <a:solidFill>
+                  <a:srgbClr val="A8BDB2"/>
+                </a:solidFill>
+                <a:latin typeface="Noto Sans KR" pitchFamily="34" charset="0"/>
+                <a:ea typeface="Noto Sans KR" pitchFamily="34" charset="-122"/>
+                <a:cs typeface="Noto Sans KR" pitchFamily="34" charset="-120"/>
+              </a:rPr>
+              <a:t>Favorite place: the Zion Sanctuary. Favorite time: lunch fellowship and district worship.</a:t>
+            </a:r>
+            <a:endParaRPr lang="en-US" sz="1200" dirty="0"/>
+          </a:p>
+          <a:p>
+            <a:pPr indent="0" marL="0">
+              <a:lnSpc>
+                <a:spcPct val="100000"/>
+              </a:lnSpc>
+              <a:buNone/>
+            </a:pPr>
+            <a:r>
+              <a:rPr lang="en-US" sz="900" dirty="0">
+                <a:solidFill>
+                  <a:srgbClr val="A8BDB2"/>
+                </a:solidFill>
+                <a:latin typeface="Noto Sans KR" pitchFamily="34" charset="0"/>
+                <a:ea typeface="Noto Sans KR" pitchFamily="34" charset="-122"/>
+                <a:cs typeface="Noto Sans KR" pitchFamily="34" charset="-120"/>
+              </a:rPr>
+              <a:t>Lugar favorito: el Santuario Sion. Momento favorito: el almuerzo y el culto de distrito.</a:t>
+            </a:r>
+            <a:endParaRPr lang="en-US" sz="1200" dirty="0"/>
+          </a:p>
+        </p:txBody>
+      </p:sp>
+      <p:sp>
+        <p:nvSpPr>
+          <p:cNvPr id="31" name="Shape 29"/>
+          <p:cNvSpPr/>
+          <p:nvPr/>
+        </p:nvSpPr>
+        <p:spPr>
+          <a:xfrm>
+            <a:off x="3611880" y="3407054"/>
+            <a:ext cx="329184" cy="329184"/>
+          </a:xfrm>
+          <a:prstGeom prst="ellipse">
+            <a:avLst/>
+          </a:prstGeom>
+          <a:solidFill>
+            <a:srgbClr val="14342B"/>
+          </a:solidFill>
+          <a:ln w="12700">
+            <a:solidFill>
+              <a:srgbClr val="DCC07F"/>
+            </a:solidFill>
+            <a:prstDash val="solid"/>
+          </a:ln>
+        </p:spPr>
+      </p:sp>
+      <p:sp>
+        <p:nvSpPr>
+          <p:cNvPr id="32" name="Text 30"/>
+          <p:cNvSpPr/>
+          <p:nvPr/>
+        </p:nvSpPr>
+        <p:spPr>
+          <a:xfrm>
+            <a:off x="3611880" y="3407054"/>
+            <a:ext cx="329184" cy="329184"/>
+          </a:xfrm>
+          <a:prstGeom prst="rect">
+            <a:avLst/>
+          </a:prstGeom>
+          <a:noFill/>
+          <a:ln/>
+        </p:spPr>
+        <p:txBody>
+          <a:bodyPr wrap="square" rtlCol="0" anchor="ctr"/>
+          <a:lstStyle/>
+          <a:p>
+            <a:pPr algn="ctr" indent="0" marL="0">
+              <a:buNone/>
+            </a:pPr>
+            <a:r>
+              <a:rPr lang="en-US" sz="1200" b="1" dirty="0">
+                <a:solidFill>
+                  <a:srgbClr val="DCC07F"/>
+                </a:solidFill>
+                <a:latin typeface="Fraunces" pitchFamily="34" charset="0"/>
+                <a:ea typeface="Fraunces" pitchFamily="34" charset="-122"/>
+                <a:cs typeface="Fraunces" pitchFamily="34" charset="-120"/>
+              </a:rPr>
+              <a:t>5</a:t>
+            </a:r>
+            <a:endParaRPr lang="en-US" sz="1200" dirty="0"/>
+          </a:p>
+        </p:txBody>
+      </p:sp>
+      <p:sp>
+        <p:nvSpPr>
+          <p:cNvPr id="33" name="Text 31"/>
+          <p:cNvSpPr/>
+          <p:nvPr/>
+        </p:nvSpPr>
+        <p:spPr>
+          <a:xfrm>
+            <a:off x="4114800" y="3352190"/>
+            <a:ext cx="7528255" cy="411480"/>
+          </a:xfrm>
+          <a:prstGeom prst="rect">
+            <a:avLst/>
+          </a:prstGeom>
+          <a:noFill/>
+          <a:ln/>
+        </p:spPr>
+        <p:txBody>
+          <a:bodyPr wrap="square" rtlCol="0" anchor="t"/>
+          <a:lstStyle/>
+          <a:p>
+            <a:pPr indent="0" marL="0">
+              <a:lnSpc>
+                <a:spcPct val="100000"/>
+              </a:lnSpc>
+              <a:buNone/>
+            </a:pPr>
+            <a:r>
+              <a:rPr lang="en-US" sz="1200" dirty="0">
+                <a:solidFill>
+                  <a:srgbClr val="E7EAE3"/>
+                </a:solidFill>
+                <a:latin typeface="Noto Sans KR" pitchFamily="34" charset="0"/>
+                <a:ea typeface="Noto Sans KR" pitchFamily="34" charset="-122"/>
+                <a:cs typeface="Noto Sans KR" pitchFamily="34" charset="-120"/>
+              </a:rPr>
+              <a:t>지금은 관리부에서 봉사하고 있습니다.</a:t>
+            </a:r>
+            <a:endParaRPr lang="en-US" sz="1200" dirty="0"/>
+          </a:p>
+          <a:p>
+            <a:pPr indent="0" marL="0">
+              <a:lnSpc>
+                <a:spcPct val="100000"/>
+              </a:lnSpc>
+              <a:buNone/>
+            </a:pPr>
+            <a:r>
+              <a:rPr lang="en-US" sz="900" dirty="0">
+                <a:solidFill>
+                  <a:srgbClr val="A8BDB2"/>
+                </a:solidFill>
+                <a:latin typeface="Noto Sans KR" pitchFamily="34" charset="0"/>
+                <a:ea typeface="Noto Sans KR" pitchFamily="34" charset="-122"/>
+                <a:cs typeface="Noto Sans KR" pitchFamily="34" charset="-120"/>
+              </a:rPr>
+              <a:t>I currently serve on the Facilities Team.   ·   Actualmente sirvo en el equipo de mantenimiento.</a:t>
+            </a:r>
+            <a:endParaRPr lang="en-US" sz="1200" dirty="0"/>
+          </a:p>
+        </p:txBody>
+      </p:sp>
+      <p:sp>
+        <p:nvSpPr>
+          <p:cNvPr id="34" name="Shape 32"/>
+          <p:cNvSpPr/>
+          <p:nvPr/>
+        </p:nvSpPr>
+        <p:spPr>
+          <a:xfrm>
+            <a:off x="3611880" y="3818534"/>
+            <a:ext cx="329184" cy="329184"/>
+          </a:xfrm>
+          <a:prstGeom prst="ellipse">
+            <a:avLst/>
+          </a:prstGeom>
+          <a:solidFill>
+            <a:srgbClr val="14342B"/>
+          </a:solidFill>
+          <a:ln w="12700">
+            <a:solidFill>
+              <a:srgbClr val="DCC07F"/>
+            </a:solidFill>
+            <a:prstDash val="solid"/>
+          </a:ln>
+        </p:spPr>
+      </p:sp>
+      <p:sp>
+        <p:nvSpPr>
+          <p:cNvPr id="35" name="Text 33"/>
+          <p:cNvSpPr/>
+          <p:nvPr/>
+        </p:nvSpPr>
+        <p:spPr>
+          <a:xfrm>
+            <a:off x="3611880" y="3818534"/>
+            <a:ext cx="329184" cy="329184"/>
+          </a:xfrm>
+          <a:prstGeom prst="rect">
+            <a:avLst/>
+          </a:prstGeom>
+          <a:noFill/>
+          <a:ln/>
+        </p:spPr>
+        <p:txBody>
+          <a:bodyPr wrap="square" rtlCol="0" anchor="ctr"/>
+          <a:lstStyle/>
+          <a:p>
+            <a:pPr algn="ctr" indent="0" marL="0">
+              <a:buNone/>
+            </a:pPr>
+            <a:r>
+              <a:rPr lang="en-US" sz="1200" b="1" dirty="0">
+                <a:solidFill>
+                  <a:srgbClr val="DCC07F"/>
+                </a:solidFill>
+                <a:latin typeface="Fraunces" pitchFamily="34" charset="0"/>
+                <a:ea typeface="Fraunces" pitchFamily="34" charset="-122"/>
+                <a:cs typeface="Fraunces" pitchFamily="34" charset="-120"/>
+              </a:rPr>
+              <a:t>6</a:t>
+            </a:r>
+            <a:endParaRPr lang="en-US" sz="1200" dirty="0"/>
+          </a:p>
+        </p:txBody>
+      </p:sp>
+      <p:sp>
+        <p:nvSpPr>
+          <p:cNvPr id="36" name="Text 34"/>
+          <p:cNvSpPr/>
+          <p:nvPr/>
+        </p:nvSpPr>
+        <p:spPr>
+          <a:xfrm>
+            <a:off x="4114800" y="3763670"/>
+            <a:ext cx="7528255" cy="411480"/>
+          </a:xfrm>
+          <a:prstGeom prst="rect">
+            <a:avLst/>
+          </a:prstGeom>
+          <a:noFill/>
+          <a:ln/>
+        </p:spPr>
+        <p:txBody>
+          <a:bodyPr wrap="square" rtlCol="0" anchor="t"/>
+          <a:lstStyle/>
+          <a:p>
+            <a:pPr indent="0" marL="0">
+              <a:lnSpc>
+                <a:spcPct val="100000"/>
+              </a:lnSpc>
+              <a:buNone/>
+            </a:pPr>
+            <a:r>
+              <a:rPr lang="en-US" sz="1200" dirty="0">
+                <a:solidFill>
+                  <a:srgbClr val="E7EAE3"/>
+                </a:solidFill>
+                <a:latin typeface="Noto Sans KR" pitchFamily="34" charset="0"/>
+                <a:ea typeface="Noto Sans KR" pitchFamily="34" charset="-122"/>
+                <a:cs typeface="Noto Sans KR" pitchFamily="34" charset="-120"/>
+              </a:rPr>
+              <a:t>늘푸른교회에 처음 온 것은 2018년 8월입니다.</a:t>
+            </a:r>
+            <a:endParaRPr lang="en-US" sz="1200" dirty="0"/>
+          </a:p>
+          <a:p>
+            <a:pPr indent="0" marL="0">
+              <a:lnSpc>
+                <a:spcPct val="100000"/>
+              </a:lnSpc>
+              <a:buNone/>
+            </a:pPr>
+            <a:r>
+              <a:rPr lang="en-US" sz="900" dirty="0">
+                <a:solidFill>
+                  <a:srgbClr val="A8BDB2"/>
+                </a:solidFill>
+                <a:latin typeface="Noto Sans KR" pitchFamily="34" charset="0"/>
+                <a:ea typeface="Noto Sans KR" pitchFamily="34" charset="-122"/>
+                <a:cs typeface="Noto Sans KR" pitchFamily="34" charset="-120"/>
+              </a:rPr>
+              <a:t>I first came to Evergreen in August 2018.   ·   Llegué a Evergreen por primera vez en agosto de 2018.</a:t>
+            </a:r>
+            <a:endParaRPr lang="en-US" sz="1200" dirty="0"/>
+          </a:p>
+        </p:txBody>
+      </p:sp>
+      <p:sp>
+        <p:nvSpPr>
+          <p:cNvPr id="37" name="Shape 35"/>
+          <p:cNvSpPr/>
+          <p:nvPr/>
+        </p:nvSpPr>
+        <p:spPr>
+          <a:xfrm>
+            <a:off x="3611880" y="4376318"/>
+            <a:ext cx="640080" cy="640080"/>
+          </a:xfrm>
+          <a:prstGeom prst="ellipse">
+            <a:avLst/>
+          </a:prstGeom>
+          <a:solidFill>
+            <a:srgbClr val="C89B3C"/>
+          </a:solidFill>
+          <a:ln w="12700">
+            <a:solidFill>
+              <a:srgbClr val="C89B3C"/>
+            </a:solidFill>
+            <a:prstDash val="solid"/>
+          </a:ln>
+        </p:spPr>
+      </p:sp>
+      <p:sp>
+        <p:nvSpPr>
+          <p:cNvPr id="38" name="Text 36"/>
+          <p:cNvSpPr/>
+          <p:nvPr/>
+        </p:nvSpPr>
+        <p:spPr>
+          <a:xfrm>
+            <a:off x="3611880" y="4376318"/>
+            <a:ext cx="640080" cy="640080"/>
+          </a:xfrm>
+          <a:prstGeom prst="rect">
+            <a:avLst/>
+          </a:prstGeom>
+          <a:noFill/>
+          <a:ln/>
+        </p:spPr>
+        <p:txBody>
+          <a:bodyPr wrap="square" rtlCol="0" anchor="ctr"/>
+          <a:lstStyle/>
+          <a:p>
+            <a:pPr algn="ctr" indent="0" marL="0">
+              <a:buNone/>
+            </a:pPr>
+            <a:r>
+              <a:rPr lang="en-US" sz="2600" b="1" dirty="0">
+                <a:solidFill>
+                  <a:srgbClr val="0E241D"/>
+                </a:solidFill>
+                <a:latin typeface="Fraunces" pitchFamily="34" charset="0"/>
+                <a:ea typeface="Fraunces" pitchFamily="34" charset="-122"/>
+                <a:cs typeface="Fraunces" pitchFamily="34" charset="-120"/>
+              </a:rPr>
+              <a:t>7</a:t>
+            </a:r>
+            <a:endParaRPr lang="en-US" sz="2600" dirty="0"/>
+          </a:p>
+        </p:txBody>
+      </p:sp>
+      <p:sp>
+        <p:nvSpPr>
+          <p:cNvPr id="39" name="Text 37"/>
+          <p:cNvSpPr/>
+          <p:nvPr/>
+        </p:nvSpPr>
+        <p:spPr>
+          <a:xfrm>
+            <a:off x="4480560" y="4266590"/>
+            <a:ext cx="7162495" cy="1814170"/>
+          </a:xfrm>
+          <a:prstGeom prst="rect">
+            <a:avLst/>
+          </a:prstGeom>
+          <a:noFill/>
+          <a:ln/>
+        </p:spPr>
+        <p:txBody>
+          <a:bodyPr wrap="square" rtlCol="0" anchor="t"/>
+          <a:lstStyle/>
+          <a:p>
+            <a:pPr indent="0" marL="0">
+              <a:lnSpc>
+                <a:spcPct val="115000"/>
+              </a:lnSpc>
+              <a:spcAft>
+                <a:spcPts val="800"/>
+              </a:spcAft>
+              <a:buNone/>
+            </a:pPr>
+            <a:r>
+              <a:rPr lang="en-US" sz="2200" b="1" dirty="0">
+                <a:solidFill>
+                  <a:srgbClr val="F6F1E7"/>
+                </a:solidFill>
+                <a:latin typeface="Nanum Myeongjo" pitchFamily="34" charset="0"/>
+                <a:ea typeface="Nanum Myeongjo" pitchFamily="34" charset="-122"/>
+                <a:cs typeface="Nanum Myeongjo" pitchFamily="34" charset="-120"/>
+              </a:rPr>
+              <a:t>미국 사람과 결혼해서 영어를 잘할 것 같지만… 사실 잘 못 합니다!</a:t>
+            </a:r>
+            <a:endParaRPr lang="en-US" sz="2200" dirty="0"/>
+          </a:p>
+          <a:p>
+            <a:pPr indent="0" marL="0">
+              <a:lnSpc>
+                <a:spcPct val="115000"/>
               </a:lnSpc>
               <a:spcAft>
                 <a:spcPts val="400"/>
@@ -2681,45 +4032,22 @@
               <a:buNone/>
             </a:pPr>
             <a:r>
-              <a:rPr lang="en-US" sz="1200" b="1" spc="100" kern="0" dirty="0">
-                <a:solidFill>
-                  <a:srgbClr val="C89B3C"/>
+              <a:rPr lang="en-US" sz="1600" dirty="0">
+                <a:solidFill>
+                  <a:srgbClr val="DCC07F"/>
                 </a:solidFill>
                 <a:latin typeface="Noto Sans KR" pitchFamily="34" charset="0"/>
                 <a:ea typeface="Noto Sans KR" pitchFamily="34" charset="-122"/>
                 <a:cs typeface="Noto Sans KR" pitchFamily="34" charset="-120"/>
               </a:rPr>
-              <a:t>늘푸른교회에 처음 온 때  ·  First came to Evergreen  ·  Primera vez en Evergreen</a:t>
-            </a:r>
-            <a:endParaRPr lang="en-US" sz="1200" dirty="0"/>
+              <a:t>I married an American, so you’d think my English is great… it’s not!</a:t>
+            </a:r>
+            <a:endParaRPr lang="en-US" sz="2200" dirty="0"/>
           </a:p>
           <a:p>
             <a:pPr indent="0" marL="0">
               <a:lnSpc>
-                <a:spcPct val="108000"/>
-              </a:lnSpc>
-              <a:spcAft>
-                <a:spcPts val="300"/>
-              </a:spcAft>
-              <a:buNone/>
-            </a:pPr>
-            <a:r>
-              <a:rPr lang="en-US" sz="2400" b="1" dirty="0">
-                <a:solidFill>
-                  <a:srgbClr val="F6F1E7"/>
-                </a:solidFill>
-                <a:latin typeface="Nanum Myeongjo" pitchFamily="34" charset="0"/>
-                <a:ea typeface="Nanum Myeongjo" pitchFamily="34" charset="-122"/>
-                <a:cs typeface="Nanum Myeongjo" pitchFamily="34" charset="-120"/>
-              </a:rPr>
-              <a:t>2018년 8월</a:t>
-            </a:r>
-            <a:endParaRPr lang="en-US" sz="1200" dirty="0"/>
-          </a:p>
-          <a:p>
-            <a:pPr indent="0" marL="0">
-              <a:lnSpc>
-                <a:spcPct val="108000"/>
+                <a:spcPct val="115000"/>
               </a:lnSpc>
               <a:buNone/>
             </a:pPr>
@@ -2732,297 +4060,9 @@
                 <a:ea typeface="Noto Sans KR" pitchFamily="34" charset="-122"/>
                 <a:cs typeface="Noto Sans KR" pitchFamily="34" charset="-120"/>
               </a:rPr>
-              <a:t>August 2018   ·   Agosto de 2018</a:t>
-            </a:r>
-            <a:endParaRPr lang="en-US" sz="1200" dirty="0"/>
-          </a:p>
-        </p:txBody>
-      </p:sp>
-      <p:sp>
-        <p:nvSpPr>
-          <p:cNvPr id="13" name="Text 10"/>
-          <p:cNvSpPr/>
-          <p:nvPr/>
-        </p:nvSpPr>
-        <p:spPr>
-          <a:xfrm>
-            <a:off x="3611880" y="2636520"/>
-            <a:ext cx="8031175" cy="1219200"/>
-          </a:xfrm>
-          <a:prstGeom prst="rect">
-            <a:avLst/>
-          </a:prstGeom>
-          <a:noFill/>
-          <a:ln/>
-        </p:spPr>
-        <p:txBody>
-          <a:bodyPr wrap="square" rtlCol="0" anchor="t"/>
-          <a:lstStyle/>
-          <a:p>
-            <a:pPr indent="0" marL="0">
-              <a:lnSpc>
-                <a:spcPct val="108000"/>
-              </a:lnSpc>
-              <a:spcAft>
-                <a:spcPts val="400"/>
-              </a:spcAft>
-              <a:buNone/>
-            </a:pPr>
-            <a:r>
-              <a:rPr lang="en-US" sz="1200" b="1" spc="100" kern="0" dirty="0">
-                <a:solidFill>
-                  <a:srgbClr val="C89B3C"/>
-                </a:solidFill>
-                <a:latin typeface="Noto Sans KR" pitchFamily="34" charset="0"/>
-                <a:ea typeface="Noto Sans KR" pitchFamily="34" charset="-122"/>
-                <a:cs typeface="Noto Sans KR" pitchFamily="34" charset="-120"/>
-              </a:rPr>
-              <a:t>봉사하는 곳  ·  Where I serve  ·  Dónde sirvo</a:t>
-            </a:r>
-            <a:endParaRPr lang="en-US" sz="1200" dirty="0"/>
-          </a:p>
-          <a:p>
-            <a:pPr indent="0" marL="0">
-              <a:lnSpc>
-                <a:spcPct val="108000"/>
-              </a:lnSpc>
-              <a:spcAft>
-                <a:spcPts val="300"/>
-              </a:spcAft>
-              <a:buNone/>
-            </a:pPr>
-            <a:r>
-              <a:rPr lang="en-US" sz="2400" b="1" dirty="0">
-                <a:solidFill>
-                  <a:srgbClr val="F6F1E7"/>
-                </a:solidFill>
-                <a:latin typeface="Nanum Myeongjo" pitchFamily="34" charset="0"/>
-                <a:ea typeface="Nanum Myeongjo" pitchFamily="34" charset="-122"/>
-                <a:cs typeface="Nanum Myeongjo" pitchFamily="34" charset="-120"/>
-              </a:rPr>
-              <a:t>관리부</a:t>
-            </a:r>
-            <a:endParaRPr lang="en-US" sz="1200" dirty="0"/>
-          </a:p>
-          <a:p>
-            <a:pPr indent="0" marL="0">
-              <a:lnSpc>
-                <a:spcPct val="108000"/>
-              </a:lnSpc>
-              <a:buNone/>
-            </a:pPr>
-            <a:r>
-              <a:rPr lang="en-US" sz="1400" dirty="0">
-                <a:solidFill>
-                  <a:srgbClr val="E7EAE3"/>
-                </a:solidFill>
-                <a:latin typeface="Noto Sans KR" pitchFamily="34" charset="0"/>
-                <a:ea typeface="Noto Sans KR" pitchFamily="34" charset="-122"/>
-                <a:cs typeface="Noto Sans KR" pitchFamily="34" charset="-120"/>
-              </a:rPr>
-              <a:t>Facilities Team   ·   Equipo de mantenimiento</a:t>
-            </a:r>
-            <a:endParaRPr lang="en-US" sz="1200" dirty="0"/>
-          </a:p>
-        </p:txBody>
-      </p:sp>
-      <p:sp>
-        <p:nvSpPr>
-          <p:cNvPr id="14" name="Text 11"/>
-          <p:cNvSpPr/>
-          <p:nvPr/>
-        </p:nvSpPr>
-        <p:spPr>
-          <a:xfrm>
-            <a:off x="3611880" y="3947160"/>
-            <a:ext cx="8031175" cy="1219200"/>
-          </a:xfrm>
-          <a:prstGeom prst="rect">
-            <a:avLst/>
-          </a:prstGeom>
-          <a:noFill/>
-          <a:ln/>
-        </p:spPr>
-        <p:txBody>
-          <a:bodyPr wrap="square" rtlCol="0" anchor="t"/>
-          <a:lstStyle/>
-          <a:p>
-            <a:pPr indent="0" marL="0">
-              <a:lnSpc>
-                <a:spcPct val="108000"/>
-              </a:lnSpc>
-              <a:spcAft>
-                <a:spcPts val="400"/>
-              </a:spcAft>
-              <a:buNone/>
-            </a:pPr>
-            <a:r>
-              <a:rPr lang="en-US" sz="1200" b="1" spc="100" kern="0" dirty="0">
-                <a:solidFill>
-                  <a:srgbClr val="C89B3C"/>
-                </a:solidFill>
-                <a:latin typeface="Noto Sans KR" pitchFamily="34" charset="0"/>
-                <a:ea typeface="Noto Sans KR" pitchFamily="34" charset="-122"/>
-                <a:cs typeface="Noto Sans KR" pitchFamily="34" charset="-120"/>
-              </a:rPr>
-              <a:t>좋아하는 장소 · 시간  ·  Favorite place &amp; time  ·  Lugar y momento favoritos</a:t>
-            </a:r>
-            <a:endParaRPr lang="en-US" sz="1200" dirty="0"/>
-          </a:p>
-          <a:p>
-            <a:pPr indent="0" marL="0">
-              <a:lnSpc>
-                <a:spcPct val="108000"/>
-              </a:lnSpc>
-              <a:spcAft>
-                <a:spcPts val="300"/>
-              </a:spcAft>
-              <a:buNone/>
-            </a:pPr>
-            <a:r>
-              <a:rPr lang="en-US" sz="2400" b="1" dirty="0">
-                <a:solidFill>
-                  <a:srgbClr val="F6F1E7"/>
-                </a:solidFill>
-                <a:latin typeface="Nanum Myeongjo" pitchFamily="34" charset="0"/>
-                <a:ea typeface="Nanum Myeongjo" pitchFamily="34" charset="-122"/>
-                <a:cs typeface="Nanum Myeongjo" pitchFamily="34" charset="-120"/>
-              </a:rPr>
-              <a:t>시온성전 · 점심식사 때의 교제와 구역예배</a:t>
-            </a:r>
-            <a:endParaRPr lang="en-US" sz="1200" dirty="0"/>
-          </a:p>
-          <a:p>
-            <a:pPr indent="0" marL="0">
-              <a:lnSpc>
-                <a:spcPct val="108000"/>
-              </a:lnSpc>
-              <a:buNone/>
-            </a:pPr>
-            <a:r>
-              <a:rPr lang="en-US" sz="1400" dirty="0">
-                <a:solidFill>
-                  <a:srgbClr val="E7EAE3"/>
-                </a:solidFill>
-                <a:latin typeface="Noto Sans KR" pitchFamily="34" charset="0"/>
-                <a:ea typeface="Noto Sans KR" pitchFamily="34" charset="-122"/>
-                <a:cs typeface="Noto Sans KR" pitchFamily="34" charset="-120"/>
-              </a:rPr>
-              <a:t>Zion Sanctuary · lunch fellowship &amp; district worship   ·   Santuario Sion · la comunión del almuerzo y el culto de distrito</a:t>
-            </a:r>
-            <a:endParaRPr lang="en-US" sz="1200" dirty="0"/>
-          </a:p>
-        </p:txBody>
-      </p:sp>
-      <p:sp>
-        <p:nvSpPr>
-          <p:cNvPr id="15" name="Shape 12"/>
-          <p:cNvSpPr/>
-          <p:nvPr/>
-        </p:nvSpPr>
-        <p:spPr>
-          <a:xfrm>
-            <a:off x="3611880" y="5440680"/>
-            <a:ext cx="8031175" cy="640080"/>
-          </a:xfrm>
-          <a:prstGeom prst="roundRect">
-            <a:avLst>
-              <a:gd name="adj" fmla="val 14286"/>
-            </a:avLst>
-          </a:prstGeom>
-          <a:solidFill>
-            <a:srgbClr val="0E241D"/>
-          </a:solidFill>
-          <a:ln w="9525">
-            <a:solidFill>
-              <a:srgbClr val="DCC07F">
-                <a:alpha val="60000"/>
-              </a:srgbClr>
-            </a:solidFill>
-            <a:prstDash val="solid"/>
-          </a:ln>
-        </p:spPr>
-      </p:sp>
-      <p:pic>
-        <p:nvPicPr>
-          <p:cNvPr id="16" name="Image 1" descr="/Users/logosguru/Code/retreat2026/scripts/icebreaker/assets/emoji-mic.png">    </p:cNvPr>
-          <p:cNvPicPr>
-            <a:picLocks noChangeAspect="1"/>
-          </p:cNvPicPr>
-          <p:nvPr/>
-        </p:nvPicPr>
-        <p:blipFill>
-          <a:blip r:embed="rId2"/>
-          <a:stretch>
-            <a:fillRect/>
-          </a:stretch>
-        </p:blipFill>
-        <p:spPr>
-          <a:xfrm>
-            <a:off x="3749040" y="5596128"/>
-            <a:ext cx="329184" cy="329184"/>
-          </a:xfrm>
-          <a:prstGeom prst="rect">
-            <a:avLst/>
-          </a:prstGeom>
-        </p:spPr>
-      </p:pic>
-      <p:sp>
-        <p:nvSpPr>
-          <p:cNvPr id="17" name="Text 13"/>
-          <p:cNvSpPr/>
-          <p:nvPr/>
-        </p:nvSpPr>
-        <p:spPr>
-          <a:xfrm>
-            <a:off x="4160520" y="5440680"/>
-            <a:ext cx="7391095" cy="640080"/>
-          </a:xfrm>
-          <a:prstGeom prst="rect">
-            <a:avLst/>
-          </a:prstGeom>
-          <a:noFill/>
-          <a:ln/>
-        </p:spPr>
-        <p:txBody>
-          <a:bodyPr wrap="square" rtlCol="0" anchor="ctr"/>
-          <a:lstStyle/>
-          <a:p>
-            <a:pPr indent="0" marL="0">
-              <a:lnSpc>
-                <a:spcPct val="105000"/>
-              </a:lnSpc>
-              <a:buNone/>
-            </a:pPr>
-            <a:r>
-              <a:rPr lang="en-US" sz="1400" b="1" dirty="0">
-                <a:solidFill>
-                  <a:srgbClr val="F6F1E7"/>
-                </a:solidFill>
-                <a:latin typeface="Noto Sans KR" pitchFamily="34" charset="0"/>
-                <a:ea typeface="Noto Sans KR" pitchFamily="34" charset="-122"/>
-                <a:cs typeface="Noto Sans KR" pitchFamily="34" charset="-120"/>
-              </a:rPr>
-              <a:t>짧은 인터뷰 45~60초 — 가장 재미있는 한두 가지만!</a:t>
-            </a:r>
-            <a:pPr indent="0" marL="0">
-              <a:lnSpc>
-                <a:spcPct val="105000"/>
-              </a:lnSpc>
-              <a:buNone/>
-            </a:pPr>
-            <a:r>
-              <a:rPr lang="en-US" sz="1200" dirty="0">
-                <a:solidFill>
-                  <a:srgbClr val="DCC07F"/>
-                </a:solidFill>
-                <a:latin typeface="Noto Sans KR" pitchFamily="34" charset="0"/>
-                <a:ea typeface="Noto Sans KR" pitchFamily="34" charset="-122"/>
-                <a:cs typeface="Noto Sans KR" pitchFamily="34" charset="-120"/>
-              </a:rPr>
-              <a:t>   Mini interview, 45–60 s — pick the 1–2 best · Mini entrevista, 45–60 s — solo lo mejor</a:t>
-            </a:r>
-            <a:endParaRPr lang="en-US" sz="1400" dirty="0"/>
+              <a:t>Me casé con un estadounidense — pensarías que hablo bien inglés… ¡pues no!</a:t>
+            </a:r>
+            <a:endParaRPr lang="en-US" sz="2200" dirty="0"/>
           </a:p>
         </p:txBody>
       </p:sp>
@@ -3233,7 +4273,1276 @@
                 <a:ea typeface="Fraunces" pitchFamily="34" charset="-122"/>
                 <a:cs typeface="Fraunces" pitchFamily="34" charset="-120"/>
               </a:rPr>
-              <a:t>11 / 11</a:t>
+              <a:t>11 / 14</a:t>
+            </a:r>
+            <a:endParaRPr lang="en-US" sz="1000" dirty="0"/>
+          </a:p>
+        </p:txBody>
+      </p:sp>
+      <p:sp>
+        <p:nvSpPr>
+          <p:cNvPr id="7" name="Text 5"/>
+          <p:cNvSpPr/>
+          <p:nvPr/>
+        </p:nvSpPr>
+        <p:spPr>
+          <a:xfrm>
+            <a:off x="548640" y="868680"/>
+            <a:ext cx="3657600" cy="411480"/>
+          </a:xfrm>
+          <a:prstGeom prst="rect">
+            <a:avLst/>
+          </a:prstGeom>
+          <a:noFill/>
+          <a:ln/>
+        </p:spPr>
+        <p:txBody>
+          <a:bodyPr wrap="square" rtlCol="0" anchor="ctr"/>
+          <a:lstStyle/>
+          <a:p>
+            <a:pPr indent="0" marL="0">
+              <a:buNone/>
+            </a:pPr>
+            <a:r>
+              <a:rPr lang="en-US" sz="1800" spc="300" kern="0" dirty="0">
+                <a:solidFill>
+                  <a:srgbClr val="C89B3C"/>
+                </a:solidFill>
+                <a:latin typeface="Fraunces" pitchFamily="34" charset="0"/>
+                <a:ea typeface="Fraunces" pitchFamily="34" charset="-122"/>
+                <a:cs typeface="Fraunces" pitchFamily="34" charset="-120"/>
+              </a:rPr>
+              <a:t>PERSON 1</a:t>
+            </a:r>
+            <a:endParaRPr lang="en-US" sz="1800" dirty="0"/>
+          </a:p>
+        </p:txBody>
+      </p:sp>
+      <p:sp>
+        <p:nvSpPr>
+          <p:cNvPr id="8" name="Text 6"/>
+          <p:cNvSpPr/>
+          <p:nvPr/>
+        </p:nvSpPr>
+        <p:spPr>
+          <a:xfrm>
+            <a:off x="4206240" y="868680"/>
+            <a:ext cx="7436815" cy="411480"/>
+          </a:xfrm>
+          <a:prstGeom prst="rect">
+            <a:avLst/>
+          </a:prstGeom>
+          <a:noFill/>
+          <a:ln/>
+        </p:spPr>
+        <p:txBody>
+          <a:bodyPr wrap="square" rtlCol="0" anchor="ctr"/>
+          <a:lstStyle/>
+          <a:p>
+            <a:pPr algn="r" indent="0" marL="0">
+              <a:buNone/>
+            </a:pPr>
+            <a:r>
+              <a:rPr lang="en-US" sz="1600" spc="200" kern="0" dirty="0">
+                <a:solidFill>
+                  <a:srgbClr val="C89B3C"/>
+                </a:solidFill>
+                <a:latin typeface="Fraunces" pitchFamily="34" charset="0"/>
+                <a:ea typeface="Fraunces" pitchFamily="34" charset="-122"/>
+                <a:cs typeface="Fraunces" pitchFamily="34" charset="-120"/>
+              </a:rPr>
+              <a:t>HINT 8 / 9   </a:t>
+            </a:r>
+            <a:pPr algn="r" indent="0" marL="0">
+              <a:buNone/>
+            </a:pPr>
+            <a:r>
+              <a:rPr lang="en-US" sz="2200" b="1" dirty="0">
+                <a:solidFill>
+                  <a:srgbClr val="F6F1E7"/>
+                </a:solidFill>
+                <a:latin typeface="Nanum Myeongjo" pitchFamily="34" charset="0"/>
+                <a:ea typeface="Nanum Myeongjo" pitchFamily="34" charset="-122"/>
+                <a:cs typeface="Nanum Myeongjo" pitchFamily="34" charset="-120"/>
+              </a:rPr>
+              <a:t>어릴 적 모습입니다!</a:t>
+            </a:r>
+            <a:pPr algn="r" indent="0" marL="0">
+              <a:buNone/>
+            </a:pPr>
+            <a:r>
+              <a:rPr lang="en-US" sz="1400" dirty="0">
+                <a:solidFill>
+                  <a:srgbClr val="DCC07F"/>
+                </a:solidFill>
+                <a:latin typeface="Noto Sans KR" pitchFamily="34" charset="0"/>
+                <a:ea typeface="Noto Sans KR" pitchFamily="34" charset="-122"/>
+                <a:cs typeface="Noto Sans KR" pitchFamily="34" charset="-120"/>
+              </a:rPr>
+              <a:t>   Childhood photo · Foto de la infancia</a:t>
+            </a:r>
+            <a:endParaRPr lang="en-US" sz="1600" dirty="0"/>
+          </a:p>
+        </p:txBody>
+      </p:sp>
+      <p:sp>
+        <p:nvSpPr>
+          <p:cNvPr id="9" name="Shape 7"/>
+          <p:cNvSpPr/>
+          <p:nvPr/>
+        </p:nvSpPr>
+        <p:spPr>
+          <a:xfrm>
+            <a:off x="3121167" y="1298448"/>
+            <a:ext cx="5949361" cy="4901184"/>
+          </a:xfrm>
+          <a:prstGeom prst="rect">
+            <a:avLst/>
+          </a:prstGeom>
+          <a:solidFill>
+            <a:srgbClr val="F6F1E7"/>
+          </a:solidFill>
+          <a:ln w="12700">
+            <a:solidFill>
+              <a:srgbClr val="F6F1E7"/>
+            </a:solidFill>
+            <a:prstDash val="solid"/>
+          </a:ln>
+        </p:spPr>
+      </p:sp>
+      <p:pic>
+        <p:nvPicPr>
+          <p:cNvPr id="10" name="Image 0" descr="/Users/logosguru/Code/retreat2026/out/icebreaker/people/01-kim-jimi-family.jpg">    </p:cNvPr>
+          <p:cNvPicPr>
+            <a:picLocks noChangeAspect="1"/>
+          </p:cNvPicPr>
+          <p:nvPr/>
+        </p:nvPicPr>
+        <p:blipFill>
+          <a:blip r:embed="rId1"/>
+          <a:stretch>
+            <a:fillRect/>
+          </a:stretch>
+        </p:blipFill>
+        <p:spPr>
+          <a:xfrm>
+            <a:off x="3194319" y="1371600"/>
+            <a:ext cx="5803057" cy="4754880"/>
+          </a:xfrm>
+          <a:prstGeom prst="rect">
+            <a:avLst/>
+          </a:prstGeom>
+        </p:spPr>
+      </p:pic>
+    </p:spTree>
+  </p:cSld>
+  <p:clrMapOvr>
+    <a:masterClrMapping/>
+  </p:clrMapOvr>
+</p:sld>
+</file>
+
+<file path=ppt/slides/slide12.xml><?xml version="1.0" encoding="utf-8"?>
+<p:sld xmlns:a="http://schemas.openxmlformats.org/drawingml/2006/main" xmlns:r="http://schemas.openxmlformats.org/officeDocument/2006/relationships" xmlns:p="http://schemas.openxmlformats.org/presentationml/2006/main">
+  <p:cSld name="Slide 12">
+    <p:bg>
+      <p:bgPr>
+        <a:solidFill>
+          <a:srgbClr val="14342B"/>
+        </a:solidFill>
+      </p:bgPr>
+    </p:bg>
+    <p:spTree>
+      <p:nvGrpSpPr>
+        <p:cNvPr id="1" name=""/>
+        <p:cNvGrpSpPr/>
+        <p:nvPr/>
+      </p:nvGrpSpPr>
+      <p:grpSpPr>
+        <a:xfrm>
+          <a:off x="0" y="0"/>
+          <a:ext cx="0" cy="0"/>
+          <a:chOff x="0" y="0"/>
+          <a:chExt cx="0" cy="0"/>
+        </a:xfrm>
+      </p:grpSpPr>
+      <p:sp>
+        <p:nvSpPr>
+          <p:cNvPr id="2" name="Text 0"/>
+          <p:cNvSpPr/>
+          <p:nvPr/>
+        </p:nvSpPr>
+        <p:spPr>
+          <a:xfrm>
+            <a:off x="548640" y="347472"/>
+            <a:ext cx="6400800" cy="365760"/>
+          </a:xfrm>
+          <a:prstGeom prst="rect">
+            <a:avLst/>
+          </a:prstGeom>
+          <a:noFill/>
+          <a:ln/>
+        </p:spPr>
+        <p:txBody>
+          <a:bodyPr wrap="square" rtlCol="0" anchor="ctr"/>
+          <a:lstStyle/>
+          <a:p>
+            <a:pPr indent="0" marL="0">
+              <a:buNone/>
+            </a:pPr>
+            <a:r>
+              <a:rPr lang="en-US" sz="1200" b="1" spc="400" kern="0" dirty="0">
+                <a:solidFill>
+                  <a:srgbClr val="C89B3C"/>
+                </a:solidFill>
+                <a:latin typeface="Noto Sans KR" pitchFamily="34" charset="0"/>
+                <a:ea typeface="Noto Sans KR" pitchFamily="34" charset="-122"/>
+                <a:cs typeface="Noto Sans KR" pitchFamily="34" charset="-120"/>
+              </a:rPr>
+              <a:t>ICE BREAKER · GAME 03</a:t>
+            </a:r>
+            <a:endParaRPr lang="en-US" sz="1200" dirty="0"/>
+          </a:p>
+        </p:txBody>
+      </p:sp>
+      <p:sp>
+        <p:nvSpPr>
+          <p:cNvPr id="3" name="Text 1"/>
+          <p:cNvSpPr/>
+          <p:nvPr/>
+        </p:nvSpPr>
+        <p:spPr>
+          <a:xfrm>
+            <a:off x="5242255" y="347472"/>
+            <a:ext cx="6400800" cy="365760"/>
+          </a:xfrm>
+          <a:prstGeom prst="rect">
+            <a:avLst/>
+          </a:prstGeom>
+          <a:noFill/>
+          <a:ln/>
+        </p:spPr>
+        <p:txBody>
+          <a:bodyPr wrap="square" rtlCol="0" anchor="ctr"/>
+          <a:lstStyle/>
+          <a:p>
+            <a:pPr algn="r" indent="0" marL="0">
+              <a:buNone/>
+            </a:pPr>
+            <a:r>
+              <a:rPr lang="en-US" sz="1300" i="1" dirty="0">
+                <a:solidFill>
+                  <a:srgbClr val="A8BDB2"/>
+                </a:solidFill>
+                <a:latin typeface="Fraunces" pitchFamily="34" charset="0"/>
+                <a:ea typeface="Fraunces" pitchFamily="34" charset="-122"/>
+                <a:cs typeface="Fraunces" pitchFamily="34" charset="-120"/>
+              </a:rPr>
+              <a:t>Blessed Encounter · 복된 만남 · Encuentro Bendito</a:t>
+            </a:r>
+            <a:endParaRPr lang="en-US" sz="1300" dirty="0"/>
+          </a:p>
+        </p:txBody>
+      </p:sp>
+      <p:sp>
+        <p:nvSpPr>
+          <p:cNvPr id="4" name="Shape 2"/>
+          <p:cNvSpPr/>
+          <p:nvPr/>
+        </p:nvSpPr>
+        <p:spPr>
+          <a:xfrm>
+            <a:off x="548640" y="6263640"/>
+            <a:ext cx="11094415" cy="0"/>
+          </a:xfrm>
+          <a:prstGeom prst="line">
+            <a:avLst/>
+          </a:prstGeom>
+          <a:noFill/>
+          <a:ln w="9525">
+            <a:solidFill>
+              <a:srgbClr val="DCC07F">
+                <a:alpha val="40000"/>
+              </a:srgbClr>
+            </a:solidFill>
+            <a:prstDash val="solid"/>
+          </a:ln>
+        </p:spPr>
+      </p:sp>
+      <p:sp>
+        <p:nvSpPr>
+          <p:cNvPr id="5" name="Text 3"/>
+          <p:cNvSpPr/>
+          <p:nvPr/>
+        </p:nvSpPr>
+        <p:spPr>
+          <a:xfrm>
+            <a:off x="548640" y="6327648"/>
+            <a:ext cx="7315200" cy="320040"/>
+          </a:xfrm>
+          <a:prstGeom prst="rect">
+            <a:avLst/>
+          </a:prstGeom>
+          <a:noFill/>
+          <a:ln/>
+        </p:spPr>
+        <p:txBody>
+          <a:bodyPr wrap="square" rtlCol="0" anchor="ctr"/>
+          <a:lstStyle/>
+          <a:p>
+            <a:pPr indent="0" marL="0">
+              <a:buNone/>
+            </a:pPr>
+            <a:r>
+              <a:rPr lang="en-US" sz="1000" dirty="0">
+                <a:solidFill>
+                  <a:srgbClr val="A8BDB2"/>
+                </a:solidFill>
+                <a:latin typeface="Noto Sans KR" pitchFamily="34" charset="0"/>
+                <a:ea typeface="Noto Sans KR" pitchFamily="34" charset="-122"/>
+                <a:cs typeface="Noto Sans KR" pitchFamily="34" charset="-120"/>
+              </a:rPr>
+              <a:t>2026 Evergreen Church Summer Retreat · Ice Breaker</a:t>
+            </a:r>
+            <a:endParaRPr lang="en-US" sz="1000" dirty="0"/>
+          </a:p>
+        </p:txBody>
+      </p:sp>
+      <p:sp>
+        <p:nvSpPr>
+          <p:cNvPr id="6" name="Text 4"/>
+          <p:cNvSpPr/>
+          <p:nvPr/>
+        </p:nvSpPr>
+        <p:spPr>
+          <a:xfrm>
+            <a:off x="9814255" y="6327648"/>
+            <a:ext cx="1828800" cy="320040"/>
+          </a:xfrm>
+          <a:prstGeom prst="rect">
+            <a:avLst/>
+          </a:prstGeom>
+          <a:noFill/>
+          <a:ln/>
+        </p:spPr>
+        <p:txBody>
+          <a:bodyPr wrap="square" rtlCol="0" anchor="ctr"/>
+          <a:lstStyle/>
+          <a:p>
+            <a:pPr algn="r" indent="0" marL="0">
+              <a:buNone/>
+            </a:pPr>
+            <a:r>
+              <a:rPr lang="en-US" sz="1000" dirty="0">
+                <a:solidFill>
+                  <a:srgbClr val="A8BDB2"/>
+                </a:solidFill>
+                <a:latin typeface="Fraunces" pitchFamily="34" charset="0"/>
+                <a:ea typeface="Fraunces" pitchFamily="34" charset="-122"/>
+                <a:cs typeface="Fraunces" pitchFamily="34" charset="-120"/>
+              </a:rPr>
+              <a:t>12 / 14</a:t>
+            </a:r>
+            <a:endParaRPr lang="en-US" sz="1000" dirty="0"/>
+          </a:p>
+        </p:txBody>
+      </p:sp>
+      <p:sp>
+        <p:nvSpPr>
+          <p:cNvPr id="7" name="Text 5"/>
+          <p:cNvSpPr/>
+          <p:nvPr/>
+        </p:nvSpPr>
+        <p:spPr>
+          <a:xfrm>
+            <a:off x="548640" y="868680"/>
+            <a:ext cx="3657600" cy="411480"/>
+          </a:xfrm>
+          <a:prstGeom prst="rect">
+            <a:avLst/>
+          </a:prstGeom>
+          <a:noFill/>
+          <a:ln/>
+        </p:spPr>
+        <p:txBody>
+          <a:bodyPr wrap="square" rtlCol="0" anchor="ctr"/>
+          <a:lstStyle/>
+          <a:p>
+            <a:pPr indent="0" marL="0">
+              <a:buNone/>
+            </a:pPr>
+            <a:r>
+              <a:rPr lang="en-US" sz="1800" spc="300" kern="0" dirty="0">
+                <a:solidFill>
+                  <a:srgbClr val="C89B3C"/>
+                </a:solidFill>
+                <a:latin typeface="Fraunces" pitchFamily="34" charset="0"/>
+                <a:ea typeface="Fraunces" pitchFamily="34" charset="-122"/>
+                <a:cs typeface="Fraunces" pitchFamily="34" charset="-120"/>
+              </a:rPr>
+              <a:t>PERSON 1</a:t>
+            </a:r>
+            <a:endParaRPr lang="en-US" sz="1800" dirty="0"/>
+          </a:p>
+        </p:txBody>
+      </p:sp>
+      <p:sp>
+        <p:nvSpPr>
+          <p:cNvPr id="8" name="Text 6"/>
+          <p:cNvSpPr/>
+          <p:nvPr/>
+        </p:nvSpPr>
+        <p:spPr>
+          <a:xfrm>
+            <a:off x="4206240" y="868680"/>
+            <a:ext cx="7436815" cy="411480"/>
+          </a:xfrm>
+          <a:prstGeom prst="rect">
+            <a:avLst/>
+          </a:prstGeom>
+          <a:noFill/>
+          <a:ln/>
+        </p:spPr>
+        <p:txBody>
+          <a:bodyPr wrap="square" rtlCol="0" anchor="ctr"/>
+          <a:lstStyle/>
+          <a:p>
+            <a:pPr algn="r" indent="0" marL="0">
+              <a:buNone/>
+            </a:pPr>
+            <a:r>
+              <a:rPr lang="en-US" sz="1600" spc="200" kern="0" dirty="0">
+                <a:solidFill>
+                  <a:srgbClr val="C89B3C"/>
+                </a:solidFill>
+                <a:latin typeface="Fraunces" pitchFamily="34" charset="0"/>
+                <a:ea typeface="Fraunces" pitchFamily="34" charset="-122"/>
+                <a:cs typeface="Fraunces" pitchFamily="34" charset="-120"/>
+              </a:rPr>
+              <a:t>HINT 9 / 9   </a:t>
+            </a:r>
+            <a:pPr algn="r" indent="0" marL="0">
+              <a:buNone/>
+            </a:pPr>
+            <a:r>
+              <a:rPr lang="en-US" sz="2200" b="1" dirty="0">
+                <a:solidFill>
+                  <a:srgbClr val="F6F1E7"/>
+                </a:solidFill>
+                <a:latin typeface="Nanum Myeongjo" pitchFamily="34" charset="0"/>
+                <a:ea typeface="Nanum Myeongjo" pitchFamily="34" charset="-122"/>
+                <a:cs typeface="Nanum Myeongjo" pitchFamily="34" charset="-120"/>
+              </a:rPr>
+              <a:t>어릴 적 모습입니다!</a:t>
+            </a:r>
+            <a:pPr algn="r" indent="0" marL="0">
+              <a:buNone/>
+            </a:pPr>
+            <a:r>
+              <a:rPr lang="en-US" sz="1400" dirty="0">
+                <a:solidFill>
+                  <a:srgbClr val="DCC07F"/>
+                </a:solidFill>
+                <a:latin typeface="Noto Sans KR" pitchFamily="34" charset="0"/>
+                <a:ea typeface="Noto Sans KR" pitchFamily="34" charset="-122"/>
+                <a:cs typeface="Noto Sans KR" pitchFamily="34" charset="-120"/>
+              </a:rPr>
+              <a:t>   Childhood photo · Foto de la infancia</a:t>
+            </a:r>
+            <a:endParaRPr lang="en-US" sz="1600" dirty="0"/>
+          </a:p>
+        </p:txBody>
+      </p:sp>
+      <p:sp>
+        <p:nvSpPr>
+          <p:cNvPr id="9" name="Shape 7"/>
+          <p:cNvSpPr/>
+          <p:nvPr/>
+        </p:nvSpPr>
+        <p:spPr>
+          <a:xfrm>
+            <a:off x="2382596" y="1298448"/>
+            <a:ext cx="7426503" cy="4901184"/>
+          </a:xfrm>
+          <a:prstGeom prst="rect">
+            <a:avLst/>
+          </a:prstGeom>
+          <a:solidFill>
+            <a:srgbClr val="F6F1E7"/>
+          </a:solidFill>
+          <a:ln w="12700">
+            <a:solidFill>
+              <a:srgbClr val="F6F1E7"/>
+            </a:solidFill>
+            <a:prstDash val="solid"/>
+          </a:ln>
+        </p:spPr>
+      </p:sp>
+      <p:pic>
+        <p:nvPicPr>
+          <p:cNvPr id="10" name="Image 0" descr="/Users/logosguru/Code/retreat2026/out/icebreaker/people/01-kim-jimi-solo.jpg">    </p:cNvPr>
+          <p:cNvPicPr>
+            <a:picLocks noChangeAspect="1"/>
+          </p:cNvPicPr>
+          <p:nvPr/>
+        </p:nvPicPr>
+        <p:blipFill>
+          <a:blip r:embed="rId1"/>
+          <a:stretch>
+            <a:fillRect/>
+          </a:stretch>
+        </p:blipFill>
+        <p:spPr>
+          <a:xfrm>
+            <a:off x="2455748" y="1371600"/>
+            <a:ext cx="7280199" cy="4754880"/>
+          </a:xfrm>
+          <a:prstGeom prst="rect">
+            <a:avLst/>
+          </a:prstGeom>
+        </p:spPr>
+      </p:pic>
+    </p:spTree>
+  </p:cSld>
+  <p:clrMapOvr>
+    <a:masterClrMapping/>
+  </p:clrMapOvr>
+</p:sld>
+</file>
+
+<file path=ppt/slides/slide13.xml><?xml version="1.0" encoding="utf-8"?>
+<p:sld xmlns:a="http://schemas.openxmlformats.org/drawingml/2006/main" xmlns:r="http://schemas.openxmlformats.org/officeDocument/2006/relationships" xmlns:p="http://schemas.openxmlformats.org/presentationml/2006/main">
+  <p:cSld name="Slide 13">
+    <p:bg>
+      <p:bgPr>
+        <a:solidFill>
+          <a:srgbClr val="14342B"/>
+        </a:solidFill>
+      </p:bgPr>
+    </p:bg>
+    <p:spTree>
+      <p:nvGrpSpPr>
+        <p:cNvPr id="1" name=""/>
+        <p:cNvGrpSpPr/>
+        <p:nvPr/>
+      </p:nvGrpSpPr>
+      <p:grpSpPr>
+        <a:xfrm>
+          <a:off x="0" y="0"/>
+          <a:ext cx="0" cy="0"/>
+          <a:chOff x="0" y="0"/>
+          <a:chExt cx="0" cy="0"/>
+        </a:xfrm>
+      </p:grpSpPr>
+      <p:sp>
+        <p:nvSpPr>
+          <p:cNvPr id="2" name="Text 0"/>
+          <p:cNvSpPr/>
+          <p:nvPr/>
+        </p:nvSpPr>
+        <p:spPr>
+          <a:xfrm>
+            <a:off x="548640" y="347472"/>
+            <a:ext cx="6400800" cy="365760"/>
+          </a:xfrm>
+          <a:prstGeom prst="rect">
+            <a:avLst/>
+          </a:prstGeom>
+          <a:noFill/>
+          <a:ln/>
+        </p:spPr>
+        <p:txBody>
+          <a:bodyPr wrap="square" rtlCol="0" anchor="ctr"/>
+          <a:lstStyle/>
+          <a:p>
+            <a:pPr indent="0" marL="0">
+              <a:buNone/>
+            </a:pPr>
+            <a:r>
+              <a:rPr lang="en-US" sz="1200" b="1" spc="400" kern="0" dirty="0">
+                <a:solidFill>
+                  <a:srgbClr val="C89B3C"/>
+                </a:solidFill>
+                <a:latin typeface="Noto Sans KR" pitchFamily="34" charset="0"/>
+                <a:ea typeface="Noto Sans KR" pitchFamily="34" charset="-122"/>
+                <a:cs typeface="Noto Sans KR" pitchFamily="34" charset="-120"/>
+              </a:rPr>
+              <a:t>ICE BREAKER · GAME 03</a:t>
+            </a:r>
+            <a:endParaRPr lang="en-US" sz="1200" dirty="0"/>
+          </a:p>
+        </p:txBody>
+      </p:sp>
+      <p:sp>
+        <p:nvSpPr>
+          <p:cNvPr id="3" name="Text 1"/>
+          <p:cNvSpPr/>
+          <p:nvPr/>
+        </p:nvSpPr>
+        <p:spPr>
+          <a:xfrm>
+            <a:off x="5242255" y="347472"/>
+            <a:ext cx="6400800" cy="365760"/>
+          </a:xfrm>
+          <a:prstGeom prst="rect">
+            <a:avLst/>
+          </a:prstGeom>
+          <a:noFill/>
+          <a:ln/>
+        </p:spPr>
+        <p:txBody>
+          <a:bodyPr wrap="square" rtlCol="0" anchor="ctr"/>
+          <a:lstStyle/>
+          <a:p>
+            <a:pPr algn="r" indent="0" marL="0">
+              <a:buNone/>
+            </a:pPr>
+            <a:r>
+              <a:rPr lang="en-US" sz="1300" i="1" dirty="0">
+                <a:solidFill>
+                  <a:srgbClr val="A8BDB2"/>
+                </a:solidFill>
+                <a:latin typeface="Fraunces" pitchFamily="34" charset="0"/>
+                <a:ea typeface="Fraunces" pitchFamily="34" charset="-122"/>
+                <a:cs typeface="Fraunces" pitchFamily="34" charset="-120"/>
+              </a:rPr>
+              <a:t>Blessed Encounter · 복된 만남 · Encuentro Bendito</a:t>
+            </a:r>
+            <a:endParaRPr lang="en-US" sz="1300" dirty="0"/>
+          </a:p>
+        </p:txBody>
+      </p:sp>
+      <p:sp>
+        <p:nvSpPr>
+          <p:cNvPr id="4" name="Shape 2"/>
+          <p:cNvSpPr/>
+          <p:nvPr/>
+        </p:nvSpPr>
+        <p:spPr>
+          <a:xfrm>
+            <a:off x="548640" y="6263640"/>
+            <a:ext cx="11094415" cy="0"/>
+          </a:xfrm>
+          <a:prstGeom prst="line">
+            <a:avLst/>
+          </a:prstGeom>
+          <a:noFill/>
+          <a:ln w="9525">
+            <a:solidFill>
+              <a:srgbClr val="DCC07F">
+                <a:alpha val="40000"/>
+              </a:srgbClr>
+            </a:solidFill>
+            <a:prstDash val="solid"/>
+          </a:ln>
+        </p:spPr>
+      </p:sp>
+      <p:sp>
+        <p:nvSpPr>
+          <p:cNvPr id="5" name="Text 3"/>
+          <p:cNvSpPr/>
+          <p:nvPr/>
+        </p:nvSpPr>
+        <p:spPr>
+          <a:xfrm>
+            <a:off x="548640" y="6327648"/>
+            <a:ext cx="7315200" cy="320040"/>
+          </a:xfrm>
+          <a:prstGeom prst="rect">
+            <a:avLst/>
+          </a:prstGeom>
+          <a:noFill/>
+          <a:ln/>
+        </p:spPr>
+        <p:txBody>
+          <a:bodyPr wrap="square" rtlCol="0" anchor="ctr"/>
+          <a:lstStyle/>
+          <a:p>
+            <a:pPr indent="0" marL="0">
+              <a:buNone/>
+            </a:pPr>
+            <a:r>
+              <a:rPr lang="en-US" sz="1000" dirty="0">
+                <a:solidFill>
+                  <a:srgbClr val="A8BDB2"/>
+                </a:solidFill>
+                <a:latin typeface="Noto Sans KR" pitchFamily="34" charset="0"/>
+                <a:ea typeface="Noto Sans KR" pitchFamily="34" charset="-122"/>
+                <a:cs typeface="Noto Sans KR" pitchFamily="34" charset="-120"/>
+              </a:rPr>
+              <a:t>2026 Evergreen Church Summer Retreat · Ice Breaker</a:t>
+            </a:r>
+            <a:endParaRPr lang="en-US" sz="1000" dirty="0"/>
+          </a:p>
+        </p:txBody>
+      </p:sp>
+      <p:sp>
+        <p:nvSpPr>
+          <p:cNvPr id="6" name="Text 4"/>
+          <p:cNvSpPr/>
+          <p:nvPr/>
+        </p:nvSpPr>
+        <p:spPr>
+          <a:xfrm>
+            <a:off x="9814255" y="6327648"/>
+            <a:ext cx="1828800" cy="320040"/>
+          </a:xfrm>
+          <a:prstGeom prst="rect">
+            <a:avLst/>
+          </a:prstGeom>
+          <a:noFill/>
+          <a:ln/>
+        </p:spPr>
+        <p:txBody>
+          <a:bodyPr wrap="square" rtlCol="0" anchor="ctr"/>
+          <a:lstStyle/>
+          <a:p>
+            <a:pPr algn="r" indent="0" marL="0">
+              <a:buNone/>
+            </a:pPr>
+            <a:r>
+              <a:rPr lang="en-US" sz="1000" dirty="0">
+                <a:solidFill>
+                  <a:srgbClr val="A8BDB2"/>
+                </a:solidFill>
+                <a:latin typeface="Fraunces" pitchFamily="34" charset="0"/>
+                <a:ea typeface="Fraunces" pitchFamily="34" charset="-122"/>
+                <a:cs typeface="Fraunces" pitchFamily="34" charset="-120"/>
+              </a:rPr>
+              <a:t>13 / 14</a:t>
+            </a:r>
+            <a:endParaRPr lang="en-US" sz="1000" dirty="0"/>
+          </a:p>
+        </p:txBody>
+      </p:sp>
+      <p:sp>
+        <p:nvSpPr>
+          <p:cNvPr id="7" name="Text 5"/>
+          <p:cNvSpPr/>
+          <p:nvPr/>
+        </p:nvSpPr>
+        <p:spPr>
+          <a:xfrm>
+            <a:off x="548640" y="868680"/>
+            <a:ext cx="9144000" cy="411480"/>
+          </a:xfrm>
+          <a:prstGeom prst="rect">
+            <a:avLst/>
+          </a:prstGeom>
+          <a:noFill/>
+          <a:ln/>
+        </p:spPr>
+        <p:txBody>
+          <a:bodyPr wrap="square" rtlCol="0" anchor="ctr"/>
+          <a:lstStyle/>
+          <a:p>
+            <a:pPr indent="0" marL="0">
+              <a:buNone/>
+            </a:pPr>
+            <a:r>
+              <a:rPr lang="en-US" sz="1800" spc="300" kern="0" dirty="0">
+                <a:solidFill>
+                  <a:srgbClr val="C89B3C"/>
+                </a:solidFill>
+                <a:latin typeface="Fraunces" pitchFamily="34" charset="0"/>
+                <a:ea typeface="Fraunces" pitchFamily="34" charset="-122"/>
+                <a:cs typeface="Fraunces" pitchFamily="34" charset="-120"/>
+              </a:rPr>
+              <a:t>PERSON 1 · 정답은 · LA RESPUESTA</a:t>
+            </a:r>
+            <a:endParaRPr lang="en-US" sz="1800" dirty="0"/>
+          </a:p>
+        </p:txBody>
+      </p:sp>
+      <p:sp>
+        <p:nvSpPr>
+          <p:cNvPr id="8" name="Shape 6"/>
+          <p:cNvSpPr/>
+          <p:nvPr/>
+        </p:nvSpPr>
+        <p:spPr>
+          <a:xfrm>
+            <a:off x="475488" y="1884236"/>
+            <a:ext cx="5632704" cy="3729609"/>
+          </a:xfrm>
+          <a:prstGeom prst="rect">
+            <a:avLst/>
+          </a:prstGeom>
+          <a:solidFill>
+            <a:srgbClr val="F6F1E7"/>
+          </a:solidFill>
+          <a:ln w="12700">
+            <a:solidFill>
+              <a:srgbClr val="F6F1E7"/>
+            </a:solidFill>
+            <a:prstDash val="solid"/>
+          </a:ln>
+        </p:spPr>
+      </p:sp>
+      <p:pic>
+        <p:nvPicPr>
+          <p:cNvPr id="9" name="Image 0" descr="/Users/logosguru/Code/retreat2026/out/icebreaker/people/01-kim-jimi-solo.jpg">    </p:cNvPr>
+          <p:cNvPicPr>
+            <a:picLocks noChangeAspect="1"/>
+          </p:cNvPicPr>
+          <p:nvPr/>
+        </p:nvPicPr>
+        <p:blipFill>
+          <a:blip r:embed="rId1"/>
+          <a:stretch>
+            <a:fillRect/>
+          </a:stretch>
+        </p:blipFill>
+        <p:spPr>
+          <a:xfrm>
+            <a:off x="548640" y="1957388"/>
+            <a:ext cx="5486400" cy="3583305"/>
+          </a:xfrm>
+          <a:prstGeom prst="rect">
+            <a:avLst/>
+          </a:prstGeom>
+        </p:spPr>
+      </p:pic>
+      <p:sp>
+        <p:nvSpPr>
+          <p:cNvPr id="10" name="Text 7"/>
+          <p:cNvSpPr/>
+          <p:nvPr/>
+        </p:nvSpPr>
+        <p:spPr>
+          <a:xfrm>
+            <a:off x="6583680" y="1554480"/>
+            <a:ext cx="5059375" cy="548640"/>
+          </a:xfrm>
+          <a:prstGeom prst="rect">
+            <a:avLst/>
+          </a:prstGeom>
+          <a:noFill/>
+          <a:ln/>
+        </p:spPr>
+        <p:txBody>
+          <a:bodyPr wrap="square" rtlCol="0" anchor="ctr"/>
+          <a:lstStyle/>
+          <a:p>
+            <a:pPr indent="0" marL="0">
+              <a:buNone/>
+            </a:pPr>
+            <a:r>
+              <a:rPr lang="en-US" sz="3000" i="1" dirty="0">
+                <a:solidFill>
+                  <a:srgbClr val="DCC07F"/>
+                </a:solidFill>
+                <a:latin typeface="Fraunces" pitchFamily="34" charset="0"/>
+                <a:ea typeface="Fraunces" pitchFamily="34" charset="-122"/>
+                <a:cs typeface="Fraunces" pitchFamily="34" charset="-120"/>
+              </a:rPr>
+              <a:t>IT’S…</a:t>
+            </a:r>
+            <a:endParaRPr lang="en-US" sz="3000" dirty="0"/>
+          </a:p>
+        </p:txBody>
+      </p:sp>
+      <p:sp>
+        <p:nvSpPr>
+          <p:cNvPr id="11" name="Text 8"/>
+          <p:cNvSpPr/>
+          <p:nvPr/>
+        </p:nvSpPr>
+        <p:spPr>
+          <a:xfrm>
+            <a:off x="6583680" y="2103120"/>
+            <a:ext cx="5059375" cy="1371600"/>
+          </a:xfrm>
+          <a:prstGeom prst="rect">
+            <a:avLst/>
+          </a:prstGeom>
+          <a:noFill/>
+          <a:ln/>
+        </p:spPr>
+        <p:txBody>
+          <a:bodyPr wrap="square" rtlCol="0" anchor="t"/>
+          <a:lstStyle/>
+          <a:p>
+            <a:pPr indent="0" marL="0">
+              <a:buNone/>
+            </a:pPr>
+            <a:r>
+              <a:rPr lang="en-US" sz="4600" b="1" dirty="0">
+                <a:solidFill>
+                  <a:srgbClr val="F6F1E7"/>
+                </a:solidFill>
+                <a:latin typeface="Nanum Myeongjo" pitchFamily="34" charset="0"/>
+                <a:ea typeface="Nanum Myeongjo" pitchFamily="34" charset="-122"/>
+                <a:cs typeface="Nanum Myeongjo" pitchFamily="34" charset="-120"/>
+              </a:rPr>
+              <a:t>김지미 집사님</a:t>
+            </a:r>
+            <a:endParaRPr lang="en-US" sz="4600" dirty="0"/>
+          </a:p>
+        </p:txBody>
+      </p:sp>
+      <p:sp>
+        <p:nvSpPr>
+          <p:cNvPr id="12" name="Text 9"/>
+          <p:cNvSpPr/>
+          <p:nvPr/>
+        </p:nvSpPr>
+        <p:spPr>
+          <a:xfrm>
+            <a:off x="6583680" y="3520440"/>
+            <a:ext cx="5059375" cy="1280160"/>
+          </a:xfrm>
+          <a:prstGeom prst="rect">
+            <a:avLst/>
+          </a:prstGeom>
+          <a:noFill/>
+          <a:ln/>
+        </p:spPr>
+        <p:txBody>
+          <a:bodyPr wrap="square" rtlCol="0" anchor="t"/>
+          <a:lstStyle/>
+          <a:p>
+            <a:pPr indent="0" marL="0">
+              <a:lnSpc>
+                <a:spcPct val="110000"/>
+              </a:lnSpc>
+              <a:spcAft>
+                <a:spcPts val="600"/>
+              </a:spcAft>
+              <a:buNone/>
+            </a:pPr>
+            <a:r>
+              <a:rPr lang="en-US" sz="2600" dirty="0">
+                <a:solidFill>
+                  <a:srgbClr val="DCC07F"/>
+                </a:solidFill>
+                <a:latin typeface="Fraunces" pitchFamily="34" charset="0"/>
+                <a:ea typeface="Fraunces" pitchFamily="34" charset="-122"/>
+                <a:cs typeface="Fraunces" pitchFamily="34" charset="-120"/>
+              </a:rPr>
+              <a:t>Deacon Jimi Kim</a:t>
+            </a:r>
+            <a:endParaRPr lang="en-US" sz="2600" dirty="0"/>
+          </a:p>
+          <a:p>
+            <a:pPr indent="0" marL="0">
+              <a:lnSpc>
+                <a:spcPct val="110000"/>
+              </a:lnSpc>
+              <a:buNone/>
+            </a:pPr>
+            <a:r>
+              <a:rPr lang="en-US" sz="2200" dirty="0">
+                <a:solidFill>
+                  <a:srgbClr val="E7EAE3"/>
+                </a:solidFill>
+                <a:latin typeface="Fraunces" pitchFamily="34" charset="0"/>
+                <a:ea typeface="Fraunces" pitchFamily="34" charset="-122"/>
+                <a:cs typeface="Fraunces" pitchFamily="34" charset="-120"/>
+              </a:rPr>
+              <a:t>Diaconisa Jimi Kim</a:t>
+            </a:r>
+            <a:endParaRPr lang="en-US" sz="2600" dirty="0"/>
+          </a:p>
+        </p:txBody>
+      </p:sp>
+      <p:sp>
+        <p:nvSpPr>
+          <p:cNvPr id="13" name="Shape 10"/>
+          <p:cNvSpPr/>
+          <p:nvPr/>
+        </p:nvSpPr>
+        <p:spPr>
+          <a:xfrm>
+            <a:off x="6583680" y="5074920"/>
+            <a:ext cx="5059375" cy="914400"/>
+          </a:xfrm>
+          <a:prstGeom prst="roundRect">
+            <a:avLst>
+              <a:gd name="adj" fmla="val 12000"/>
+            </a:avLst>
+          </a:prstGeom>
+          <a:solidFill>
+            <a:srgbClr val="C89B3C"/>
+          </a:solidFill>
+          <a:ln w="12700">
+            <a:solidFill>
+              <a:srgbClr val="C89B3C"/>
+            </a:solidFill>
+            <a:prstDash val="solid"/>
+          </a:ln>
+        </p:spPr>
+      </p:sp>
+      <p:sp>
+        <p:nvSpPr>
+          <p:cNvPr id="14" name="Text 11"/>
+          <p:cNvSpPr/>
+          <p:nvPr/>
+        </p:nvSpPr>
+        <p:spPr>
+          <a:xfrm>
+            <a:off x="6583680" y="5074920"/>
+            <a:ext cx="5059375" cy="914400"/>
+          </a:xfrm>
+          <a:prstGeom prst="rect">
+            <a:avLst/>
+          </a:prstGeom>
+          <a:noFill/>
+          <a:ln/>
+        </p:spPr>
+        <p:txBody>
+          <a:bodyPr wrap="square" rtlCol="0" anchor="ctr"/>
+          <a:lstStyle/>
+          <a:p>
+            <a:pPr algn="ctr" indent="0" marL="0">
+              <a:lnSpc>
+                <a:spcPct val="105000"/>
+              </a:lnSpc>
+              <a:buNone/>
+            </a:pPr>
+            <a:r>
+              <a:rPr lang="en-US" sz="2200" b="1" dirty="0">
+                <a:solidFill>
+                  <a:srgbClr val="0E241D"/>
+                </a:solidFill>
+                <a:latin typeface="Nanum Myeongjo" pitchFamily="34" charset="0"/>
+                <a:ea typeface="Nanum Myeongjo" pitchFamily="34" charset="-122"/>
+                <a:cs typeface="Nanum Myeongjo" pitchFamily="34" charset="-120"/>
+              </a:rPr>
+              <a:t>큰 박수! 앞으로 나와 주세요</a:t>
+            </a:r>
+            <a:endParaRPr lang="en-US" sz="2200" dirty="0"/>
+          </a:p>
+          <a:p>
+            <a:pPr algn="ctr" indent="0" marL="0">
+              <a:lnSpc>
+                <a:spcPct val="105000"/>
+              </a:lnSpc>
+              <a:buNone/>
+            </a:pPr>
+            <a:r>
+              <a:rPr lang="en-US" sz="1400" dirty="0">
+                <a:solidFill>
+                  <a:srgbClr val="0E241D"/>
+                </a:solidFill>
+                <a:latin typeface="Fraunces" pitchFamily="34" charset="0"/>
+                <a:ea typeface="Fraunces" pitchFamily="34" charset="-122"/>
+                <a:cs typeface="Fraunces" pitchFamily="34" charset="-120"/>
+              </a:rPr>
+              <a:t>Applause! Please come up · ¡Aplausos! Pase al frente</a:t>
+            </a:r>
+            <a:endParaRPr lang="en-US" sz="2200" dirty="0"/>
+          </a:p>
+        </p:txBody>
+      </p:sp>
+    </p:spTree>
+  </p:cSld>
+  <p:clrMapOvr>
+    <a:masterClrMapping/>
+  </p:clrMapOvr>
+</p:sld>
+</file>
+
+<file path=ppt/slides/slide14.xml><?xml version="1.0" encoding="utf-8"?>
+<p:sld xmlns:a="http://schemas.openxmlformats.org/drawingml/2006/main" xmlns:r="http://schemas.openxmlformats.org/officeDocument/2006/relationships" xmlns:p="http://schemas.openxmlformats.org/presentationml/2006/main">
+  <p:cSld name="Slide 14">
+    <p:bg>
+      <p:bgPr>
+        <a:solidFill>
+          <a:srgbClr val="14342B"/>
+        </a:solidFill>
+      </p:bgPr>
+    </p:bg>
+    <p:spTree>
+      <p:nvGrpSpPr>
+        <p:cNvPr id="1" name=""/>
+        <p:cNvGrpSpPr/>
+        <p:nvPr/>
+      </p:nvGrpSpPr>
+      <p:grpSpPr>
+        <a:xfrm>
+          <a:off x="0" y="0"/>
+          <a:ext cx="0" cy="0"/>
+          <a:chOff x="0" y="0"/>
+          <a:chExt cx="0" cy="0"/>
+        </a:xfrm>
+      </p:grpSpPr>
+      <p:sp>
+        <p:nvSpPr>
+          <p:cNvPr id="2" name="Text 0"/>
+          <p:cNvSpPr/>
+          <p:nvPr/>
+        </p:nvSpPr>
+        <p:spPr>
+          <a:xfrm>
+            <a:off x="548640" y="347472"/>
+            <a:ext cx="6400800" cy="365760"/>
+          </a:xfrm>
+          <a:prstGeom prst="rect">
+            <a:avLst/>
+          </a:prstGeom>
+          <a:noFill/>
+          <a:ln/>
+        </p:spPr>
+        <p:txBody>
+          <a:bodyPr wrap="square" rtlCol="0" anchor="ctr"/>
+          <a:lstStyle/>
+          <a:p>
+            <a:pPr indent="0" marL="0">
+              <a:buNone/>
+            </a:pPr>
+            <a:r>
+              <a:rPr lang="en-US" sz="1200" b="1" spc="400" kern="0" dirty="0">
+                <a:solidFill>
+                  <a:srgbClr val="C89B3C"/>
+                </a:solidFill>
+                <a:latin typeface="Noto Sans KR" pitchFamily="34" charset="0"/>
+                <a:ea typeface="Noto Sans KR" pitchFamily="34" charset="-122"/>
+                <a:cs typeface="Noto Sans KR" pitchFamily="34" charset="-120"/>
+              </a:rPr>
+              <a:t>ICE BREAKER · GAME 03</a:t>
+            </a:r>
+            <a:endParaRPr lang="en-US" sz="1200" dirty="0"/>
+          </a:p>
+        </p:txBody>
+      </p:sp>
+      <p:sp>
+        <p:nvSpPr>
+          <p:cNvPr id="3" name="Text 1"/>
+          <p:cNvSpPr/>
+          <p:nvPr/>
+        </p:nvSpPr>
+        <p:spPr>
+          <a:xfrm>
+            <a:off x="5242255" y="347472"/>
+            <a:ext cx="6400800" cy="365760"/>
+          </a:xfrm>
+          <a:prstGeom prst="rect">
+            <a:avLst/>
+          </a:prstGeom>
+          <a:noFill/>
+          <a:ln/>
+        </p:spPr>
+        <p:txBody>
+          <a:bodyPr wrap="square" rtlCol="0" anchor="ctr"/>
+          <a:lstStyle/>
+          <a:p>
+            <a:pPr algn="r" indent="0" marL="0">
+              <a:buNone/>
+            </a:pPr>
+            <a:r>
+              <a:rPr lang="en-US" sz="1300" i="1" dirty="0">
+                <a:solidFill>
+                  <a:srgbClr val="A8BDB2"/>
+                </a:solidFill>
+                <a:latin typeface="Fraunces" pitchFamily="34" charset="0"/>
+                <a:ea typeface="Fraunces" pitchFamily="34" charset="-122"/>
+                <a:cs typeface="Fraunces" pitchFamily="34" charset="-120"/>
+              </a:rPr>
+              <a:t>Blessed Encounter · 복된 만남 · Encuentro Bendito</a:t>
+            </a:r>
+            <a:endParaRPr lang="en-US" sz="1300" dirty="0"/>
+          </a:p>
+        </p:txBody>
+      </p:sp>
+      <p:sp>
+        <p:nvSpPr>
+          <p:cNvPr id="4" name="Shape 2"/>
+          <p:cNvSpPr/>
+          <p:nvPr/>
+        </p:nvSpPr>
+        <p:spPr>
+          <a:xfrm>
+            <a:off x="548640" y="6263640"/>
+            <a:ext cx="11094415" cy="0"/>
+          </a:xfrm>
+          <a:prstGeom prst="line">
+            <a:avLst/>
+          </a:prstGeom>
+          <a:noFill/>
+          <a:ln w="9525">
+            <a:solidFill>
+              <a:srgbClr val="DCC07F">
+                <a:alpha val="40000"/>
+              </a:srgbClr>
+            </a:solidFill>
+            <a:prstDash val="solid"/>
+          </a:ln>
+        </p:spPr>
+      </p:sp>
+      <p:sp>
+        <p:nvSpPr>
+          <p:cNvPr id="5" name="Text 3"/>
+          <p:cNvSpPr/>
+          <p:nvPr/>
+        </p:nvSpPr>
+        <p:spPr>
+          <a:xfrm>
+            <a:off x="548640" y="6327648"/>
+            <a:ext cx="7315200" cy="320040"/>
+          </a:xfrm>
+          <a:prstGeom prst="rect">
+            <a:avLst/>
+          </a:prstGeom>
+          <a:noFill/>
+          <a:ln/>
+        </p:spPr>
+        <p:txBody>
+          <a:bodyPr wrap="square" rtlCol="0" anchor="ctr"/>
+          <a:lstStyle/>
+          <a:p>
+            <a:pPr indent="0" marL="0">
+              <a:buNone/>
+            </a:pPr>
+            <a:r>
+              <a:rPr lang="en-US" sz="1000" dirty="0">
+                <a:solidFill>
+                  <a:srgbClr val="A8BDB2"/>
+                </a:solidFill>
+                <a:latin typeface="Noto Sans KR" pitchFamily="34" charset="0"/>
+                <a:ea typeface="Noto Sans KR" pitchFamily="34" charset="-122"/>
+                <a:cs typeface="Noto Sans KR" pitchFamily="34" charset="-120"/>
+              </a:rPr>
+              <a:t>2026 Evergreen Church Summer Retreat · Ice Breaker</a:t>
+            </a:r>
+            <a:endParaRPr lang="en-US" sz="1000" dirty="0"/>
+          </a:p>
+        </p:txBody>
+      </p:sp>
+      <p:sp>
+        <p:nvSpPr>
+          <p:cNvPr id="6" name="Text 4"/>
+          <p:cNvSpPr/>
+          <p:nvPr/>
+        </p:nvSpPr>
+        <p:spPr>
+          <a:xfrm>
+            <a:off x="9814255" y="6327648"/>
+            <a:ext cx="1828800" cy="320040"/>
+          </a:xfrm>
+          <a:prstGeom prst="rect">
+            <a:avLst/>
+          </a:prstGeom>
+          <a:noFill/>
+          <a:ln/>
+        </p:spPr>
+        <p:txBody>
+          <a:bodyPr wrap="square" rtlCol="0" anchor="ctr"/>
+          <a:lstStyle/>
+          <a:p>
+            <a:pPr algn="r" indent="0" marL="0">
+              <a:buNone/>
+            </a:pPr>
+            <a:r>
+              <a:rPr lang="en-US" sz="1000" dirty="0">
+                <a:solidFill>
+                  <a:srgbClr val="A8BDB2"/>
+                </a:solidFill>
+                <a:latin typeface="Fraunces" pitchFamily="34" charset="0"/>
+                <a:ea typeface="Fraunces" pitchFamily="34" charset="-122"/>
+                <a:cs typeface="Fraunces" pitchFamily="34" charset="-120"/>
+              </a:rPr>
+              <a:t>14 / 14</a:t>
             </a:r>
             <a:endParaRPr lang="en-US" sz="1000" dirty="0"/>
           </a:p>
@@ -3729,7 +6038,7 @@
                 <a:ea typeface="Fraunces" pitchFamily="34" charset="-122"/>
                 <a:cs typeface="Fraunces" pitchFamily="34" charset="-120"/>
               </a:rPr>
-              <a:t>2 / 11</a:t>
+              <a:t>2 / 14</a:t>
             </a:r>
             <a:endParaRPr lang="en-US" sz="1000" dirty="0"/>
           </a:p>
@@ -3790,7 +6099,7 @@
         </p:blipFill>
         <p:spPr>
           <a:xfrm>
-            <a:off x="1209637" y="1508760"/>
+            <a:off x="1681429" y="1508760"/>
             <a:ext cx="1280160" cy="1280160"/>
           </a:xfrm>
           <a:prstGeom prst="rect">
@@ -3807,7 +6116,7 @@
         <p:spPr>
           <a:xfrm>
             <a:off x="548640" y="2880360"/>
-            <a:ext cx="2602154" cy="777240"/>
+            <a:ext cx="3545738" cy="777240"/>
           </a:xfrm>
           <a:prstGeom prst="rect">
             <a:avLst/>
@@ -3846,7 +6155,7 @@
         <p:spPr>
           <a:xfrm>
             <a:off x="548640" y="3657600"/>
-            <a:ext cx="2602154" cy="731520"/>
+            <a:ext cx="3545738" cy="731520"/>
           </a:xfrm>
           <a:prstGeom prst="rect">
             <a:avLst/>
@@ -3873,7 +6182,7 @@
                 <a:ea typeface="Noto Sans KR" pitchFamily="34" charset="-122"/>
                 <a:cs typeface="Noto Sans KR" pitchFamily="34" charset="-120"/>
               </a:rPr>
-              <a:t>힌트가 하나씩 공개</a:t>
+              <a:t>힌트가 하나씩 공개됩니다</a:t>
             </a:r>
             <a:endParaRPr lang="en-US" sz="1600" dirty="0"/>
           </a:p>
@@ -3915,7 +6224,7 @@
         </p:blipFill>
         <p:spPr>
           <a:xfrm>
-            <a:off x="4040391" y="1508760"/>
+            <a:off x="5455768" y="1508760"/>
             <a:ext cx="1280160" cy="1280160"/>
           </a:xfrm>
           <a:prstGeom prst="rect">
@@ -3931,8 +6240,8 @@
         </p:nvSpPr>
         <p:spPr>
           <a:xfrm>
-            <a:off x="3379394" y="2880360"/>
-            <a:ext cx="2602154" cy="777240"/>
+            <a:off x="4322978" y="2880360"/>
+            <a:ext cx="3545738" cy="777240"/>
           </a:xfrm>
           <a:prstGeom prst="rect">
             <a:avLst/>
@@ -3970,8 +6279,8 @@
         </p:nvSpPr>
         <p:spPr>
           <a:xfrm>
-            <a:off x="3379394" y="3657600"/>
-            <a:ext cx="2602154" cy="731520"/>
+            <a:off x="4322978" y="3657600"/>
+            <a:ext cx="3545738" cy="731520"/>
           </a:xfrm>
           <a:prstGeom prst="rect">
             <a:avLst/>
@@ -4024,145 +6333,20 @@
           </a:p>
         </p:txBody>
       </p:sp>
-      <p:pic>
-        <p:nvPicPr>
-          <p:cNvPr id="14" name="Image 2" descr="/Users/logosguru/Code/retreat2026/scripts/icebreaker/assets/emoji-camera.png">    </p:cNvPr>
-          <p:cNvPicPr>
-            <a:picLocks noChangeAspect="1"/>
-          </p:cNvPicPr>
-          <p:nvPr/>
-        </p:nvPicPr>
-        <p:blipFill>
-          <a:blip r:embed="rId3"/>
-          <a:stretch>
-            <a:fillRect/>
-          </a:stretch>
-        </p:blipFill>
-        <p:spPr>
-          <a:xfrm>
-            <a:off x="6871145" y="1508760"/>
-            <a:ext cx="1280160" cy="1280160"/>
-          </a:xfrm>
-          <a:prstGeom prst="rect">
-            <a:avLst/>
-          </a:prstGeom>
-        </p:spPr>
-      </p:pic>
-      <p:sp>
-        <p:nvSpPr>
-          <p:cNvPr id="15" name="Text 10"/>
-          <p:cNvSpPr/>
-          <p:nvPr/>
-        </p:nvSpPr>
-        <p:spPr>
-          <a:xfrm>
-            <a:off x="6210148" y="2880360"/>
-            <a:ext cx="2602154" cy="777240"/>
-          </a:xfrm>
-          <a:prstGeom prst="rect">
-            <a:avLst/>
-          </a:prstGeom>
-          <a:noFill/>
-          <a:ln/>
-        </p:spPr>
-        <p:txBody>
-          <a:bodyPr wrap="square" rtlCol="0" anchor="ctr"/>
-          <a:lstStyle/>
-          <a:p>
-            <a:pPr algn="ctr" indent="0" marL="0">
-              <a:buNone/>
-            </a:pPr>
-            <a:r>
-              <a:rPr lang="en-US" sz="3400" b="1" dirty="0">
-                <a:solidFill>
-                  <a:srgbClr val="DCC07F"/>
-                </a:solidFill>
-                <a:latin typeface="Fraunces" pitchFamily="34" charset="0"/>
-                <a:ea typeface="Fraunces" pitchFamily="34" charset="-122"/>
-                <a:cs typeface="Fraunces" pitchFamily="34" charset="-120"/>
-              </a:rPr>
-              <a:t>REVEAL</a:t>
-            </a:r>
-            <a:endParaRPr lang="en-US" sz="3400" dirty="0"/>
-          </a:p>
-        </p:txBody>
-      </p:sp>
-      <p:sp>
-        <p:nvSpPr>
-          <p:cNvPr id="16" name="Text 11"/>
-          <p:cNvSpPr/>
-          <p:nvPr/>
-        </p:nvSpPr>
-        <p:spPr>
-          <a:xfrm>
-            <a:off x="6210148" y="3657600"/>
-            <a:ext cx="2602154" cy="731520"/>
-          </a:xfrm>
-          <a:prstGeom prst="rect">
-            <a:avLst/>
-          </a:prstGeom>
-          <a:noFill/>
-          <a:ln/>
-        </p:spPr>
-        <p:txBody>
-          <a:bodyPr wrap="square" rtlCol="0" anchor="t"/>
-          <a:lstStyle/>
-          <a:p>
-            <a:pPr algn="ctr" indent="0" marL="0">
-              <a:lnSpc>
-                <a:spcPct val="120000"/>
-              </a:lnSpc>
-              <a:buNone/>
-            </a:pPr>
-            <a:r>
-              <a:rPr lang="en-US" sz="1600" dirty="0">
-                <a:solidFill>
-                  <a:srgbClr val="E7EAE3"/>
-                </a:solidFill>
-                <a:latin typeface="Noto Sans KR" pitchFamily="34" charset="0"/>
-                <a:ea typeface="Noto Sans KR" pitchFamily="34" charset="-122"/>
-                <a:cs typeface="Noto Sans KR" pitchFamily="34" charset="-120"/>
-              </a:rPr>
-              <a:t>정답 공개 — 앞으로!</a:t>
-            </a:r>
-            <a:endParaRPr lang="en-US" sz="1600" dirty="0"/>
-          </a:p>
-          <a:p>
-            <a:pPr algn="ctr" indent="0" marL="0">
-              <a:lnSpc>
-                <a:spcPct val="120000"/>
-              </a:lnSpc>
-              <a:buNone/>
-            </a:pPr>
-            <a:r>
-              <a:rPr lang="en-US" sz="1600" dirty="0">
-                <a:solidFill>
-                  <a:srgbClr val="E7EAE3"/>
-                </a:solidFill>
-                <a:latin typeface="Noto Sans KR" pitchFamily="34" charset="0"/>
-                <a:ea typeface="Noto Sans KR" pitchFamily="34" charset="-122"/>
-                <a:cs typeface="Noto Sans KR" pitchFamily="34" charset="-120"/>
-              </a:rPr>
-              <a:t>Se revela — ¡al frente!</a:t>
-            </a:r>
-            <a:endParaRPr lang="en-US" sz="1600" dirty="0"/>
-          </a:p>
-        </p:txBody>
-      </p:sp>
-      <p:sp>
-        <p:nvSpPr>
-          <p:cNvPr id="17" name="Shape 12"/>
-          <p:cNvSpPr/>
-          <p:nvPr/>
-        </p:nvSpPr>
-        <p:spPr>
-          <a:xfrm>
-            <a:off x="9040901" y="1325880"/>
-            <a:ext cx="2602154" cy="3246120"/>
+      <p:sp>
+        <p:nvSpPr>
+          <p:cNvPr id="14" name="Shape 10"/>
+          <p:cNvSpPr/>
+          <p:nvPr/>
+        </p:nvSpPr>
+        <p:spPr>
+          <a:xfrm>
+            <a:off x="8097317" y="1325880"/>
+            <a:ext cx="3545738" cy="3246120"/>
           </a:xfrm>
           <a:prstGeom prst="roundRect">
             <a:avLst>
-              <a:gd name="adj" fmla="val 5271"/>
+              <a:gd name="adj" fmla="val 4225"/>
             </a:avLst>
           </a:prstGeom>
           <a:solidFill>
@@ -4178,21 +6362,21 @@
       </p:sp>
       <p:pic>
         <p:nvPicPr>
-          <p:cNvPr id="18" name="Image 3" descr="/Users/logosguru/Code/retreat2026/scripts/icebreaker/assets/emoji-mic.png">    </p:cNvPr>
+          <p:cNvPr id="15" name="Image 2" descr="/Users/logosguru/Code/retreat2026/scripts/icebreaker/assets/emoji-camera.png">    </p:cNvPr>
           <p:cNvPicPr>
             <a:picLocks noChangeAspect="1"/>
           </p:cNvPicPr>
           <p:nvPr/>
         </p:nvPicPr>
         <p:blipFill>
-          <a:blip r:embed="rId4"/>
+          <a:blip r:embed="rId3"/>
           <a:stretch>
             <a:fillRect/>
           </a:stretch>
         </p:blipFill>
         <p:spPr>
           <a:xfrm>
-            <a:off x="9701898" y="1508760"/>
+            <a:off x="9230106" y="1508760"/>
             <a:ext cx="1280160" cy="1280160"/>
           </a:xfrm>
           <a:prstGeom prst="rect">
@@ -4202,14 +6386,14 @@
       </p:pic>
       <p:sp>
         <p:nvSpPr>
-          <p:cNvPr id="19" name="Text 13"/>
-          <p:cNvSpPr/>
-          <p:nvPr/>
-        </p:nvSpPr>
-        <p:spPr>
-          <a:xfrm>
-            <a:off x="9040901" y="2880360"/>
-            <a:ext cx="2602154" cy="777240"/>
+          <p:cNvPr id="16" name="Text 11"/>
+          <p:cNvSpPr/>
+          <p:nvPr/>
+        </p:nvSpPr>
+        <p:spPr>
+          <a:xfrm>
+            <a:off x="8097317" y="2880360"/>
+            <a:ext cx="3545738" cy="777240"/>
           </a:xfrm>
           <a:prstGeom prst="rect">
             <a:avLst/>
@@ -4233,7 +6417,7 @@
                 <a:ea typeface="Fraunces" pitchFamily="34" charset="-122"/>
                 <a:cs typeface="Fraunces" pitchFamily="34" charset="-120"/>
               </a:rPr>
-              <a:t>STORY</a:t>
+              <a:t>REVEAL</a:t>
             </a:r>
             <a:endParaRPr lang="en-US" sz="3400" dirty="0"/>
           </a:p>
@@ -4241,14 +6425,14 @@
       </p:sp>
       <p:sp>
         <p:nvSpPr>
-          <p:cNvPr id="20" name="Text 14"/>
-          <p:cNvSpPr/>
-          <p:nvPr/>
-        </p:nvSpPr>
-        <p:spPr>
-          <a:xfrm>
-            <a:off x="9040901" y="3657600"/>
-            <a:ext cx="2602154" cy="731520"/>
+          <p:cNvPr id="17" name="Text 12"/>
+          <p:cNvSpPr/>
+          <p:nvPr/>
+        </p:nvSpPr>
+        <p:spPr>
+          <a:xfrm>
+            <a:off x="8097317" y="3657600"/>
+            <a:ext cx="3545738" cy="731520"/>
           </a:xfrm>
           <a:prstGeom prst="rect">
             <a:avLst/>
@@ -4275,7 +6459,7 @@
                 <a:ea typeface="Noto Sans KR" pitchFamily="34" charset="-122"/>
                 <a:cs typeface="Noto Sans KR" pitchFamily="34" charset="-120"/>
               </a:rPr>
-              <a:t>남은 이야기 + 짧은 인터뷰</a:t>
+              <a:t>정답 공개 — 앞으로 나와 주세요!</a:t>
             </a:r>
             <a:endParaRPr lang="en-US" sz="1600" dirty="0"/>
           </a:p>
@@ -4295,7 +6479,7 @@
                 <a:ea typeface="Noto Sans KR" pitchFamily="34" charset="-122"/>
                 <a:cs typeface="Noto Sans KR" pitchFamily="34" charset="-120"/>
               </a:rPr>
-              <a:t>El resto de la historia + entrevista</a:t>
+              <a:t>Se revela — ¡pase al frente!</a:t>
             </a:r>
             <a:endParaRPr lang="en-US" sz="1600" dirty="0"/>
           </a:p>
@@ -4303,7 +6487,7 @@
       </p:sp>
       <p:sp>
         <p:nvSpPr>
-          <p:cNvPr id="21" name="Text 15"/>
+          <p:cNvPr id="18" name="Text 13"/>
           <p:cNvSpPr/>
           <p:nvPr/>
         </p:nvSpPr>
@@ -4596,7 +6780,7 @@
                 <a:ea typeface="Fraunces" pitchFamily="34" charset="-122"/>
                 <a:cs typeface="Fraunces" pitchFamily="34" charset="-120"/>
               </a:rPr>
-              <a:t>3 / 11</a:t>
+              <a:t>3 / 14</a:t>
             </a:r>
             <a:endParaRPr lang="en-US" sz="1000" dirty="0"/>
           </a:p>
@@ -5304,7 +7488,7 @@
                 <a:ea typeface="Fraunces" pitchFamily="34" charset="-122"/>
                 <a:cs typeface="Fraunces" pitchFamily="34" charset="-120"/>
               </a:rPr>
-              <a:t>4 / 11</a:t>
+              <a:t>4 / 14</a:t>
             </a:r>
             <a:endParaRPr lang="en-US" sz="1000" dirty="0"/>
           </a:p>
@@ -5396,7 +7580,7 @@
         </p:nvSpPr>
         <p:spPr>
           <a:xfrm>
-            <a:off x="1170432" y="4343400"/>
+            <a:off x="594360" y="4343400"/>
             <a:ext cx="256032" cy="256032"/>
           </a:xfrm>
           <a:prstGeom prst="ellipse">
@@ -5421,7 +7605,7 @@
         </p:nvSpPr>
         <p:spPr>
           <a:xfrm>
-            <a:off x="1554480" y="4343400"/>
+            <a:off x="978408" y="4343400"/>
             <a:ext cx="256032" cy="256032"/>
           </a:xfrm>
           <a:prstGeom prst="ellipse">
@@ -5446,7 +7630,7 @@
         </p:nvSpPr>
         <p:spPr>
           <a:xfrm>
-            <a:off x="1938528" y="4343400"/>
+            <a:off x="1362456" y="4343400"/>
             <a:ext cx="256032" cy="256032"/>
           </a:xfrm>
           <a:prstGeom prst="ellipse">
@@ -5471,7 +7655,7 @@
         </p:nvSpPr>
         <p:spPr>
           <a:xfrm>
-            <a:off x="2322576" y="4343400"/>
+            <a:off x="1746504" y="4343400"/>
             <a:ext cx="256032" cy="256032"/>
           </a:xfrm>
           <a:prstGeom prst="ellipse">
@@ -5490,7 +7674,82 @@
       </p:sp>
       <p:sp>
         <p:nvSpPr>
-          <p:cNvPr id="13" name="Text 11"/>
+          <p:cNvPr id="13" name="Shape 11"/>
+          <p:cNvSpPr/>
+          <p:nvPr/>
+        </p:nvSpPr>
+        <p:spPr>
+          <a:xfrm>
+            <a:off x="2130552" y="4343400"/>
+            <a:ext cx="256032" cy="256032"/>
+          </a:xfrm>
+          <a:prstGeom prst="ellipse">
+            <a:avLst/>
+          </a:prstGeom>
+          <a:solidFill>
+            <a:srgbClr val="14342B"/>
+          </a:solidFill>
+          <a:ln w="12700">
+            <a:solidFill>
+              <a:srgbClr val="C89B3C"/>
+            </a:solidFill>
+            <a:prstDash val="solid"/>
+          </a:ln>
+        </p:spPr>
+      </p:sp>
+      <p:sp>
+        <p:nvSpPr>
+          <p:cNvPr id="14" name="Shape 12"/>
+          <p:cNvSpPr/>
+          <p:nvPr/>
+        </p:nvSpPr>
+        <p:spPr>
+          <a:xfrm>
+            <a:off x="2514600" y="4343400"/>
+            <a:ext cx="256032" cy="256032"/>
+          </a:xfrm>
+          <a:prstGeom prst="ellipse">
+            <a:avLst/>
+          </a:prstGeom>
+          <a:solidFill>
+            <a:srgbClr val="14342B"/>
+          </a:solidFill>
+          <a:ln w="12700">
+            <a:solidFill>
+              <a:srgbClr val="C89B3C"/>
+            </a:solidFill>
+            <a:prstDash val="solid"/>
+          </a:ln>
+        </p:spPr>
+      </p:sp>
+      <p:sp>
+        <p:nvSpPr>
+          <p:cNvPr id="15" name="Shape 13"/>
+          <p:cNvSpPr/>
+          <p:nvPr/>
+        </p:nvSpPr>
+        <p:spPr>
+          <a:xfrm>
+            <a:off x="2898648" y="4343400"/>
+            <a:ext cx="256032" cy="256032"/>
+          </a:xfrm>
+          <a:prstGeom prst="ellipse">
+            <a:avLst/>
+          </a:prstGeom>
+          <a:solidFill>
+            <a:srgbClr val="14342B"/>
+          </a:solidFill>
+          <a:ln w="12700">
+            <a:solidFill>
+              <a:srgbClr val="C89B3C"/>
+            </a:solidFill>
+            <a:prstDash val="solid"/>
+          </a:ln>
+        </p:spPr>
+      </p:sp>
+      <p:sp>
+        <p:nvSpPr>
+          <p:cNvPr id="16" name="Text 14"/>
           <p:cNvSpPr/>
           <p:nvPr/>
         </p:nvSpPr>
@@ -5521,7 +7780,7 @@
                 <a:ea typeface="Fraunces" pitchFamily="34" charset="-122"/>
                 <a:cs typeface="Fraunces" pitchFamily="34" charset="-120"/>
               </a:rPr>
-              <a:t>HINT 1 / 4</a:t>
+              <a:t>HINT 1 / 7</a:t>
             </a:r>
             <a:endParaRPr lang="en-US" sz="1400" dirty="0"/>
           </a:p>
@@ -5529,7 +7788,7 @@
       </p:sp>
       <p:sp>
         <p:nvSpPr>
-          <p:cNvPr id="14" name="Shape 12"/>
+          <p:cNvPr id="17" name="Shape 15"/>
           <p:cNvSpPr/>
           <p:nvPr/>
         </p:nvSpPr>
@@ -5554,7 +7813,7 @@
       </p:sp>
       <p:sp>
         <p:nvSpPr>
-          <p:cNvPr id="15" name="Text 13"/>
+          <p:cNvPr id="18" name="Text 16"/>
           <p:cNvSpPr/>
           <p:nvPr/>
         </p:nvSpPr>
@@ -5593,7 +7852,7 @@
       </p:sp>
       <p:sp>
         <p:nvSpPr>
-          <p:cNvPr id="16" name="Shape 14"/>
+          <p:cNvPr id="19" name="Shape 17"/>
           <p:cNvSpPr/>
           <p:nvPr/>
         </p:nvSpPr>
@@ -5618,7 +7877,7 @@
       </p:sp>
       <p:sp>
         <p:nvSpPr>
-          <p:cNvPr id="17" name="Text 15"/>
+          <p:cNvPr id="20" name="Text 18"/>
           <p:cNvSpPr/>
           <p:nvPr/>
         </p:nvSpPr>
@@ -5657,7 +7916,7 @@
       </p:sp>
       <p:sp>
         <p:nvSpPr>
-          <p:cNvPr id="18" name="Text 16"/>
+          <p:cNvPr id="21" name="Text 19"/>
           <p:cNvSpPr/>
           <p:nvPr/>
         </p:nvSpPr>
@@ -5950,7 +8209,7 @@
                 <a:ea typeface="Fraunces" pitchFamily="34" charset="-122"/>
                 <a:cs typeface="Fraunces" pitchFamily="34" charset="-120"/>
               </a:rPr>
-              <a:t>5 / 11</a:t>
+              <a:t>5 / 14</a:t>
             </a:r>
             <a:endParaRPr lang="en-US" sz="1000" dirty="0"/>
           </a:p>
@@ -6042,7 +8301,7 @@
         </p:nvSpPr>
         <p:spPr>
           <a:xfrm>
-            <a:off x="1170432" y="4343400"/>
+            <a:off x="594360" y="4343400"/>
             <a:ext cx="256032" cy="256032"/>
           </a:xfrm>
           <a:prstGeom prst="ellipse">
@@ -6067,7 +8326,7 @@
         </p:nvSpPr>
         <p:spPr>
           <a:xfrm>
-            <a:off x="1554480" y="4343400"/>
+            <a:off x="978408" y="4343400"/>
             <a:ext cx="256032" cy="256032"/>
           </a:xfrm>
           <a:prstGeom prst="ellipse">
@@ -6092,7 +8351,7 @@
         </p:nvSpPr>
         <p:spPr>
           <a:xfrm>
-            <a:off x="1938528" y="4343400"/>
+            <a:off x="1362456" y="4343400"/>
             <a:ext cx="256032" cy="256032"/>
           </a:xfrm>
           <a:prstGeom prst="ellipse">
@@ -6117,7 +8376,7 @@
         </p:nvSpPr>
         <p:spPr>
           <a:xfrm>
-            <a:off x="2322576" y="4343400"/>
+            <a:off x="1746504" y="4343400"/>
             <a:ext cx="256032" cy="256032"/>
           </a:xfrm>
           <a:prstGeom prst="ellipse">
@@ -6136,7 +8395,82 @@
       </p:sp>
       <p:sp>
         <p:nvSpPr>
-          <p:cNvPr id="13" name="Text 11"/>
+          <p:cNvPr id="13" name="Shape 11"/>
+          <p:cNvSpPr/>
+          <p:nvPr/>
+        </p:nvSpPr>
+        <p:spPr>
+          <a:xfrm>
+            <a:off x="2130552" y="4343400"/>
+            <a:ext cx="256032" cy="256032"/>
+          </a:xfrm>
+          <a:prstGeom prst="ellipse">
+            <a:avLst/>
+          </a:prstGeom>
+          <a:solidFill>
+            <a:srgbClr val="14342B"/>
+          </a:solidFill>
+          <a:ln w="12700">
+            <a:solidFill>
+              <a:srgbClr val="C89B3C"/>
+            </a:solidFill>
+            <a:prstDash val="solid"/>
+          </a:ln>
+        </p:spPr>
+      </p:sp>
+      <p:sp>
+        <p:nvSpPr>
+          <p:cNvPr id="14" name="Shape 12"/>
+          <p:cNvSpPr/>
+          <p:nvPr/>
+        </p:nvSpPr>
+        <p:spPr>
+          <a:xfrm>
+            <a:off x="2514600" y="4343400"/>
+            <a:ext cx="256032" cy="256032"/>
+          </a:xfrm>
+          <a:prstGeom prst="ellipse">
+            <a:avLst/>
+          </a:prstGeom>
+          <a:solidFill>
+            <a:srgbClr val="14342B"/>
+          </a:solidFill>
+          <a:ln w="12700">
+            <a:solidFill>
+              <a:srgbClr val="C89B3C"/>
+            </a:solidFill>
+            <a:prstDash val="solid"/>
+          </a:ln>
+        </p:spPr>
+      </p:sp>
+      <p:sp>
+        <p:nvSpPr>
+          <p:cNvPr id="15" name="Shape 13"/>
+          <p:cNvSpPr/>
+          <p:nvPr/>
+        </p:nvSpPr>
+        <p:spPr>
+          <a:xfrm>
+            <a:off x="2898648" y="4343400"/>
+            <a:ext cx="256032" cy="256032"/>
+          </a:xfrm>
+          <a:prstGeom prst="ellipse">
+            <a:avLst/>
+          </a:prstGeom>
+          <a:solidFill>
+            <a:srgbClr val="14342B"/>
+          </a:solidFill>
+          <a:ln w="12700">
+            <a:solidFill>
+              <a:srgbClr val="C89B3C"/>
+            </a:solidFill>
+            <a:prstDash val="solid"/>
+          </a:ln>
+        </p:spPr>
+      </p:sp>
+      <p:sp>
+        <p:nvSpPr>
+          <p:cNvPr id="16" name="Text 14"/>
           <p:cNvSpPr/>
           <p:nvPr/>
         </p:nvSpPr>
@@ -6167,7 +8501,7 @@
                 <a:ea typeface="Fraunces" pitchFamily="34" charset="-122"/>
                 <a:cs typeface="Fraunces" pitchFamily="34" charset="-120"/>
               </a:rPr>
-              <a:t>HINT 2 / 4</a:t>
+              <a:t>HINT 2 / 7</a:t>
             </a:r>
             <a:endParaRPr lang="en-US" sz="1400" dirty="0"/>
           </a:p>
@@ -6175,7 +8509,7 @@
       </p:sp>
       <p:sp>
         <p:nvSpPr>
-          <p:cNvPr id="14" name="Shape 12"/>
+          <p:cNvPr id="17" name="Shape 15"/>
           <p:cNvSpPr/>
           <p:nvPr/>
         </p:nvSpPr>
@@ -6200,7 +8534,7 @@
       </p:sp>
       <p:sp>
         <p:nvSpPr>
-          <p:cNvPr id="15" name="Text 13"/>
+          <p:cNvPr id="18" name="Text 16"/>
           <p:cNvSpPr/>
           <p:nvPr/>
         </p:nvSpPr>
@@ -6239,14 +8573,14 @@
       </p:sp>
       <p:sp>
         <p:nvSpPr>
-          <p:cNvPr id="16" name="Shape 14"/>
-          <p:cNvSpPr/>
-          <p:nvPr/>
-        </p:nvSpPr>
-        <p:spPr>
-          <a:xfrm>
-            <a:off x="3611880" y="1399032"/>
-            <a:ext cx="365760" cy="365760"/>
+          <p:cNvPr id="19" name="Shape 17"/>
+          <p:cNvSpPr/>
+          <p:nvPr/>
+        </p:nvSpPr>
+        <p:spPr>
+          <a:xfrm>
+            <a:off x="3611880" y="1380744"/>
+            <a:ext cx="329184" cy="329184"/>
           </a:xfrm>
           <a:prstGeom prst="ellipse">
             <a:avLst/>
@@ -6264,14 +8598,14 @@
       </p:sp>
       <p:sp>
         <p:nvSpPr>
-          <p:cNvPr id="17" name="Text 15"/>
-          <p:cNvSpPr/>
-          <p:nvPr/>
-        </p:nvSpPr>
-        <p:spPr>
-          <a:xfrm>
-            <a:off x="3611880" y="1399032"/>
-            <a:ext cx="365760" cy="365760"/>
+          <p:cNvPr id="20" name="Text 18"/>
+          <p:cNvSpPr/>
+          <p:nvPr/>
+        </p:nvSpPr>
+        <p:spPr>
+          <a:xfrm>
+            <a:off x="3611880" y="1380744"/>
+            <a:ext cx="329184" cy="329184"/>
           </a:xfrm>
           <a:prstGeom prst="rect">
             <a:avLst/>
@@ -6287,7 +8621,7 @@
               <a:buNone/>
             </a:pPr>
             <a:r>
-              <a:rPr lang="en-US" sz="1400" b="1" dirty="0">
+              <a:rPr lang="en-US" sz="1200" b="1" dirty="0">
                 <a:solidFill>
                   <a:srgbClr val="DCC07F"/>
                 </a:solidFill>
@@ -6297,20 +8631,20 @@
               </a:rPr>
               <a:t>1</a:t>
             </a:r>
-            <a:endParaRPr lang="en-US" sz="1400" dirty="0"/>
-          </a:p>
-        </p:txBody>
-      </p:sp>
-      <p:sp>
-        <p:nvSpPr>
-          <p:cNvPr id="18" name="Text 16"/>
-          <p:cNvSpPr/>
-          <p:nvPr/>
-        </p:nvSpPr>
-        <p:spPr>
-          <a:xfrm>
-            <a:off x="4160520" y="1325880"/>
-            <a:ext cx="7482535" cy="658368"/>
+            <a:endParaRPr lang="en-US" sz="1200" dirty="0"/>
+          </a:p>
+        </p:txBody>
+      </p:sp>
+      <p:sp>
+        <p:nvSpPr>
+          <p:cNvPr id="21" name="Text 19"/>
+          <p:cNvSpPr/>
+          <p:nvPr/>
+        </p:nvSpPr>
+        <p:spPr>
+          <a:xfrm>
+            <a:off x="4114800" y="1325880"/>
+            <a:ext cx="7528255" cy="895380"/>
           </a:xfrm>
           <a:prstGeom prst="rect">
             <a:avLst/>
@@ -6324,7 +8658,7 @@
           <a:p>
             <a:pPr indent="0" marL="0">
               <a:lnSpc>
-                <a:spcPct val="105000"/>
+                <a:spcPct val="100000"/>
               </a:lnSpc>
               <a:buNone/>
             </a:pPr>
@@ -6344,12 +8678,12 @@
           <a:p>
             <a:pPr indent="0" marL="0">
               <a:lnSpc>
-                <a:spcPct val="105000"/>
+                <a:spcPct val="100000"/>
               </a:lnSpc>
               <a:buNone/>
             </a:pPr>
             <a:r>
-              <a:rPr lang="en-US" sz="1100" dirty="0">
+              <a:rPr lang="en-US" sz="1200" dirty="0">
                 <a:solidFill>
                   <a:srgbClr val="A8BDB2"/>
                 </a:solidFill>
@@ -6357,21 +8691,41 @@
                 <a:ea typeface="Noto Sans KR" pitchFamily="34" charset="-122"/>
                 <a:cs typeface="Noto Sans KR" pitchFamily="34" charset="-120"/>
               </a:rPr>
-              <a:t>My life motto: “Be content with today, and give it my best.”   ·   Mi lema: «Estar en paz con el presente y dar lo mejor de mí».</a:t>
+              <a:t>My life motto: “Be content with today, and give it my best.”</a:t>
             </a:r>
             <a:endParaRPr lang="en-US" sz="1500" dirty="0"/>
           </a:p>
-        </p:txBody>
-      </p:sp>
-      <p:sp>
-        <p:nvSpPr>
-          <p:cNvPr id="19" name="Shape 17"/>
-          <p:cNvSpPr/>
-          <p:nvPr/>
-        </p:nvSpPr>
-        <p:spPr>
-          <a:xfrm>
-            <a:off x="3611880" y="2276856"/>
+          <a:p>
+            <a:pPr indent="0" marL="0">
+              <a:lnSpc>
+                <a:spcPct val="100000"/>
+              </a:lnSpc>
+              <a:buNone/>
+            </a:pPr>
+            <a:r>
+              <a:rPr lang="en-US" sz="1200" dirty="0">
+                <a:solidFill>
+                  <a:srgbClr val="A8BDB2"/>
+                </a:solidFill>
+                <a:latin typeface="Noto Sans KR" pitchFamily="34" charset="0"/>
+                <a:ea typeface="Noto Sans KR" pitchFamily="34" charset="-122"/>
+                <a:cs typeface="Noto Sans KR" pitchFamily="34" charset="-120"/>
+              </a:rPr>
+              <a:t>Mi lema: «Estar en paz con el presente y dar lo mejor de mí».</a:t>
+            </a:r>
+            <a:endParaRPr lang="en-US" sz="1500" dirty="0"/>
+          </a:p>
+        </p:txBody>
+      </p:sp>
+      <p:sp>
+        <p:nvSpPr>
+          <p:cNvPr id="22" name="Shape 20"/>
+          <p:cNvSpPr/>
+          <p:nvPr/>
+        </p:nvSpPr>
+        <p:spPr>
+          <a:xfrm>
+            <a:off x="3611880" y="2513868"/>
             <a:ext cx="640080" cy="640080"/>
           </a:xfrm>
           <a:prstGeom prst="ellipse">
@@ -6390,13 +8744,13 @@
       </p:sp>
       <p:sp>
         <p:nvSpPr>
-          <p:cNvPr id="20" name="Text 18"/>
-          <p:cNvSpPr/>
-          <p:nvPr/>
-        </p:nvSpPr>
-        <p:spPr>
-          <a:xfrm>
-            <a:off x="3611880" y="2276856"/>
+          <p:cNvPr id="23" name="Text 21"/>
+          <p:cNvSpPr/>
+          <p:nvPr/>
+        </p:nvSpPr>
+        <p:spPr>
+          <a:xfrm>
+            <a:off x="3611880" y="2513868"/>
             <a:ext cx="640080" cy="640080"/>
           </a:xfrm>
           <a:prstGeom prst="rect">
@@ -6429,14 +8783,14 @@
       </p:sp>
       <p:sp>
         <p:nvSpPr>
-          <p:cNvPr id="21" name="Text 19"/>
-          <p:cNvSpPr/>
-          <p:nvPr/>
-        </p:nvSpPr>
-        <p:spPr>
-          <a:xfrm>
-            <a:off x="4480560" y="2167128"/>
-            <a:ext cx="7162495" cy="3913632"/>
+          <p:cNvPr id="24" name="Text 22"/>
+          <p:cNvSpPr/>
+          <p:nvPr/>
+        </p:nvSpPr>
+        <p:spPr>
+          <a:xfrm>
+            <a:off x="4480560" y="2404140"/>
+            <a:ext cx="7162495" cy="3676620"/>
           </a:xfrm>
           <a:prstGeom prst="rect">
             <a:avLst/>
@@ -6722,7 +9076,7 @@
                 <a:ea typeface="Fraunces" pitchFamily="34" charset="-122"/>
                 <a:cs typeface="Fraunces" pitchFamily="34" charset="-120"/>
               </a:rPr>
-              <a:t>6 / 11</a:t>
+              <a:t>6 / 14</a:t>
             </a:r>
             <a:endParaRPr lang="en-US" sz="1000" dirty="0"/>
           </a:p>
@@ -6814,7 +9168,7 @@
         </p:nvSpPr>
         <p:spPr>
           <a:xfrm>
-            <a:off x="1170432" y="4343400"/>
+            <a:off x="594360" y="4343400"/>
             <a:ext cx="256032" cy="256032"/>
           </a:xfrm>
           <a:prstGeom prst="ellipse">
@@ -6839,7 +9193,7 @@
         </p:nvSpPr>
         <p:spPr>
           <a:xfrm>
-            <a:off x="1554480" y="4343400"/>
+            <a:off x="978408" y="4343400"/>
             <a:ext cx="256032" cy="256032"/>
           </a:xfrm>
           <a:prstGeom prst="ellipse">
@@ -6864,7 +9218,7 @@
         </p:nvSpPr>
         <p:spPr>
           <a:xfrm>
-            <a:off x="1938528" y="4343400"/>
+            <a:off x="1362456" y="4343400"/>
             <a:ext cx="256032" cy="256032"/>
           </a:xfrm>
           <a:prstGeom prst="ellipse">
@@ -6889,7 +9243,7 @@
         </p:nvSpPr>
         <p:spPr>
           <a:xfrm>
-            <a:off x="2322576" y="4343400"/>
+            <a:off x="1746504" y="4343400"/>
             <a:ext cx="256032" cy="256032"/>
           </a:xfrm>
           <a:prstGeom prst="ellipse">
@@ -6908,7 +9262,82 @@
       </p:sp>
       <p:sp>
         <p:nvSpPr>
-          <p:cNvPr id="13" name="Text 11"/>
+          <p:cNvPr id="13" name="Shape 11"/>
+          <p:cNvSpPr/>
+          <p:nvPr/>
+        </p:nvSpPr>
+        <p:spPr>
+          <a:xfrm>
+            <a:off x="2130552" y="4343400"/>
+            <a:ext cx="256032" cy="256032"/>
+          </a:xfrm>
+          <a:prstGeom prst="ellipse">
+            <a:avLst/>
+          </a:prstGeom>
+          <a:solidFill>
+            <a:srgbClr val="14342B"/>
+          </a:solidFill>
+          <a:ln w="12700">
+            <a:solidFill>
+              <a:srgbClr val="C89B3C"/>
+            </a:solidFill>
+            <a:prstDash val="solid"/>
+          </a:ln>
+        </p:spPr>
+      </p:sp>
+      <p:sp>
+        <p:nvSpPr>
+          <p:cNvPr id="14" name="Shape 12"/>
+          <p:cNvSpPr/>
+          <p:nvPr/>
+        </p:nvSpPr>
+        <p:spPr>
+          <a:xfrm>
+            <a:off x="2514600" y="4343400"/>
+            <a:ext cx="256032" cy="256032"/>
+          </a:xfrm>
+          <a:prstGeom prst="ellipse">
+            <a:avLst/>
+          </a:prstGeom>
+          <a:solidFill>
+            <a:srgbClr val="14342B"/>
+          </a:solidFill>
+          <a:ln w="12700">
+            <a:solidFill>
+              <a:srgbClr val="C89B3C"/>
+            </a:solidFill>
+            <a:prstDash val="solid"/>
+          </a:ln>
+        </p:spPr>
+      </p:sp>
+      <p:sp>
+        <p:nvSpPr>
+          <p:cNvPr id="15" name="Shape 13"/>
+          <p:cNvSpPr/>
+          <p:nvPr/>
+        </p:nvSpPr>
+        <p:spPr>
+          <a:xfrm>
+            <a:off x="2898648" y="4343400"/>
+            <a:ext cx="256032" cy="256032"/>
+          </a:xfrm>
+          <a:prstGeom prst="ellipse">
+            <a:avLst/>
+          </a:prstGeom>
+          <a:solidFill>
+            <a:srgbClr val="14342B"/>
+          </a:solidFill>
+          <a:ln w="12700">
+            <a:solidFill>
+              <a:srgbClr val="C89B3C"/>
+            </a:solidFill>
+            <a:prstDash val="solid"/>
+          </a:ln>
+        </p:spPr>
+      </p:sp>
+      <p:sp>
+        <p:nvSpPr>
+          <p:cNvPr id="16" name="Text 14"/>
           <p:cNvSpPr/>
           <p:nvPr/>
         </p:nvSpPr>
@@ -6939,7 +9368,7 @@
                 <a:ea typeface="Fraunces" pitchFamily="34" charset="-122"/>
                 <a:cs typeface="Fraunces" pitchFamily="34" charset="-120"/>
               </a:rPr>
-              <a:t>HINT 3 / 4</a:t>
+              <a:t>HINT 3 / 7</a:t>
             </a:r>
             <a:endParaRPr lang="en-US" sz="1400" dirty="0"/>
           </a:p>
@@ -6947,7 +9376,7 @@
       </p:sp>
       <p:sp>
         <p:nvSpPr>
-          <p:cNvPr id="14" name="Shape 12"/>
+          <p:cNvPr id="17" name="Shape 15"/>
           <p:cNvSpPr/>
           <p:nvPr/>
         </p:nvSpPr>
@@ -6972,7 +9401,7 @@
       </p:sp>
       <p:sp>
         <p:nvSpPr>
-          <p:cNvPr id="15" name="Text 13"/>
+          <p:cNvPr id="18" name="Text 16"/>
           <p:cNvSpPr/>
           <p:nvPr/>
         </p:nvSpPr>
@@ -7011,14 +9440,14 @@
       </p:sp>
       <p:sp>
         <p:nvSpPr>
-          <p:cNvPr id="16" name="Shape 14"/>
-          <p:cNvSpPr/>
-          <p:nvPr/>
-        </p:nvSpPr>
-        <p:spPr>
-          <a:xfrm>
-            <a:off x="3611880" y="1399032"/>
-            <a:ext cx="365760" cy="365760"/>
+          <p:cNvPr id="19" name="Shape 17"/>
+          <p:cNvSpPr/>
+          <p:nvPr/>
+        </p:nvSpPr>
+        <p:spPr>
+          <a:xfrm>
+            <a:off x="3611880" y="1380744"/>
+            <a:ext cx="329184" cy="329184"/>
           </a:xfrm>
           <a:prstGeom prst="ellipse">
             <a:avLst/>
@@ -7036,14 +9465,14 @@
       </p:sp>
       <p:sp>
         <p:nvSpPr>
-          <p:cNvPr id="17" name="Text 15"/>
-          <p:cNvSpPr/>
-          <p:nvPr/>
-        </p:nvSpPr>
-        <p:spPr>
-          <a:xfrm>
-            <a:off x="3611880" y="1399032"/>
-            <a:ext cx="365760" cy="365760"/>
+          <p:cNvPr id="20" name="Text 18"/>
+          <p:cNvSpPr/>
+          <p:nvPr/>
+        </p:nvSpPr>
+        <p:spPr>
+          <a:xfrm>
+            <a:off x="3611880" y="1380744"/>
+            <a:ext cx="329184" cy="329184"/>
           </a:xfrm>
           <a:prstGeom prst="rect">
             <a:avLst/>
@@ -7059,7 +9488,7 @@
               <a:buNone/>
             </a:pPr>
             <a:r>
-              <a:rPr lang="en-US" sz="1400" b="1" dirty="0">
+              <a:rPr lang="en-US" sz="1200" b="1" dirty="0">
                 <a:solidFill>
                   <a:srgbClr val="DCC07F"/>
                 </a:solidFill>
@@ -7069,20 +9498,20 @@
               </a:rPr>
               <a:t>1</a:t>
             </a:r>
-            <a:endParaRPr lang="en-US" sz="1400" dirty="0"/>
-          </a:p>
-        </p:txBody>
-      </p:sp>
-      <p:sp>
-        <p:nvSpPr>
-          <p:cNvPr id="18" name="Text 16"/>
-          <p:cNvSpPr/>
-          <p:nvPr/>
-        </p:nvSpPr>
-        <p:spPr>
-          <a:xfrm>
-            <a:off x="4160520" y="1325880"/>
-            <a:ext cx="7482535" cy="658368"/>
+            <a:endParaRPr lang="en-US" sz="1200" dirty="0"/>
+          </a:p>
+        </p:txBody>
+      </p:sp>
+      <p:sp>
+        <p:nvSpPr>
+          <p:cNvPr id="21" name="Text 19"/>
+          <p:cNvSpPr/>
+          <p:nvPr/>
+        </p:nvSpPr>
+        <p:spPr>
+          <a:xfrm>
+            <a:off x="4114800" y="1325880"/>
+            <a:ext cx="7528255" cy="895380"/>
           </a:xfrm>
           <a:prstGeom prst="rect">
             <a:avLst/>
@@ -7096,7 +9525,7 @@
           <a:p>
             <a:pPr indent="0" marL="0">
               <a:lnSpc>
-                <a:spcPct val="105000"/>
+                <a:spcPct val="100000"/>
               </a:lnSpc>
               <a:buNone/>
             </a:pPr>
@@ -7116,12 +9545,12 @@
           <a:p>
             <a:pPr indent="0" marL="0">
               <a:lnSpc>
-                <a:spcPct val="105000"/>
+                <a:spcPct val="100000"/>
               </a:lnSpc>
               <a:buNone/>
             </a:pPr>
             <a:r>
-              <a:rPr lang="en-US" sz="1100" dirty="0">
+              <a:rPr lang="en-US" sz="1200" dirty="0">
                 <a:solidFill>
                   <a:srgbClr val="A8BDB2"/>
                 </a:solidFill>
@@ -7129,22 +9558,42 @@
                 <a:ea typeface="Noto Sans KR" pitchFamily="34" charset="-122"/>
                 <a:cs typeface="Noto Sans KR" pitchFamily="34" charset="-120"/>
               </a:rPr>
-              <a:t>My life motto: “Be content with today, and give it my best.”   ·   Mi lema: «Estar en paz con el presente y dar lo mejor de mí».</a:t>
+              <a:t>My life motto: “Be content with today, and give it my best.”</a:t>
             </a:r>
             <a:endParaRPr lang="en-US" sz="1500" dirty="0"/>
           </a:p>
-        </p:txBody>
-      </p:sp>
-      <p:sp>
-        <p:nvSpPr>
-          <p:cNvPr id="19" name="Shape 17"/>
-          <p:cNvSpPr/>
-          <p:nvPr/>
-        </p:nvSpPr>
-        <p:spPr>
-          <a:xfrm>
-            <a:off x="3611880" y="2057400"/>
-            <a:ext cx="365760" cy="365760"/>
+          <a:p>
+            <a:pPr indent="0" marL="0">
+              <a:lnSpc>
+                <a:spcPct val="100000"/>
+              </a:lnSpc>
+              <a:buNone/>
+            </a:pPr>
+            <a:r>
+              <a:rPr lang="en-US" sz="1200" dirty="0">
+                <a:solidFill>
+                  <a:srgbClr val="A8BDB2"/>
+                </a:solidFill>
+                <a:latin typeface="Noto Sans KR" pitchFamily="34" charset="0"/>
+                <a:ea typeface="Noto Sans KR" pitchFamily="34" charset="-122"/>
+                <a:cs typeface="Noto Sans KR" pitchFamily="34" charset="-120"/>
+              </a:rPr>
+              <a:t>Mi lema: «Estar en paz con el presente y dar lo mejor de mí».</a:t>
+            </a:r>
+            <a:endParaRPr lang="en-US" sz="1500" dirty="0"/>
+          </a:p>
+        </p:txBody>
+      </p:sp>
+      <p:sp>
+        <p:nvSpPr>
+          <p:cNvPr id="22" name="Shape 20"/>
+          <p:cNvSpPr/>
+          <p:nvPr/>
+        </p:nvSpPr>
+        <p:spPr>
+          <a:xfrm>
+            <a:off x="3611880" y="2276124"/>
+            <a:ext cx="329184" cy="329184"/>
           </a:xfrm>
           <a:prstGeom prst="ellipse">
             <a:avLst/>
@@ -7162,14 +9611,14 @@
       </p:sp>
       <p:sp>
         <p:nvSpPr>
-          <p:cNvPr id="20" name="Text 18"/>
-          <p:cNvSpPr/>
-          <p:nvPr/>
-        </p:nvSpPr>
-        <p:spPr>
-          <a:xfrm>
-            <a:off x="3611880" y="2057400"/>
-            <a:ext cx="365760" cy="365760"/>
+          <p:cNvPr id="23" name="Text 21"/>
+          <p:cNvSpPr/>
+          <p:nvPr/>
+        </p:nvSpPr>
+        <p:spPr>
+          <a:xfrm>
+            <a:off x="3611880" y="2276124"/>
+            <a:ext cx="329184" cy="329184"/>
           </a:xfrm>
           <a:prstGeom prst="rect">
             <a:avLst/>
@@ -7185,7 +9634,7 @@
               <a:buNone/>
             </a:pPr>
             <a:r>
-              <a:rPr lang="en-US" sz="1400" b="1" dirty="0">
+              <a:rPr lang="en-US" sz="1200" b="1" dirty="0">
                 <a:solidFill>
                   <a:srgbClr val="DCC07F"/>
                 </a:solidFill>
@@ -7195,20 +9644,20 @@
               </a:rPr>
               <a:t>2</a:t>
             </a:r>
-            <a:endParaRPr lang="en-US" sz="1400" dirty="0"/>
-          </a:p>
-        </p:txBody>
-      </p:sp>
-      <p:sp>
-        <p:nvSpPr>
-          <p:cNvPr id="21" name="Text 19"/>
-          <p:cNvSpPr/>
-          <p:nvPr/>
-        </p:nvSpPr>
-        <p:spPr>
-          <a:xfrm>
-            <a:off x="4160520" y="1984248"/>
-            <a:ext cx="7482535" cy="658368"/>
+            <a:endParaRPr lang="en-US" sz="1200" dirty="0"/>
+          </a:p>
+        </p:txBody>
+      </p:sp>
+      <p:sp>
+        <p:nvSpPr>
+          <p:cNvPr id="24" name="Text 22"/>
+          <p:cNvSpPr/>
+          <p:nvPr/>
+        </p:nvSpPr>
+        <p:spPr>
+          <a:xfrm>
+            <a:off x="4114800" y="2221260"/>
+            <a:ext cx="7528255" cy="895380"/>
           </a:xfrm>
           <a:prstGeom prst="rect">
             <a:avLst/>
@@ -7222,7 +9671,7 @@
           <a:p>
             <a:pPr indent="0" marL="0">
               <a:lnSpc>
-                <a:spcPct val="105000"/>
+                <a:spcPct val="100000"/>
               </a:lnSpc>
               <a:buNone/>
             </a:pPr>
@@ -7242,12 +9691,12 @@
           <a:p>
             <a:pPr indent="0" marL="0">
               <a:lnSpc>
-                <a:spcPct val="105000"/>
+                <a:spcPct val="100000"/>
               </a:lnSpc>
               <a:buNone/>
             </a:pPr>
             <a:r>
-              <a:rPr lang="en-US" sz="1100" dirty="0">
+              <a:rPr lang="en-US" sz="1200" dirty="0">
                 <a:solidFill>
                   <a:srgbClr val="A8BDB2"/>
                 </a:solidFill>
@@ -7255,21 +9704,41 @@
                 <a:ea typeface="Noto Sans KR" pitchFamily="34" charset="-122"/>
                 <a:cs typeface="Noto Sans KR" pitchFamily="34" charset="-120"/>
               </a:rPr>
-              <a:t>My favorite food is naengmyeon — Korean cold noodles.   ·   Mi comida favorita es el naengmyeon, fideos fríos coreanos.</a:t>
+              <a:t>My favorite food is naengmyeon — Korean cold noodles.</a:t>
             </a:r>
             <a:endParaRPr lang="en-US" sz="1500" dirty="0"/>
           </a:p>
-        </p:txBody>
-      </p:sp>
-      <p:sp>
-        <p:nvSpPr>
-          <p:cNvPr id="22" name="Shape 20"/>
-          <p:cNvSpPr/>
-          <p:nvPr/>
-        </p:nvSpPr>
-        <p:spPr>
-          <a:xfrm>
-            <a:off x="3611880" y="2935224"/>
+          <a:p>
+            <a:pPr indent="0" marL="0">
+              <a:lnSpc>
+                <a:spcPct val="100000"/>
+              </a:lnSpc>
+              <a:buNone/>
+            </a:pPr>
+            <a:r>
+              <a:rPr lang="en-US" sz="1200" dirty="0">
+                <a:solidFill>
+                  <a:srgbClr val="A8BDB2"/>
+                </a:solidFill>
+                <a:latin typeface="Noto Sans KR" pitchFamily="34" charset="0"/>
+                <a:ea typeface="Noto Sans KR" pitchFamily="34" charset="-122"/>
+                <a:cs typeface="Noto Sans KR" pitchFamily="34" charset="-120"/>
+              </a:rPr>
+              <a:t>Mi comida favorita es el naengmyeon, fideos fríos coreanos.</a:t>
+            </a:r>
+            <a:endParaRPr lang="en-US" sz="1500" dirty="0"/>
+          </a:p>
+        </p:txBody>
+      </p:sp>
+      <p:sp>
+        <p:nvSpPr>
+          <p:cNvPr id="25" name="Shape 23"/>
+          <p:cNvSpPr/>
+          <p:nvPr/>
+        </p:nvSpPr>
+        <p:spPr>
+          <a:xfrm>
+            <a:off x="3611880" y="3409249"/>
             <a:ext cx="640080" cy="640080"/>
           </a:xfrm>
           <a:prstGeom prst="ellipse">
@@ -7288,13 +9757,13 @@
       </p:sp>
       <p:sp>
         <p:nvSpPr>
-          <p:cNvPr id="23" name="Text 21"/>
-          <p:cNvSpPr/>
-          <p:nvPr/>
-        </p:nvSpPr>
-        <p:spPr>
-          <a:xfrm>
-            <a:off x="3611880" y="2935224"/>
+          <p:cNvPr id="26" name="Text 24"/>
+          <p:cNvSpPr/>
+          <p:nvPr/>
+        </p:nvSpPr>
+        <p:spPr>
+          <a:xfrm>
+            <a:off x="3611880" y="3409249"/>
             <a:ext cx="640080" cy="640080"/>
           </a:xfrm>
           <a:prstGeom prst="rect">
@@ -7327,14 +9796,14 @@
       </p:sp>
       <p:sp>
         <p:nvSpPr>
-          <p:cNvPr id="24" name="Text 22"/>
-          <p:cNvSpPr/>
-          <p:nvPr/>
-        </p:nvSpPr>
-        <p:spPr>
-          <a:xfrm>
-            <a:off x="4480560" y="2825496"/>
-            <a:ext cx="7162495" cy="3255264"/>
+          <p:cNvPr id="27" name="Text 25"/>
+          <p:cNvSpPr/>
+          <p:nvPr/>
+        </p:nvSpPr>
+        <p:spPr>
+          <a:xfrm>
+            <a:off x="4480560" y="3299521"/>
+            <a:ext cx="7162495" cy="2781239"/>
           </a:xfrm>
           <a:prstGeom prst="rect">
             <a:avLst/>
@@ -7620,7 +10089,7 @@
                 <a:ea typeface="Fraunces" pitchFamily="34" charset="-122"/>
                 <a:cs typeface="Fraunces" pitchFamily="34" charset="-120"/>
               </a:rPr>
-              <a:t>7 / 11</a:t>
+              <a:t>7 / 14</a:t>
             </a:r>
             <a:endParaRPr lang="en-US" sz="1000" dirty="0"/>
           </a:p>
@@ -7712,7 +10181,7 @@
         </p:nvSpPr>
         <p:spPr>
           <a:xfrm>
-            <a:off x="1170432" y="4343400"/>
+            <a:off x="594360" y="4343400"/>
             <a:ext cx="256032" cy="256032"/>
           </a:xfrm>
           <a:prstGeom prst="ellipse">
@@ -7737,7 +10206,7 @@
         </p:nvSpPr>
         <p:spPr>
           <a:xfrm>
-            <a:off x="1554480" y="4343400"/>
+            <a:off x="978408" y="4343400"/>
             <a:ext cx="256032" cy="256032"/>
           </a:xfrm>
           <a:prstGeom prst="ellipse">
@@ -7762,7 +10231,7 @@
         </p:nvSpPr>
         <p:spPr>
           <a:xfrm>
-            <a:off x="1938528" y="4343400"/>
+            <a:off x="1362456" y="4343400"/>
             <a:ext cx="256032" cy="256032"/>
           </a:xfrm>
           <a:prstGeom prst="ellipse">
@@ -7787,7 +10256,7 @@
         </p:nvSpPr>
         <p:spPr>
           <a:xfrm>
-            <a:off x="2322576" y="4343400"/>
+            <a:off x="1746504" y="4343400"/>
             <a:ext cx="256032" cy="256032"/>
           </a:xfrm>
           <a:prstGeom prst="ellipse">
@@ -7806,7 +10275,82 @@
       </p:sp>
       <p:sp>
         <p:nvSpPr>
-          <p:cNvPr id="13" name="Text 11"/>
+          <p:cNvPr id="13" name="Shape 11"/>
+          <p:cNvSpPr/>
+          <p:nvPr/>
+        </p:nvSpPr>
+        <p:spPr>
+          <a:xfrm>
+            <a:off x="2130552" y="4343400"/>
+            <a:ext cx="256032" cy="256032"/>
+          </a:xfrm>
+          <a:prstGeom prst="ellipse">
+            <a:avLst/>
+          </a:prstGeom>
+          <a:solidFill>
+            <a:srgbClr val="14342B"/>
+          </a:solidFill>
+          <a:ln w="12700">
+            <a:solidFill>
+              <a:srgbClr val="C89B3C"/>
+            </a:solidFill>
+            <a:prstDash val="solid"/>
+          </a:ln>
+        </p:spPr>
+      </p:sp>
+      <p:sp>
+        <p:nvSpPr>
+          <p:cNvPr id="14" name="Shape 12"/>
+          <p:cNvSpPr/>
+          <p:nvPr/>
+        </p:nvSpPr>
+        <p:spPr>
+          <a:xfrm>
+            <a:off x="2514600" y="4343400"/>
+            <a:ext cx="256032" cy="256032"/>
+          </a:xfrm>
+          <a:prstGeom prst="ellipse">
+            <a:avLst/>
+          </a:prstGeom>
+          <a:solidFill>
+            <a:srgbClr val="14342B"/>
+          </a:solidFill>
+          <a:ln w="12700">
+            <a:solidFill>
+              <a:srgbClr val="C89B3C"/>
+            </a:solidFill>
+            <a:prstDash val="solid"/>
+          </a:ln>
+        </p:spPr>
+      </p:sp>
+      <p:sp>
+        <p:nvSpPr>
+          <p:cNvPr id="15" name="Shape 13"/>
+          <p:cNvSpPr/>
+          <p:nvPr/>
+        </p:nvSpPr>
+        <p:spPr>
+          <a:xfrm>
+            <a:off x="2898648" y="4343400"/>
+            <a:ext cx="256032" cy="256032"/>
+          </a:xfrm>
+          <a:prstGeom prst="ellipse">
+            <a:avLst/>
+          </a:prstGeom>
+          <a:solidFill>
+            <a:srgbClr val="14342B"/>
+          </a:solidFill>
+          <a:ln w="12700">
+            <a:solidFill>
+              <a:srgbClr val="C89B3C"/>
+            </a:solidFill>
+            <a:prstDash val="solid"/>
+          </a:ln>
+        </p:spPr>
+      </p:sp>
+      <p:sp>
+        <p:nvSpPr>
+          <p:cNvPr id="16" name="Text 14"/>
           <p:cNvSpPr/>
           <p:nvPr/>
         </p:nvSpPr>
@@ -7837,7 +10381,7 @@
                 <a:ea typeface="Fraunces" pitchFamily="34" charset="-122"/>
                 <a:cs typeface="Fraunces" pitchFamily="34" charset="-120"/>
               </a:rPr>
-              <a:t>HINT 4 / 4</a:t>
+              <a:t>HINT 4 / 7</a:t>
             </a:r>
             <a:endParaRPr lang="en-US" sz="1400" dirty="0"/>
           </a:p>
@@ -7845,7 +10389,7 @@
       </p:sp>
       <p:sp>
         <p:nvSpPr>
-          <p:cNvPr id="14" name="Shape 12"/>
+          <p:cNvPr id="17" name="Shape 15"/>
           <p:cNvSpPr/>
           <p:nvPr/>
         </p:nvSpPr>
@@ -7870,7 +10414,7 @@
       </p:sp>
       <p:sp>
         <p:nvSpPr>
-          <p:cNvPr id="15" name="Text 13"/>
+          <p:cNvPr id="18" name="Text 16"/>
           <p:cNvSpPr/>
           <p:nvPr/>
         </p:nvSpPr>
@@ -7909,14 +10453,14 @@
       </p:sp>
       <p:sp>
         <p:nvSpPr>
-          <p:cNvPr id="16" name="Shape 14"/>
-          <p:cNvSpPr/>
-          <p:nvPr/>
-        </p:nvSpPr>
-        <p:spPr>
-          <a:xfrm>
-            <a:off x="3611880" y="1399032"/>
-            <a:ext cx="365760" cy="365760"/>
+          <p:cNvPr id="19" name="Shape 17"/>
+          <p:cNvSpPr/>
+          <p:nvPr/>
+        </p:nvSpPr>
+        <p:spPr>
+          <a:xfrm>
+            <a:off x="3611880" y="1380744"/>
+            <a:ext cx="329184" cy="329184"/>
           </a:xfrm>
           <a:prstGeom prst="ellipse">
             <a:avLst/>
@@ -7934,14 +10478,14 @@
       </p:sp>
       <p:sp>
         <p:nvSpPr>
-          <p:cNvPr id="17" name="Text 15"/>
-          <p:cNvSpPr/>
-          <p:nvPr/>
-        </p:nvSpPr>
-        <p:spPr>
-          <a:xfrm>
-            <a:off x="3611880" y="1399032"/>
-            <a:ext cx="365760" cy="365760"/>
+          <p:cNvPr id="20" name="Text 18"/>
+          <p:cNvSpPr/>
+          <p:nvPr/>
+        </p:nvSpPr>
+        <p:spPr>
+          <a:xfrm>
+            <a:off x="3611880" y="1380744"/>
+            <a:ext cx="329184" cy="329184"/>
           </a:xfrm>
           <a:prstGeom prst="rect">
             <a:avLst/>
@@ -7957,7 +10501,7 @@
               <a:buNone/>
             </a:pPr>
             <a:r>
-              <a:rPr lang="en-US" sz="1400" b="1" dirty="0">
+              <a:rPr lang="en-US" sz="1200" b="1" dirty="0">
                 <a:solidFill>
                   <a:srgbClr val="DCC07F"/>
                 </a:solidFill>
@@ -7967,20 +10511,20 @@
               </a:rPr>
               <a:t>1</a:t>
             </a:r>
-            <a:endParaRPr lang="en-US" sz="1400" dirty="0"/>
-          </a:p>
-        </p:txBody>
-      </p:sp>
-      <p:sp>
-        <p:nvSpPr>
-          <p:cNvPr id="18" name="Text 16"/>
-          <p:cNvSpPr/>
-          <p:nvPr/>
-        </p:nvSpPr>
-        <p:spPr>
-          <a:xfrm>
-            <a:off x="4160520" y="1325880"/>
-            <a:ext cx="7482535" cy="658368"/>
+            <a:endParaRPr lang="en-US" sz="1200" dirty="0"/>
+          </a:p>
+        </p:txBody>
+      </p:sp>
+      <p:sp>
+        <p:nvSpPr>
+          <p:cNvPr id="21" name="Text 19"/>
+          <p:cNvSpPr/>
+          <p:nvPr/>
+        </p:nvSpPr>
+        <p:spPr>
+          <a:xfrm>
+            <a:off x="4114800" y="1325880"/>
+            <a:ext cx="7528255" cy="746150"/>
           </a:xfrm>
           <a:prstGeom prst="rect">
             <a:avLst/>
@@ -7994,12 +10538,12 @@
           <a:p>
             <a:pPr indent="0" marL="0">
               <a:lnSpc>
-                <a:spcPct val="105000"/>
+                <a:spcPct val="100000"/>
               </a:lnSpc>
               <a:buNone/>
             </a:pPr>
             <a:r>
-              <a:rPr lang="en-US" sz="1500" dirty="0">
+              <a:rPr lang="en-US" sz="1300" dirty="0">
                 <a:solidFill>
                   <a:srgbClr val="E7EAE3"/>
                 </a:solidFill>
@@ -8009,17 +10553,17 @@
               </a:rPr>
               <a:t>제 삶의 모토는 — “현재에 만족하고 최선을 다하자”</a:t>
             </a:r>
-            <a:endParaRPr lang="en-US" sz="1500" dirty="0"/>
+            <a:endParaRPr lang="en-US" sz="1300" dirty="0"/>
           </a:p>
           <a:p>
             <a:pPr indent="0" marL="0">
               <a:lnSpc>
-                <a:spcPct val="105000"/>
+                <a:spcPct val="100000"/>
               </a:lnSpc>
               <a:buNone/>
             </a:pPr>
             <a:r>
-              <a:rPr lang="en-US" sz="1100" dirty="0">
+              <a:rPr lang="en-US" sz="1000" dirty="0">
                 <a:solidFill>
                   <a:srgbClr val="A8BDB2"/>
                 </a:solidFill>
@@ -8027,22 +10571,42 @@
                 <a:ea typeface="Noto Sans KR" pitchFamily="34" charset="-122"/>
                 <a:cs typeface="Noto Sans KR" pitchFamily="34" charset="-120"/>
               </a:rPr>
-              <a:t>My life motto: “Be content with today, and give it my best.”   ·   Mi lema: «Estar en paz con el presente y dar lo mejor de mí».</a:t>
-            </a:r>
-            <a:endParaRPr lang="en-US" sz="1500" dirty="0"/>
-          </a:p>
-        </p:txBody>
-      </p:sp>
-      <p:sp>
-        <p:nvSpPr>
-          <p:cNvPr id="19" name="Shape 17"/>
-          <p:cNvSpPr/>
-          <p:nvPr/>
-        </p:nvSpPr>
-        <p:spPr>
-          <a:xfrm>
-            <a:off x="3611880" y="2057400"/>
-            <a:ext cx="365760" cy="365760"/>
+              <a:t>My life motto: “Be content with today, and give it my best.”</a:t>
+            </a:r>
+            <a:endParaRPr lang="en-US" sz="1300" dirty="0"/>
+          </a:p>
+          <a:p>
+            <a:pPr indent="0" marL="0">
+              <a:lnSpc>
+                <a:spcPct val="100000"/>
+              </a:lnSpc>
+              <a:buNone/>
+            </a:pPr>
+            <a:r>
+              <a:rPr lang="en-US" sz="1000" dirty="0">
+                <a:solidFill>
+                  <a:srgbClr val="A8BDB2"/>
+                </a:solidFill>
+                <a:latin typeface="Noto Sans KR" pitchFamily="34" charset="0"/>
+                <a:ea typeface="Noto Sans KR" pitchFamily="34" charset="-122"/>
+                <a:cs typeface="Noto Sans KR" pitchFamily="34" charset="-120"/>
+              </a:rPr>
+              <a:t>Mi lema: «Estar en paz con el presente y dar lo mejor de mí».</a:t>
+            </a:r>
+            <a:endParaRPr lang="en-US" sz="1300" dirty="0"/>
+          </a:p>
+        </p:txBody>
+      </p:sp>
+      <p:sp>
+        <p:nvSpPr>
+          <p:cNvPr id="22" name="Shape 20"/>
+          <p:cNvSpPr/>
+          <p:nvPr/>
+        </p:nvSpPr>
+        <p:spPr>
+          <a:xfrm>
+            <a:off x="3611880" y="2126894"/>
+            <a:ext cx="329184" cy="329184"/>
           </a:xfrm>
           <a:prstGeom prst="ellipse">
             <a:avLst/>
@@ -8060,14 +10624,14 @@
       </p:sp>
       <p:sp>
         <p:nvSpPr>
-          <p:cNvPr id="20" name="Text 18"/>
-          <p:cNvSpPr/>
-          <p:nvPr/>
-        </p:nvSpPr>
-        <p:spPr>
-          <a:xfrm>
-            <a:off x="3611880" y="2057400"/>
-            <a:ext cx="365760" cy="365760"/>
+          <p:cNvPr id="23" name="Text 21"/>
+          <p:cNvSpPr/>
+          <p:nvPr/>
+        </p:nvSpPr>
+        <p:spPr>
+          <a:xfrm>
+            <a:off x="3611880" y="2126894"/>
+            <a:ext cx="329184" cy="329184"/>
           </a:xfrm>
           <a:prstGeom prst="rect">
             <a:avLst/>
@@ -8083,7 +10647,7 @@
               <a:buNone/>
             </a:pPr>
             <a:r>
-              <a:rPr lang="en-US" sz="1400" b="1" dirty="0">
+              <a:rPr lang="en-US" sz="1200" b="1" dirty="0">
                 <a:solidFill>
                   <a:srgbClr val="DCC07F"/>
                 </a:solidFill>
@@ -8093,20 +10657,20 @@
               </a:rPr>
               <a:t>2</a:t>
             </a:r>
-            <a:endParaRPr lang="en-US" sz="1400" dirty="0"/>
-          </a:p>
-        </p:txBody>
-      </p:sp>
-      <p:sp>
-        <p:nvSpPr>
-          <p:cNvPr id="21" name="Text 19"/>
-          <p:cNvSpPr/>
-          <p:nvPr/>
-        </p:nvSpPr>
-        <p:spPr>
-          <a:xfrm>
-            <a:off x="4160520" y="1984248"/>
-            <a:ext cx="7482535" cy="658368"/>
+            <a:endParaRPr lang="en-US" sz="1200" dirty="0"/>
+          </a:p>
+        </p:txBody>
+      </p:sp>
+      <p:sp>
+        <p:nvSpPr>
+          <p:cNvPr id="24" name="Text 22"/>
+          <p:cNvSpPr/>
+          <p:nvPr/>
+        </p:nvSpPr>
+        <p:spPr>
+          <a:xfrm>
+            <a:off x="4114800" y="2072030"/>
+            <a:ext cx="7528255" cy="746150"/>
           </a:xfrm>
           <a:prstGeom prst="rect">
             <a:avLst/>
@@ -8120,12 +10684,12 @@
           <a:p>
             <a:pPr indent="0" marL="0">
               <a:lnSpc>
-                <a:spcPct val="105000"/>
+                <a:spcPct val="100000"/>
               </a:lnSpc>
               <a:buNone/>
             </a:pPr>
             <a:r>
-              <a:rPr lang="en-US" sz="1500" dirty="0">
+              <a:rPr lang="en-US" sz="1300" dirty="0">
                 <a:solidFill>
                   <a:srgbClr val="E7EAE3"/>
                 </a:solidFill>
@@ -8135,17 +10699,17 @@
               </a:rPr>
               <a:t>가장 좋아하는 음식은 냉면입니다.</a:t>
             </a:r>
-            <a:endParaRPr lang="en-US" sz="1500" dirty="0"/>
+            <a:endParaRPr lang="en-US" sz="1300" dirty="0"/>
           </a:p>
           <a:p>
             <a:pPr indent="0" marL="0">
               <a:lnSpc>
-                <a:spcPct val="105000"/>
+                <a:spcPct val="100000"/>
               </a:lnSpc>
               <a:buNone/>
             </a:pPr>
             <a:r>
-              <a:rPr lang="en-US" sz="1100" dirty="0">
+              <a:rPr lang="en-US" sz="1000" dirty="0">
                 <a:solidFill>
                   <a:srgbClr val="A8BDB2"/>
                 </a:solidFill>
@@ -8153,22 +10717,42 @@
                 <a:ea typeface="Noto Sans KR" pitchFamily="34" charset="-122"/>
                 <a:cs typeface="Noto Sans KR" pitchFamily="34" charset="-120"/>
               </a:rPr>
-              <a:t>My favorite food is naengmyeon — Korean cold noodles.   ·   Mi comida favorita es el naengmyeon, fideos fríos coreanos.</a:t>
-            </a:r>
-            <a:endParaRPr lang="en-US" sz="1500" dirty="0"/>
-          </a:p>
-        </p:txBody>
-      </p:sp>
-      <p:sp>
-        <p:nvSpPr>
-          <p:cNvPr id="22" name="Shape 20"/>
-          <p:cNvSpPr/>
-          <p:nvPr/>
-        </p:nvSpPr>
-        <p:spPr>
-          <a:xfrm>
-            <a:off x="3611880" y="2715768"/>
-            <a:ext cx="365760" cy="365760"/>
+              <a:t>My favorite food is naengmyeon — Korean cold noodles.</a:t>
+            </a:r>
+            <a:endParaRPr lang="en-US" sz="1300" dirty="0"/>
+          </a:p>
+          <a:p>
+            <a:pPr indent="0" marL="0">
+              <a:lnSpc>
+                <a:spcPct val="100000"/>
+              </a:lnSpc>
+              <a:buNone/>
+            </a:pPr>
+            <a:r>
+              <a:rPr lang="en-US" sz="1000" dirty="0">
+                <a:solidFill>
+                  <a:srgbClr val="A8BDB2"/>
+                </a:solidFill>
+                <a:latin typeface="Noto Sans KR" pitchFamily="34" charset="0"/>
+                <a:ea typeface="Noto Sans KR" pitchFamily="34" charset="-122"/>
+                <a:cs typeface="Noto Sans KR" pitchFamily="34" charset="-120"/>
+              </a:rPr>
+              <a:t>Mi comida favorita es el naengmyeon, fideos fríos coreanos.</a:t>
+            </a:r>
+            <a:endParaRPr lang="en-US" sz="1300" dirty="0"/>
+          </a:p>
+        </p:txBody>
+      </p:sp>
+      <p:sp>
+        <p:nvSpPr>
+          <p:cNvPr id="25" name="Shape 23"/>
+          <p:cNvSpPr/>
+          <p:nvPr/>
+        </p:nvSpPr>
+        <p:spPr>
+          <a:xfrm>
+            <a:off x="3611880" y="2873045"/>
+            <a:ext cx="329184" cy="329184"/>
           </a:xfrm>
           <a:prstGeom prst="ellipse">
             <a:avLst/>
@@ -8186,14 +10770,14 @@
       </p:sp>
       <p:sp>
         <p:nvSpPr>
-          <p:cNvPr id="23" name="Text 21"/>
-          <p:cNvSpPr/>
-          <p:nvPr/>
-        </p:nvSpPr>
-        <p:spPr>
-          <a:xfrm>
-            <a:off x="3611880" y="2715768"/>
-            <a:ext cx="365760" cy="365760"/>
+          <p:cNvPr id="26" name="Text 24"/>
+          <p:cNvSpPr/>
+          <p:nvPr/>
+        </p:nvSpPr>
+        <p:spPr>
+          <a:xfrm>
+            <a:off x="3611880" y="2873045"/>
+            <a:ext cx="329184" cy="329184"/>
           </a:xfrm>
           <a:prstGeom prst="rect">
             <a:avLst/>
@@ -8209,7 +10793,7 @@
               <a:buNone/>
             </a:pPr>
             <a:r>
-              <a:rPr lang="en-US" sz="1400" b="1" dirty="0">
+              <a:rPr lang="en-US" sz="1200" b="1" dirty="0">
                 <a:solidFill>
                   <a:srgbClr val="DCC07F"/>
                 </a:solidFill>
@@ -8219,20 +10803,20 @@
               </a:rPr>
               <a:t>3</a:t>
             </a:r>
-            <a:endParaRPr lang="en-US" sz="1400" dirty="0"/>
-          </a:p>
-        </p:txBody>
-      </p:sp>
-      <p:sp>
-        <p:nvSpPr>
-          <p:cNvPr id="24" name="Text 22"/>
-          <p:cNvSpPr/>
-          <p:nvPr/>
-        </p:nvSpPr>
-        <p:spPr>
-          <a:xfrm>
-            <a:off x="4160520" y="2642616"/>
-            <a:ext cx="7482535" cy="658368"/>
+            <a:endParaRPr lang="en-US" sz="1200" dirty="0"/>
+          </a:p>
+        </p:txBody>
+      </p:sp>
+      <p:sp>
+        <p:nvSpPr>
+          <p:cNvPr id="27" name="Text 25"/>
+          <p:cNvSpPr/>
+          <p:nvPr/>
+        </p:nvSpPr>
+        <p:spPr>
+          <a:xfrm>
+            <a:off x="4114800" y="2818181"/>
+            <a:ext cx="7528255" cy="548640"/>
           </a:xfrm>
           <a:prstGeom prst="rect">
             <a:avLst/>
@@ -8246,12 +10830,12 @@
           <a:p>
             <a:pPr indent="0" marL="0">
               <a:lnSpc>
-                <a:spcPct val="105000"/>
+                <a:spcPct val="100000"/>
               </a:lnSpc>
               <a:buNone/>
             </a:pPr>
             <a:r>
-              <a:rPr lang="en-US" sz="1500" dirty="0">
+              <a:rPr lang="en-US" sz="1300" dirty="0">
                 <a:solidFill>
                   <a:srgbClr val="E7EAE3"/>
                 </a:solidFill>
@@ -8261,17 +10845,17 @@
               </a:rPr>
               <a:t>경기도 안성에서 태어났습니다.</a:t>
             </a:r>
-            <a:endParaRPr lang="en-US" sz="1500" dirty="0"/>
+            <a:endParaRPr lang="en-US" sz="1300" dirty="0"/>
           </a:p>
           <a:p>
             <a:pPr indent="0" marL="0">
               <a:lnSpc>
-                <a:spcPct val="105000"/>
+                <a:spcPct val="100000"/>
               </a:lnSpc>
               <a:buNone/>
             </a:pPr>
             <a:r>
-              <a:rPr lang="en-US" sz="1100" dirty="0">
+              <a:rPr lang="en-US" sz="1000" dirty="0">
                 <a:solidFill>
                   <a:srgbClr val="A8BDB2"/>
                 </a:solidFill>
@@ -8281,19 +10865,19 @@
               </a:rPr>
               <a:t>I was born in Anseong, Gyeonggi Province, Korea.   ·   Nací en Anseong, provincia de Gyeonggi, Corea.</a:t>
             </a:r>
-            <a:endParaRPr lang="en-US" sz="1500" dirty="0"/>
-          </a:p>
-        </p:txBody>
-      </p:sp>
-      <p:sp>
-        <p:nvSpPr>
-          <p:cNvPr id="25" name="Shape 23"/>
-          <p:cNvSpPr/>
-          <p:nvPr/>
-        </p:nvSpPr>
-        <p:spPr>
-          <a:xfrm>
-            <a:off x="3611880" y="3593592"/>
+            <a:endParaRPr lang="en-US" sz="1300" dirty="0"/>
+          </a:p>
+        </p:txBody>
+      </p:sp>
+      <p:sp>
+        <p:nvSpPr>
+          <p:cNvPr id="28" name="Shape 26"/>
+          <p:cNvSpPr/>
+          <p:nvPr/>
+        </p:nvSpPr>
+        <p:spPr>
+          <a:xfrm>
+            <a:off x="3611880" y="3659429"/>
             <a:ext cx="640080" cy="640080"/>
           </a:xfrm>
           <a:prstGeom prst="ellipse">
@@ -8312,13 +10896,13 @@
       </p:sp>
       <p:sp>
         <p:nvSpPr>
-          <p:cNvPr id="26" name="Text 24"/>
-          <p:cNvSpPr/>
-          <p:nvPr/>
-        </p:nvSpPr>
-        <p:spPr>
-          <a:xfrm>
-            <a:off x="3611880" y="3593592"/>
+          <p:cNvPr id="29" name="Text 27"/>
+          <p:cNvSpPr/>
+          <p:nvPr/>
+        </p:nvSpPr>
+        <p:spPr>
+          <a:xfrm>
+            <a:off x="3611880" y="3659429"/>
             <a:ext cx="640080" cy="640080"/>
           </a:xfrm>
           <a:prstGeom prst="rect">
@@ -8351,14 +10935,14 @@
       </p:sp>
       <p:sp>
         <p:nvSpPr>
-          <p:cNvPr id="27" name="Text 25"/>
-          <p:cNvSpPr/>
-          <p:nvPr/>
-        </p:nvSpPr>
-        <p:spPr>
-          <a:xfrm>
-            <a:off x="4480560" y="3483864"/>
-            <a:ext cx="7162495" cy="2596896"/>
+          <p:cNvPr id="30" name="Text 28"/>
+          <p:cNvSpPr/>
+          <p:nvPr/>
+        </p:nvSpPr>
+        <p:spPr>
+          <a:xfrm>
+            <a:off x="4480560" y="3549701"/>
+            <a:ext cx="7162495" cy="2531059"/>
           </a:xfrm>
           <a:prstGeom prst="rect">
             <a:avLst/>
@@ -8388,7 +10972,7 @@
                 <a:ea typeface="Nanum Myeongjo" pitchFamily="34" charset="-122"/>
                 <a:cs typeface="Nanum Myeongjo" pitchFamily="34" charset="-120"/>
               </a:rPr>
-              <a:t>미국 사람과 결혼해서 영어를 잘할 것 같지만… 사실 영어를 잘 못 합니다!</a:t>
+              <a:t>좋아하는 곳은 시온성전, 좋아하는 시간은 점심 교제와 구역예배입니다.</a:t>
             </a:r>
             <a:endParaRPr lang="en-US" sz="2800" dirty="0"/>
           </a:p>
@@ -8411,7 +10995,7 @@
                 <a:ea typeface="Noto Sans KR" pitchFamily="34" charset="-122"/>
                 <a:cs typeface="Noto Sans KR" pitchFamily="34" charset="-120"/>
               </a:rPr>
-              <a:t>I married an American, so you’d think my English is great… it’s not!</a:t>
+              <a:t>Favorite place: the Zion Sanctuary. Favorite time: lunch fellowship and district worship.</a:t>
             </a:r>
             <a:endParaRPr lang="en-US" sz="2800" dirty="0"/>
           </a:p>
@@ -8431,7 +11015,7 @@
                 <a:ea typeface="Noto Sans KR" pitchFamily="34" charset="-122"/>
                 <a:cs typeface="Noto Sans KR" pitchFamily="34" charset="-120"/>
               </a:rPr>
-              <a:t>Me casé con un estadounidense, así que pensarías que hablo bien inglés… ¡pues no!</a:t>
+              <a:t>Lugar favorito: el Santuario Sion. Momento favorito: el almuerzo y el culto de distrito.</a:t>
             </a:r>
             <a:endParaRPr lang="en-US" sz="2800" dirty="0"/>
           </a:p>
@@ -8644,7 +11228,7 @@
                 <a:ea typeface="Fraunces" pitchFamily="34" charset="-122"/>
                 <a:cs typeface="Fraunces" pitchFamily="34" charset="-120"/>
               </a:rPr>
-              <a:t>8 / 11</a:t>
+              <a:t>8 / 14</a:t>
             </a:r>
             <a:endParaRPr lang="en-US" sz="1000" dirty="0"/>
           </a:p>
@@ -8736,7 +11320,7 @@
         </p:nvSpPr>
         <p:spPr>
           <a:xfrm>
-            <a:off x="978408" y="4343400"/>
+            <a:off x="594360" y="4343400"/>
             <a:ext cx="256032" cy="256032"/>
           </a:xfrm>
           <a:prstGeom prst="ellipse">
@@ -8761,7 +11345,7 @@
         </p:nvSpPr>
         <p:spPr>
           <a:xfrm>
-            <a:off x="1362456" y="4343400"/>
+            <a:off x="978408" y="4343400"/>
             <a:ext cx="256032" cy="256032"/>
           </a:xfrm>
           <a:prstGeom prst="ellipse">
@@ -8786,7 +11370,7 @@
         </p:nvSpPr>
         <p:spPr>
           <a:xfrm>
-            <a:off x="1746504" y="4343400"/>
+            <a:off x="1362456" y="4343400"/>
             <a:ext cx="256032" cy="256032"/>
           </a:xfrm>
           <a:prstGeom prst="ellipse">
@@ -8811,7 +11395,7 @@
         </p:nvSpPr>
         <p:spPr>
           <a:xfrm>
-            <a:off x="2130552" y="4343400"/>
+            <a:off x="1746504" y="4343400"/>
             <a:ext cx="256032" cy="256032"/>
           </a:xfrm>
           <a:prstGeom prst="ellipse">
@@ -8836,7 +11420,7 @@
         </p:nvSpPr>
         <p:spPr>
           <a:xfrm>
-            <a:off x="2514600" y="4343400"/>
+            <a:off x="2130552" y="4343400"/>
             <a:ext cx="256032" cy="256032"/>
           </a:xfrm>
           <a:prstGeom prst="ellipse">
@@ -8855,7 +11439,57 @@
       </p:sp>
       <p:sp>
         <p:nvSpPr>
-          <p:cNvPr id="14" name="Text 12"/>
+          <p:cNvPr id="14" name="Shape 12"/>
+          <p:cNvSpPr/>
+          <p:nvPr/>
+        </p:nvSpPr>
+        <p:spPr>
+          <a:xfrm>
+            <a:off x="2514600" y="4343400"/>
+            <a:ext cx="256032" cy="256032"/>
+          </a:xfrm>
+          <a:prstGeom prst="ellipse">
+            <a:avLst/>
+          </a:prstGeom>
+          <a:solidFill>
+            <a:srgbClr val="14342B"/>
+          </a:solidFill>
+          <a:ln w="12700">
+            <a:solidFill>
+              <a:srgbClr val="C89B3C"/>
+            </a:solidFill>
+            <a:prstDash val="solid"/>
+          </a:ln>
+        </p:spPr>
+      </p:sp>
+      <p:sp>
+        <p:nvSpPr>
+          <p:cNvPr id="15" name="Shape 13"/>
+          <p:cNvSpPr/>
+          <p:nvPr/>
+        </p:nvSpPr>
+        <p:spPr>
+          <a:xfrm>
+            <a:off x="2898648" y="4343400"/>
+            <a:ext cx="256032" cy="256032"/>
+          </a:xfrm>
+          <a:prstGeom prst="ellipse">
+            <a:avLst/>
+          </a:prstGeom>
+          <a:solidFill>
+            <a:srgbClr val="14342B"/>
+          </a:solidFill>
+          <a:ln w="12700">
+            <a:solidFill>
+              <a:srgbClr val="C89B3C"/>
+            </a:solidFill>
+            <a:prstDash val="solid"/>
+          </a:ln>
+        </p:spPr>
+      </p:sp>
+      <p:sp>
+        <p:nvSpPr>
+          <p:cNvPr id="16" name="Text 14"/>
           <p:cNvSpPr/>
           <p:nvPr/>
         </p:nvSpPr>
@@ -8886,7 +11520,7 @@
                 <a:ea typeface="Fraunces" pitchFamily="34" charset="-122"/>
                 <a:cs typeface="Fraunces" pitchFamily="34" charset="-120"/>
               </a:rPr>
-              <a:t>HINT 5 / 5</a:t>
+              <a:t>HINT 5 / 7</a:t>
             </a:r>
             <a:endParaRPr lang="en-US" sz="1400" dirty="0"/>
           </a:p>
@@ -8894,7 +11528,7 @@
       </p:sp>
       <p:sp>
         <p:nvSpPr>
-          <p:cNvPr id="15" name="Shape 13"/>
+          <p:cNvPr id="17" name="Shape 15"/>
           <p:cNvSpPr/>
           <p:nvPr/>
         </p:nvSpPr>
@@ -8919,7 +11553,7 @@
       </p:sp>
       <p:sp>
         <p:nvSpPr>
-          <p:cNvPr id="16" name="Text 14"/>
+          <p:cNvPr id="18" name="Text 16"/>
           <p:cNvSpPr/>
           <p:nvPr/>
         </p:nvSpPr>
@@ -8958,14 +11592,39 @@
       </p:sp>
       <p:sp>
         <p:nvSpPr>
-          <p:cNvPr id="17" name="Text 15"/>
-          <p:cNvSpPr/>
-          <p:nvPr/>
-        </p:nvSpPr>
-        <p:spPr>
-          <a:xfrm>
-            <a:off x="3611880" y="1280160"/>
-            <a:ext cx="8031175" cy="548640"/>
+          <p:cNvPr id="19" name="Shape 17"/>
+          <p:cNvSpPr/>
+          <p:nvPr/>
+        </p:nvSpPr>
+        <p:spPr>
+          <a:xfrm>
+            <a:off x="3611880" y="1380744"/>
+            <a:ext cx="329184" cy="329184"/>
+          </a:xfrm>
+          <a:prstGeom prst="ellipse">
+            <a:avLst/>
+          </a:prstGeom>
+          <a:solidFill>
+            <a:srgbClr val="14342B"/>
+          </a:solidFill>
+          <a:ln w="12700">
+            <a:solidFill>
+              <a:srgbClr val="DCC07F"/>
+            </a:solidFill>
+            <a:prstDash val="solid"/>
+          </a:ln>
+        </p:spPr>
+      </p:sp>
+      <p:sp>
+        <p:nvSpPr>
+          <p:cNvPr id="20" name="Text 18"/>
+          <p:cNvSpPr/>
+          <p:nvPr/>
+        </p:nvSpPr>
+        <p:spPr>
+          <a:xfrm>
+            <a:off x="3611880" y="1380744"/>
+            <a:ext cx="329184" cy="329184"/>
           </a:xfrm>
           <a:prstGeom prst="rect">
             <a:avLst/>
@@ -8977,7 +11636,616 @@
           <a:bodyPr wrap="square" rtlCol="0" anchor="ctr"/>
           <a:lstStyle/>
           <a:p>
-            <a:pPr indent="0" marL="0">
+            <a:pPr algn="ctr" indent="0" marL="0">
+              <a:buNone/>
+            </a:pPr>
+            <a:r>
+              <a:rPr lang="en-US" sz="1200" b="1" dirty="0">
+                <a:solidFill>
+                  <a:srgbClr val="DCC07F"/>
+                </a:solidFill>
+                <a:latin typeface="Fraunces" pitchFamily="34" charset="0"/>
+                <a:ea typeface="Fraunces" pitchFamily="34" charset="-122"/>
+                <a:cs typeface="Fraunces" pitchFamily="34" charset="-120"/>
+              </a:rPr>
+              <a:t>1</a:t>
+            </a:r>
+            <a:endParaRPr lang="en-US" sz="1200" dirty="0"/>
+          </a:p>
+        </p:txBody>
+      </p:sp>
+      <p:sp>
+        <p:nvSpPr>
+          <p:cNvPr id="21" name="Text 19"/>
+          <p:cNvSpPr/>
+          <p:nvPr/>
+        </p:nvSpPr>
+        <p:spPr>
+          <a:xfrm>
+            <a:off x="4114800" y="1325880"/>
+            <a:ext cx="7528255" cy="746150"/>
+          </a:xfrm>
+          <a:prstGeom prst="rect">
+            <a:avLst/>
+          </a:prstGeom>
+          <a:noFill/>
+          <a:ln/>
+        </p:spPr>
+        <p:txBody>
+          <a:bodyPr wrap="square" rtlCol="0" anchor="t"/>
+          <a:lstStyle/>
+          <a:p>
+            <a:pPr indent="0" marL="0">
+              <a:lnSpc>
+                <a:spcPct val="100000"/>
+              </a:lnSpc>
+              <a:buNone/>
+            </a:pPr>
+            <a:r>
+              <a:rPr lang="en-US" sz="1300" dirty="0">
+                <a:solidFill>
+                  <a:srgbClr val="E7EAE3"/>
+                </a:solidFill>
+                <a:latin typeface="Noto Sans KR" pitchFamily="34" charset="0"/>
+                <a:ea typeface="Noto Sans KR" pitchFamily="34" charset="-122"/>
+                <a:cs typeface="Noto Sans KR" pitchFamily="34" charset="-120"/>
+              </a:rPr>
+              <a:t>제 삶의 모토는 — “현재에 만족하고 최선을 다하자”</a:t>
+            </a:r>
+            <a:endParaRPr lang="en-US" sz="1300" dirty="0"/>
+          </a:p>
+          <a:p>
+            <a:pPr indent="0" marL="0">
+              <a:lnSpc>
+                <a:spcPct val="100000"/>
+              </a:lnSpc>
+              <a:buNone/>
+            </a:pPr>
+            <a:r>
+              <a:rPr lang="en-US" sz="1000" dirty="0">
+                <a:solidFill>
+                  <a:srgbClr val="A8BDB2"/>
+                </a:solidFill>
+                <a:latin typeface="Noto Sans KR" pitchFamily="34" charset="0"/>
+                <a:ea typeface="Noto Sans KR" pitchFamily="34" charset="-122"/>
+                <a:cs typeface="Noto Sans KR" pitchFamily="34" charset="-120"/>
+              </a:rPr>
+              <a:t>My life motto: “Be content with today, and give it my best.”</a:t>
+            </a:r>
+            <a:endParaRPr lang="en-US" sz="1300" dirty="0"/>
+          </a:p>
+          <a:p>
+            <a:pPr indent="0" marL="0">
+              <a:lnSpc>
+                <a:spcPct val="100000"/>
+              </a:lnSpc>
+              <a:buNone/>
+            </a:pPr>
+            <a:r>
+              <a:rPr lang="en-US" sz="1000" dirty="0">
+                <a:solidFill>
+                  <a:srgbClr val="A8BDB2"/>
+                </a:solidFill>
+                <a:latin typeface="Noto Sans KR" pitchFamily="34" charset="0"/>
+                <a:ea typeface="Noto Sans KR" pitchFamily="34" charset="-122"/>
+                <a:cs typeface="Noto Sans KR" pitchFamily="34" charset="-120"/>
+              </a:rPr>
+              <a:t>Mi lema: «Estar en paz con el presente y dar lo mejor de mí».</a:t>
+            </a:r>
+            <a:endParaRPr lang="en-US" sz="1300" dirty="0"/>
+          </a:p>
+        </p:txBody>
+      </p:sp>
+      <p:sp>
+        <p:nvSpPr>
+          <p:cNvPr id="22" name="Shape 20"/>
+          <p:cNvSpPr/>
+          <p:nvPr/>
+        </p:nvSpPr>
+        <p:spPr>
+          <a:xfrm>
+            <a:off x="3611880" y="2126894"/>
+            <a:ext cx="329184" cy="329184"/>
+          </a:xfrm>
+          <a:prstGeom prst="ellipse">
+            <a:avLst/>
+          </a:prstGeom>
+          <a:solidFill>
+            <a:srgbClr val="14342B"/>
+          </a:solidFill>
+          <a:ln w="12700">
+            <a:solidFill>
+              <a:srgbClr val="DCC07F"/>
+            </a:solidFill>
+            <a:prstDash val="solid"/>
+          </a:ln>
+        </p:spPr>
+      </p:sp>
+      <p:sp>
+        <p:nvSpPr>
+          <p:cNvPr id="23" name="Text 21"/>
+          <p:cNvSpPr/>
+          <p:nvPr/>
+        </p:nvSpPr>
+        <p:spPr>
+          <a:xfrm>
+            <a:off x="3611880" y="2126894"/>
+            <a:ext cx="329184" cy="329184"/>
+          </a:xfrm>
+          <a:prstGeom prst="rect">
+            <a:avLst/>
+          </a:prstGeom>
+          <a:noFill/>
+          <a:ln/>
+        </p:spPr>
+        <p:txBody>
+          <a:bodyPr wrap="square" rtlCol="0" anchor="ctr"/>
+          <a:lstStyle/>
+          <a:p>
+            <a:pPr algn="ctr" indent="0" marL="0">
+              <a:buNone/>
+            </a:pPr>
+            <a:r>
+              <a:rPr lang="en-US" sz="1200" b="1" dirty="0">
+                <a:solidFill>
+                  <a:srgbClr val="DCC07F"/>
+                </a:solidFill>
+                <a:latin typeface="Fraunces" pitchFamily="34" charset="0"/>
+                <a:ea typeface="Fraunces" pitchFamily="34" charset="-122"/>
+                <a:cs typeface="Fraunces" pitchFamily="34" charset="-120"/>
+              </a:rPr>
+              <a:t>2</a:t>
+            </a:r>
+            <a:endParaRPr lang="en-US" sz="1200" dirty="0"/>
+          </a:p>
+        </p:txBody>
+      </p:sp>
+      <p:sp>
+        <p:nvSpPr>
+          <p:cNvPr id="24" name="Text 22"/>
+          <p:cNvSpPr/>
+          <p:nvPr/>
+        </p:nvSpPr>
+        <p:spPr>
+          <a:xfrm>
+            <a:off x="4114800" y="2072030"/>
+            <a:ext cx="7528255" cy="746150"/>
+          </a:xfrm>
+          <a:prstGeom prst="rect">
+            <a:avLst/>
+          </a:prstGeom>
+          <a:noFill/>
+          <a:ln/>
+        </p:spPr>
+        <p:txBody>
+          <a:bodyPr wrap="square" rtlCol="0" anchor="t"/>
+          <a:lstStyle/>
+          <a:p>
+            <a:pPr indent="0" marL="0">
+              <a:lnSpc>
+                <a:spcPct val="100000"/>
+              </a:lnSpc>
+              <a:buNone/>
+            </a:pPr>
+            <a:r>
+              <a:rPr lang="en-US" sz="1300" dirty="0">
+                <a:solidFill>
+                  <a:srgbClr val="E7EAE3"/>
+                </a:solidFill>
+                <a:latin typeface="Noto Sans KR" pitchFamily="34" charset="0"/>
+                <a:ea typeface="Noto Sans KR" pitchFamily="34" charset="-122"/>
+                <a:cs typeface="Noto Sans KR" pitchFamily="34" charset="-120"/>
+              </a:rPr>
+              <a:t>가장 좋아하는 음식은 냉면입니다.</a:t>
+            </a:r>
+            <a:endParaRPr lang="en-US" sz="1300" dirty="0"/>
+          </a:p>
+          <a:p>
+            <a:pPr indent="0" marL="0">
+              <a:lnSpc>
+                <a:spcPct val="100000"/>
+              </a:lnSpc>
+              <a:buNone/>
+            </a:pPr>
+            <a:r>
+              <a:rPr lang="en-US" sz="1000" dirty="0">
+                <a:solidFill>
+                  <a:srgbClr val="A8BDB2"/>
+                </a:solidFill>
+                <a:latin typeface="Noto Sans KR" pitchFamily="34" charset="0"/>
+                <a:ea typeface="Noto Sans KR" pitchFamily="34" charset="-122"/>
+                <a:cs typeface="Noto Sans KR" pitchFamily="34" charset="-120"/>
+              </a:rPr>
+              <a:t>My favorite food is naengmyeon — Korean cold noodles.</a:t>
+            </a:r>
+            <a:endParaRPr lang="en-US" sz="1300" dirty="0"/>
+          </a:p>
+          <a:p>
+            <a:pPr indent="0" marL="0">
+              <a:lnSpc>
+                <a:spcPct val="100000"/>
+              </a:lnSpc>
+              <a:buNone/>
+            </a:pPr>
+            <a:r>
+              <a:rPr lang="en-US" sz="1000" dirty="0">
+                <a:solidFill>
+                  <a:srgbClr val="A8BDB2"/>
+                </a:solidFill>
+                <a:latin typeface="Noto Sans KR" pitchFamily="34" charset="0"/>
+                <a:ea typeface="Noto Sans KR" pitchFamily="34" charset="-122"/>
+                <a:cs typeface="Noto Sans KR" pitchFamily="34" charset="-120"/>
+              </a:rPr>
+              <a:t>Mi comida favorita es el naengmyeon, fideos fríos coreanos.</a:t>
+            </a:r>
+            <a:endParaRPr lang="en-US" sz="1300" dirty="0"/>
+          </a:p>
+        </p:txBody>
+      </p:sp>
+      <p:sp>
+        <p:nvSpPr>
+          <p:cNvPr id="25" name="Shape 23"/>
+          <p:cNvSpPr/>
+          <p:nvPr/>
+        </p:nvSpPr>
+        <p:spPr>
+          <a:xfrm>
+            <a:off x="3611880" y="2873045"/>
+            <a:ext cx="329184" cy="329184"/>
+          </a:xfrm>
+          <a:prstGeom prst="ellipse">
+            <a:avLst/>
+          </a:prstGeom>
+          <a:solidFill>
+            <a:srgbClr val="14342B"/>
+          </a:solidFill>
+          <a:ln w="12700">
+            <a:solidFill>
+              <a:srgbClr val="DCC07F"/>
+            </a:solidFill>
+            <a:prstDash val="solid"/>
+          </a:ln>
+        </p:spPr>
+      </p:sp>
+      <p:sp>
+        <p:nvSpPr>
+          <p:cNvPr id="26" name="Text 24"/>
+          <p:cNvSpPr/>
+          <p:nvPr/>
+        </p:nvSpPr>
+        <p:spPr>
+          <a:xfrm>
+            <a:off x="3611880" y="2873045"/>
+            <a:ext cx="329184" cy="329184"/>
+          </a:xfrm>
+          <a:prstGeom prst="rect">
+            <a:avLst/>
+          </a:prstGeom>
+          <a:noFill/>
+          <a:ln/>
+        </p:spPr>
+        <p:txBody>
+          <a:bodyPr wrap="square" rtlCol="0" anchor="ctr"/>
+          <a:lstStyle/>
+          <a:p>
+            <a:pPr algn="ctr" indent="0" marL="0">
+              <a:buNone/>
+            </a:pPr>
+            <a:r>
+              <a:rPr lang="en-US" sz="1200" b="1" dirty="0">
+                <a:solidFill>
+                  <a:srgbClr val="DCC07F"/>
+                </a:solidFill>
+                <a:latin typeface="Fraunces" pitchFamily="34" charset="0"/>
+                <a:ea typeface="Fraunces" pitchFamily="34" charset="-122"/>
+                <a:cs typeface="Fraunces" pitchFamily="34" charset="-120"/>
+              </a:rPr>
+              <a:t>3</a:t>
+            </a:r>
+            <a:endParaRPr lang="en-US" sz="1200" dirty="0"/>
+          </a:p>
+        </p:txBody>
+      </p:sp>
+      <p:sp>
+        <p:nvSpPr>
+          <p:cNvPr id="27" name="Text 25"/>
+          <p:cNvSpPr/>
+          <p:nvPr/>
+        </p:nvSpPr>
+        <p:spPr>
+          <a:xfrm>
+            <a:off x="4114800" y="2818181"/>
+            <a:ext cx="7528255" cy="548640"/>
+          </a:xfrm>
+          <a:prstGeom prst="rect">
+            <a:avLst/>
+          </a:prstGeom>
+          <a:noFill/>
+          <a:ln/>
+        </p:spPr>
+        <p:txBody>
+          <a:bodyPr wrap="square" rtlCol="0" anchor="t"/>
+          <a:lstStyle/>
+          <a:p>
+            <a:pPr indent="0" marL="0">
+              <a:lnSpc>
+                <a:spcPct val="100000"/>
+              </a:lnSpc>
+              <a:buNone/>
+            </a:pPr>
+            <a:r>
+              <a:rPr lang="en-US" sz="1300" dirty="0">
+                <a:solidFill>
+                  <a:srgbClr val="E7EAE3"/>
+                </a:solidFill>
+                <a:latin typeface="Noto Sans KR" pitchFamily="34" charset="0"/>
+                <a:ea typeface="Noto Sans KR" pitchFamily="34" charset="-122"/>
+                <a:cs typeface="Noto Sans KR" pitchFamily="34" charset="-120"/>
+              </a:rPr>
+              <a:t>경기도 안성에서 태어났습니다.</a:t>
+            </a:r>
+            <a:endParaRPr lang="en-US" sz="1300" dirty="0"/>
+          </a:p>
+          <a:p>
+            <a:pPr indent="0" marL="0">
+              <a:lnSpc>
+                <a:spcPct val="100000"/>
+              </a:lnSpc>
+              <a:buNone/>
+            </a:pPr>
+            <a:r>
+              <a:rPr lang="en-US" sz="1000" dirty="0">
+                <a:solidFill>
+                  <a:srgbClr val="A8BDB2"/>
+                </a:solidFill>
+                <a:latin typeface="Noto Sans KR" pitchFamily="34" charset="0"/>
+                <a:ea typeface="Noto Sans KR" pitchFamily="34" charset="-122"/>
+                <a:cs typeface="Noto Sans KR" pitchFamily="34" charset="-120"/>
+              </a:rPr>
+              <a:t>I was born in Anseong, Gyeonggi Province, Korea.   ·   Nací en Anseong, provincia de Gyeonggi, Corea.</a:t>
+            </a:r>
+            <a:endParaRPr lang="en-US" sz="1300" dirty="0"/>
+          </a:p>
+        </p:txBody>
+      </p:sp>
+      <p:sp>
+        <p:nvSpPr>
+          <p:cNvPr id="28" name="Shape 26"/>
+          <p:cNvSpPr/>
+          <p:nvPr/>
+        </p:nvSpPr>
+        <p:spPr>
+          <a:xfrm>
+            <a:off x="3611880" y="3421685"/>
+            <a:ext cx="329184" cy="329184"/>
+          </a:xfrm>
+          <a:prstGeom prst="ellipse">
+            <a:avLst/>
+          </a:prstGeom>
+          <a:solidFill>
+            <a:srgbClr val="14342B"/>
+          </a:solidFill>
+          <a:ln w="12700">
+            <a:solidFill>
+              <a:srgbClr val="DCC07F"/>
+            </a:solidFill>
+            <a:prstDash val="solid"/>
+          </a:ln>
+        </p:spPr>
+      </p:sp>
+      <p:sp>
+        <p:nvSpPr>
+          <p:cNvPr id="29" name="Text 27"/>
+          <p:cNvSpPr/>
+          <p:nvPr/>
+        </p:nvSpPr>
+        <p:spPr>
+          <a:xfrm>
+            <a:off x="3611880" y="3421685"/>
+            <a:ext cx="329184" cy="329184"/>
+          </a:xfrm>
+          <a:prstGeom prst="rect">
+            <a:avLst/>
+          </a:prstGeom>
+          <a:noFill/>
+          <a:ln/>
+        </p:spPr>
+        <p:txBody>
+          <a:bodyPr wrap="square" rtlCol="0" anchor="ctr"/>
+          <a:lstStyle/>
+          <a:p>
+            <a:pPr algn="ctr" indent="0" marL="0">
+              <a:buNone/>
+            </a:pPr>
+            <a:r>
+              <a:rPr lang="en-US" sz="1200" b="1" dirty="0">
+                <a:solidFill>
+                  <a:srgbClr val="DCC07F"/>
+                </a:solidFill>
+                <a:latin typeface="Fraunces" pitchFamily="34" charset="0"/>
+                <a:ea typeface="Fraunces" pitchFamily="34" charset="-122"/>
+                <a:cs typeface="Fraunces" pitchFamily="34" charset="-120"/>
+              </a:rPr>
+              <a:t>4</a:t>
+            </a:r>
+            <a:endParaRPr lang="en-US" sz="1200" dirty="0"/>
+          </a:p>
+        </p:txBody>
+      </p:sp>
+      <p:sp>
+        <p:nvSpPr>
+          <p:cNvPr id="30" name="Text 28"/>
+          <p:cNvSpPr/>
+          <p:nvPr/>
+        </p:nvSpPr>
+        <p:spPr>
+          <a:xfrm>
+            <a:off x="4114800" y="3366821"/>
+            <a:ext cx="7528255" cy="746150"/>
+          </a:xfrm>
+          <a:prstGeom prst="rect">
+            <a:avLst/>
+          </a:prstGeom>
+          <a:noFill/>
+          <a:ln/>
+        </p:spPr>
+        <p:txBody>
+          <a:bodyPr wrap="square" rtlCol="0" anchor="t"/>
+          <a:lstStyle/>
+          <a:p>
+            <a:pPr indent="0" marL="0">
+              <a:lnSpc>
+                <a:spcPct val="100000"/>
+              </a:lnSpc>
+              <a:buNone/>
+            </a:pPr>
+            <a:r>
+              <a:rPr lang="en-US" sz="1300" dirty="0">
+                <a:solidFill>
+                  <a:srgbClr val="E7EAE3"/>
+                </a:solidFill>
+                <a:latin typeface="Noto Sans KR" pitchFamily="34" charset="0"/>
+                <a:ea typeface="Noto Sans KR" pitchFamily="34" charset="-122"/>
+                <a:cs typeface="Noto Sans KR" pitchFamily="34" charset="-120"/>
+              </a:rPr>
+              <a:t>좋아하는 곳은 시온성전, 좋아하는 시간은 점심 교제와 구역예배입니다.</a:t>
+            </a:r>
+            <a:endParaRPr lang="en-US" sz="1300" dirty="0"/>
+          </a:p>
+          <a:p>
+            <a:pPr indent="0" marL="0">
+              <a:lnSpc>
+                <a:spcPct val="100000"/>
+              </a:lnSpc>
+              <a:buNone/>
+            </a:pPr>
+            <a:r>
+              <a:rPr lang="en-US" sz="1000" dirty="0">
+                <a:solidFill>
+                  <a:srgbClr val="A8BDB2"/>
+                </a:solidFill>
+                <a:latin typeface="Noto Sans KR" pitchFamily="34" charset="0"/>
+                <a:ea typeface="Noto Sans KR" pitchFamily="34" charset="-122"/>
+                <a:cs typeface="Noto Sans KR" pitchFamily="34" charset="-120"/>
+              </a:rPr>
+              <a:t>Favorite place: the Zion Sanctuary. Favorite time: lunch fellowship and district worship.</a:t>
+            </a:r>
+            <a:endParaRPr lang="en-US" sz="1300" dirty="0"/>
+          </a:p>
+          <a:p>
+            <a:pPr indent="0" marL="0">
+              <a:lnSpc>
+                <a:spcPct val="100000"/>
+              </a:lnSpc>
+              <a:buNone/>
+            </a:pPr>
+            <a:r>
+              <a:rPr lang="en-US" sz="1000" dirty="0">
+                <a:solidFill>
+                  <a:srgbClr val="A8BDB2"/>
+                </a:solidFill>
+                <a:latin typeface="Noto Sans KR" pitchFamily="34" charset="0"/>
+                <a:ea typeface="Noto Sans KR" pitchFamily="34" charset="-122"/>
+                <a:cs typeface="Noto Sans KR" pitchFamily="34" charset="-120"/>
+              </a:rPr>
+              <a:t>Lugar favorito: el Santuario Sion. Momento favorito: el almuerzo y el culto de distrito.</a:t>
+            </a:r>
+            <a:endParaRPr lang="en-US" sz="1300" dirty="0"/>
+          </a:p>
+        </p:txBody>
+      </p:sp>
+      <p:sp>
+        <p:nvSpPr>
+          <p:cNvPr id="31" name="Shape 29"/>
+          <p:cNvSpPr/>
+          <p:nvPr/>
+        </p:nvSpPr>
+        <p:spPr>
+          <a:xfrm>
+            <a:off x="3611880" y="4405579"/>
+            <a:ext cx="640080" cy="640080"/>
+          </a:xfrm>
+          <a:prstGeom prst="ellipse">
+            <a:avLst/>
+          </a:prstGeom>
+          <a:solidFill>
+            <a:srgbClr val="C89B3C"/>
+          </a:solidFill>
+          <a:ln w="12700">
+            <a:solidFill>
+              <a:srgbClr val="C89B3C"/>
+            </a:solidFill>
+            <a:prstDash val="solid"/>
+          </a:ln>
+        </p:spPr>
+      </p:sp>
+      <p:sp>
+        <p:nvSpPr>
+          <p:cNvPr id="32" name="Text 30"/>
+          <p:cNvSpPr/>
+          <p:nvPr/>
+        </p:nvSpPr>
+        <p:spPr>
+          <a:xfrm>
+            <a:off x="3611880" y="4405579"/>
+            <a:ext cx="640080" cy="640080"/>
+          </a:xfrm>
+          <a:prstGeom prst="rect">
+            <a:avLst/>
+          </a:prstGeom>
+          <a:noFill/>
+          <a:ln/>
+        </p:spPr>
+        <p:txBody>
+          <a:bodyPr wrap="square" rtlCol="0" anchor="ctr"/>
+          <a:lstStyle/>
+          <a:p>
+            <a:pPr algn="ctr" indent="0" marL="0">
+              <a:buNone/>
+            </a:pPr>
+            <a:r>
+              <a:rPr lang="en-US" sz="2600" b="1" dirty="0">
+                <a:solidFill>
+                  <a:srgbClr val="0E241D"/>
+                </a:solidFill>
+                <a:latin typeface="Fraunces" pitchFamily="34" charset="0"/>
+                <a:ea typeface="Fraunces" pitchFamily="34" charset="-122"/>
+                <a:cs typeface="Fraunces" pitchFamily="34" charset="-120"/>
+              </a:rPr>
+              <a:t>5</a:t>
+            </a:r>
+            <a:endParaRPr lang="en-US" sz="2600" dirty="0"/>
+          </a:p>
+        </p:txBody>
+      </p:sp>
+      <p:sp>
+        <p:nvSpPr>
+          <p:cNvPr id="33" name="Text 31"/>
+          <p:cNvSpPr/>
+          <p:nvPr/>
+        </p:nvSpPr>
+        <p:spPr>
+          <a:xfrm>
+            <a:off x="4480560" y="4295851"/>
+            <a:ext cx="7162495" cy="1784909"/>
+          </a:xfrm>
+          <a:prstGeom prst="rect">
+            <a:avLst/>
+          </a:prstGeom>
+          <a:noFill/>
+          <a:ln/>
+        </p:spPr>
+        <p:txBody>
+          <a:bodyPr wrap="square" rtlCol="0" anchor="t"/>
+          <a:lstStyle/>
+          <a:p>
+            <a:pPr indent="0" marL="0">
+              <a:lnSpc>
+                <a:spcPct val="115000"/>
+              </a:lnSpc>
+              <a:spcAft>
+                <a:spcPts val="1400"/>
+              </a:spcAft>
               <a:buNone/>
             </a:pPr>
             <a:r>
@@ -8989,13 +12257,22 @@
                 <a:ea typeface="Nanum Myeongjo" pitchFamily="34" charset="-122"/>
                 <a:cs typeface="Nanum Myeongjo" pitchFamily="34" charset="-120"/>
               </a:rPr>
-              <a:t>어릴 적 모습입니다!</a:t>
-            </a:r>
-            <a:pPr indent="0" marL="0">
-              <a:buNone/>
-            </a:pPr>
-            <a:r>
-              <a:rPr lang="en-US" sz="1600" dirty="0">
+              <a:t>지금은 관리부에서 봉사하고 있습니다.</a:t>
+            </a:r>
+            <a:endParaRPr lang="en-US" sz="2800" dirty="0"/>
+          </a:p>
+          <a:p>
+            <a:pPr indent="0" marL="0">
+              <a:lnSpc>
+                <a:spcPct val="115000"/>
+              </a:lnSpc>
+              <a:spcAft>
+                <a:spcPts val="800"/>
+              </a:spcAft>
+              <a:buNone/>
+            </a:pPr>
+            <a:r>
+              <a:rPr lang="en-US" sz="1900" dirty="0">
                 <a:solidFill>
                   <a:srgbClr val="DCC07F"/>
                 </a:solidFill>
@@ -9003,110 +12280,32 @@
                 <a:ea typeface="Noto Sans KR" pitchFamily="34" charset="-122"/>
                 <a:cs typeface="Noto Sans KR" pitchFamily="34" charset="-120"/>
               </a:rPr>
-              <a:t>   Childhood photos · Fotos de la infancia</a:t>
+              <a:t>I currently serve on the Facilities Team.</a:t>
             </a:r>
             <a:endParaRPr lang="en-US" sz="2800" dirty="0"/>
           </a:p>
-        </p:txBody>
-      </p:sp>
-      <p:sp>
-        <p:nvSpPr>
-          <p:cNvPr id="18" name="Shape 16"/>
-          <p:cNvSpPr/>
-          <p:nvPr/>
-        </p:nvSpPr>
-        <p:spPr>
-          <a:xfrm>
-            <a:off x="3557016" y="2558950"/>
-            <a:ext cx="3550269" cy="2928821"/>
-          </a:xfrm>
-          <a:prstGeom prst="rect">
-            <a:avLst/>
-          </a:prstGeom>
-          <a:solidFill>
-            <a:srgbClr val="F6F1E7"/>
-          </a:solidFill>
-          <a:ln w="12700">
-            <a:solidFill>
-              <a:srgbClr val="F6F1E7"/>
-            </a:solidFill>
-            <a:prstDash val="solid"/>
-          </a:ln>
-        </p:spPr>
-      </p:sp>
-      <p:pic>
-        <p:nvPicPr>
-          <p:cNvPr id="19" name="Image 0" descr="/Users/logosguru/Code/retreat2026/out/icebreaker/people/01-kim-jimi-family.jpg">    </p:cNvPr>
-          <p:cNvPicPr>
-            <a:picLocks noChangeAspect="1"/>
-          </p:cNvPicPr>
-          <p:nvPr/>
-        </p:nvPicPr>
-        <p:blipFill>
-          <a:blip r:embed="rId1"/>
-          <a:stretch>
-            <a:fillRect/>
-          </a:stretch>
-        </p:blipFill>
-        <p:spPr>
-          <a:xfrm>
-            <a:off x="3611880" y="2613814"/>
-            <a:ext cx="3440541" cy="2819093"/>
-          </a:xfrm>
-          <a:prstGeom prst="rect">
-            <a:avLst/>
-          </a:prstGeom>
-        </p:spPr>
-      </p:pic>
-      <p:sp>
-        <p:nvSpPr>
-          <p:cNvPr id="20" name="Shape 17"/>
-          <p:cNvSpPr/>
-          <p:nvPr/>
-        </p:nvSpPr>
-        <p:spPr>
-          <a:xfrm>
-            <a:off x="7271877" y="2558950"/>
-            <a:ext cx="4426043" cy="2928821"/>
-          </a:xfrm>
-          <a:prstGeom prst="rect">
-            <a:avLst/>
-          </a:prstGeom>
-          <a:solidFill>
-            <a:srgbClr val="F6F1E7"/>
-          </a:solidFill>
-          <a:ln w="12700">
-            <a:solidFill>
-              <a:srgbClr val="F6F1E7"/>
-            </a:solidFill>
-            <a:prstDash val="solid"/>
-          </a:ln>
-        </p:spPr>
-      </p:sp>
-      <p:pic>
-        <p:nvPicPr>
-          <p:cNvPr id="21" name="Image 1" descr="/Users/logosguru/Code/retreat2026/out/icebreaker/people/01-kim-jimi-solo.jpg">    </p:cNvPr>
-          <p:cNvPicPr>
-            <a:picLocks noChangeAspect="1"/>
-          </p:cNvPicPr>
-          <p:nvPr/>
-        </p:nvPicPr>
-        <p:blipFill>
-          <a:blip r:embed="rId2"/>
-          <a:stretch>
-            <a:fillRect/>
-          </a:stretch>
-        </p:blipFill>
-        <p:spPr>
-          <a:xfrm>
-            <a:off x="7326741" y="2613814"/>
-            <a:ext cx="4316315" cy="2819093"/>
-          </a:xfrm>
-          <a:prstGeom prst="rect">
-            <a:avLst/>
-          </a:prstGeom>
-        </p:spPr>
-      </p:pic>
+          <a:p>
+            <a:pPr indent="0" marL="0">
+              <a:lnSpc>
+                <a:spcPct val="115000"/>
+              </a:lnSpc>
+              <a:buNone/>
+            </a:pPr>
+            <a:r>
+              <a:rPr lang="en-US" sz="1700" dirty="0">
+                <a:solidFill>
+                  <a:srgbClr val="E7EAE3"/>
+                </a:solidFill>
+                <a:latin typeface="Noto Sans KR" pitchFamily="34" charset="0"/>
+                <a:ea typeface="Noto Sans KR" pitchFamily="34" charset="-122"/>
+                <a:cs typeface="Noto Sans KR" pitchFamily="34" charset="-120"/>
+              </a:rPr>
+              <a:t>Actualmente sirvo en el equipo de mantenimiento.</a:t>
+            </a:r>
+            <a:endParaRPr lang="en-US" sz="2800" dirty="0"/>
+          </a:p>
+        </p:txBody>
+      </p:sp>
     </p:spTree>
   </p:cSld>
   <p:clrMapOvr>
@@ -9314,7 +12513,7 @@
                 <a:ea typeface="Fraunces" pitchFamily="34" charset="-122"/>
                 <a:cs typeface="Fraunces" pitchFamily="34" charset="-120"/>
               </a:rPr>
-              <a:t>9 / 11</a:t>
+              <a:t>9 / 14</a:t>
             </a:r>
             <a:endParaRPr lang="en-US" sz="1000" dirty="0"/>
           </a:p>
@@ -9328,8 +12527,8 @@
         </p:nvSpPr>
         <p:spPr>
           <a:xfrm>
-            <a:off x="548640" y="868680"/>
-            <a:ext cx="9144000" cy="411480"/>
+            <a:off x="548640" y="1371600"/>
+            <a:ext cx="2651760" cy="365760"/>
           </a:xfrm>
           <a:prstGeom prst="rect">
             <a:avLst/>
@@ -9353,7 +12552,7 @@
                 <a:ea typeface="Fraunces" pitchFamily="34" charset="-122"/>
                 <a:cs typeface="Fraunces" pitchFamily="34" charset="-120"/>
               </a:rPr>
-              <a:t>PERSON 1 · 정답은 · LA RESPUESTA</a:t>
+              <a:t>PERSON 1</a:t>
             </a:r>
             <a:endParaRPr lang="en-US" sz="1800" dirty="0"/>
           </a:p>
@@ -9361,211 +12560,56 @@
       </p:sp>
       <p:sp>
         <p:nvSpPr>
-          <p:cNvPr id="8" name="Shape 6"/>
-          <p:cNvSpPr/>
-          <p:nvPr/>
-        </p:nvSpPr>
-        <p:spPr>
-          <a:xfrm>
-            <a:off x="475488" y="1884236"/>
-            <a:ext cx="5632704" cy="3729609"/>
-          </a:xfrm>
-          <a:prstGeom prst="rect">
-            <a:avLst/>
-          </a:prstGeom>
-          <a:solidFill>
-            <a:srgbClr val="F6F1E7"/>
-          </a:solidFill>
-          <a:ln w="12700">
-            <a:solidFill>
-              <a:srgbClr val="F6F1E7"/>
-            </a:solidFill>
-            <a:prstDash val="solid"/>
-          </a:ln>
-        </p:spPr>
-      </p:sp>
-      <p:pic>
-        <p:nvPicPr>
-          <p:cNvPr id="9" name="Image 0" descr="/Users/logosguru/Code/retreat2026/out/icebreaker/people/01-kim-jimi-solo.jpg">    </p:cNvPr>
-          <p:cNvPicPr>
-            <a:picLocks noChangeAspect="1"/>
-          </p:cNvPicPr>
-          <p:nvPr/>
-        </p:nvPicPr>
-        <p:blipFill>
-          <a:blip r:embed="rId1"/>
-          <a:stretch>
-            <a:fillRect/>
-          </a:stretch>
-        </p:blipFill>
-        <p:spPr>
-          <a:xfrm>
-            <a:off x="548640" y="1957388"/>
-            <a:ext cx="5486400" cy="3583305"/>
-          </a:xfrm>
-          <a:prstGeom prst="rect">
-            <a:avLst/>
-          </a:prstGeom>
-        </p:spPr>
-      </p:pic>
-      <p:sp>
-        <p:nvSpPr>
-          <p:cNvPr id="10" name="Text 7"/>
-          <p:cNvSpPr/>
-          <p:nvPr/>
-        </p:nvSpPr>
-        <p:spPr>
-          <a:xfrm>
-            <a:off x="6583680" y="1554480"/>
-            <a:ext cx="5059375" cy="548640"/>
-          </a:xfrm>
-          <a:prstGeom prst="rect">
-            <a:avLst/>
-          </a:prstGeom>
-          <a:noFill/>
-          <a:ln/>
-        </p:spPr>
-        <p:txBody>
-          <a:bodyPr wrap="square" rtlCol="0" anchor="ctr"/>
-          <a:lstStyle/>
-          <a:p>
-            <a:pPr indent="0" marL="0">
-              <a:buNone/>
-            </a:pPr>
-            <a:r>
-              <a:rPr lang="en-US" sz="3000" i="1" dirty="0">
-                <a:solidFill>
-                  <a:srgbClr val="DCC07F"/>
+          <p:cNvPr id="8" name="Text 6"/>
+          <p:cNvSpPr/>
+          <p:nvPr/>
+        </p:nvSpPr>
+        <p:spPr>
+          <a:xfrm>
+            <a:off x="548640" y="1645920"/>
+            <a:ext cx="2651760" cy="2377440"/>
+          </a:xfrm>
+          <a:prstGeom prst="rect">
+            <a:avLst/>
+          </a:prstGeom>
+          <a:noFill/>
+          <a:ln/>
+        </p:spPr>
+        <p:txBody>
+          <a:bodyPr wrap="square" rtlCol="0" anchor="t"/>
+          <a:lstStyle/>
+          <a:p>
+            <a:pPr algn="ctr" indent="0" marL="0">
+              <a:buNone/>
+            </a:pPr>
+            <a:r>
+              <a:rPr lang="en-US" sz="19000" b="1" dirty="0">
+                <a:solidFill>
+                  <a:srgbClr val="F6F1E7"/>
                 </a:solidFill>
                 <a:latin typeface="Fraunces" pitchFamily="34" charset="0"/>
                 <a:ea typeface="Fraunces" pitchFamily="34" charset="-122"/>
                 <a:cs typeface="Fraunces" pitchFamily="34" charset="-120"/>
               </a:rPr>
-              <a:t>IT’S…</a:t>
-            </a:r>
-            <a:endParaRPr lang="en-US" sz="3000" dirty="0"/>
-          </a:p>
-        </p:txBody>
-      </p:sp>
-      <p:sp>
-        <p:nvSpPr>
-          <p:cNvPr id="11" name="Text 8"/>
-          <p:cNvSpPr/>
-          <p:nvPr/>
-        </p:nvSpPr>
-        <p:spPr>
-          <a:xfrm>
-            <a:off x="6583680" y="2103120"/>
-            <a:ext cx="5059375" cy="1371600"/>
-          </a:xfrm>
-          <a:prstGeom prst="rect">
-            <a:avLst/>
-          </a:prstGeom>
-          <a:noFill/>
-          <a:ln/>
-        </p:spPr>
-        <p:txBody>
-          <a:bodyPr wrap="square" rtlCol="0" anchor="t"/>
-          <a:lstStyle/>
-          <a:p>
-            <a:pPr indent="0" marL="0">
-              <a:buNone/>
-            </a:pPr>
-            <a:r>
-              <a:rPr lang="en-US" sz="4600" b="1" dirty="0">
-                <a:solidFill>
-                  <a:srgbClr val="F6F1E7"/>
-                </a:solidFill>
-                <a:latin typeface="Nanum Myeongjo" pitchFamily="34" charset="0"/>
-                <a:ea typeface="Nanum Myeongjo" pitchFamily="34" charset="-122"/>
-                <a:cs typeface="Nanum Myeongjo" pitchFamily="34" charset="-120"/>
-              </a:rPr>
-              <a:t>김지미 집사님</a:t>
-            </a:r>
-            <a:endParaRPr lang="en-US" sz="4600" dirty="0"/>
-          </a:p>
-        </p:txBody>
-      </p:sp>
-      <p:sp>
-        <p:nvSpPr>
-          <p:cNvPr id="12" name="Text 9"/>
-          <p:cNvSpPr/>
-          <p:nvPr/>
-        </p:nvSpPr>
-        <p:spPr>
-          <a:xfrm>
-            <a:off x="6583680" y="3520440"/>
-            <a:ext cx="5059375" cy="1280160"/>
-          </a:xfrm>
-          <a:prstGeom prst="rect">
-            <a:avLst/>
-          </a:prstGeom>
-          <a:noFill/>
-          <a:ln/>
-        </p:spPr>
-        <p:txBody>
-          <a:bodyPr wrap="square" rtlCol="0" anchor="t"/>
-          <a:lstStyle/>
-          <a:p>
-            <a:pPr indent="0" marL="0">
-              <a:lnSpc>
-                <a:spcPct val="110000"/>
-              </a:lnSpc>
-              <a:spcAft>
-                <a:spcPts val="600"/>
-              </a:spcAft>
-              <a:buNone/>
-            </a:pPr>
-            <a:r>
-              <a:rPr lang="en-US" sz="2600" dirty="0">
-                <a:solidFill>
-                  <a:srgbClr val="DCC07F"/>
-                </a:solidFill>
-                <a:latin typeface="Fraunces" pitchFamily="34" charset="0"/>
-                <a:ea typeface="Fraunces" pitchFamily="34" charset="-122"/>
-                <a:cs typeface="Fraunces" pitchFamily="34" charset="-120"/>
-              </a:rPr>
-              <a:t>Deacon Jimi Kim</a:t>
-            </a:r>
-            <a:endParaRPr lang="en-US" sz="2600" dirty="0"/>
-          </a:p>
-          <a:p>
-            <a:pPr indent="0" marL="0">
-              <a:lnSpc>
-                <a:spcPct val="110000"/>
-              </a:lnSpc>
-              <a:buNone/>
-            </a:pPr>
-            <a:r>
-              <a:rPr lang="en-US" sz="2200" dirty="0">
-                <a:solidFill>
-                  <a:srgbClr val="E7EAE3"/>
-                </a:solidFill>
-                <a:latin typeface="Fraunces" pitchFamily="34" charset="0"/>
-                <a:ea typeface="Fraunces" pitchFamily="34" charset="-122"/>
-                <a:cs typeface="Fraunces" pitchFamily="34" charset="-120"/>
-              </a:rPr>
-              <a:t>Diaconisa Jimi Kim</a:t>
-            </a:r>
-            <a:endParaRPr lang="en-US" sz="2600" dirty="0"/>
-          </a:p>
-        </p:txBody>
-      </p:sp>
-      <p:sp>
-        <p:nvSpPr>
-          <p:cNvPr id="13" name="Shape 10"/>
-          <p:cNvSpPr/>
-          <p:nvPr/>
-        </p:nvSpPr>
-        <p:spPr>
-          <a:xfrm>
-            <a:off x="6583680" y="5074920"/>
-            <a:ext cx="5059375" cy="914400"/>
-          </a:xfrm>
-          <a:prstGeom prst="roundRect">
-            <a:avLst>
-              <a:gd name="adj" fmla="val 12000"/>
-            </a:avLst>
+              <a:t>?</a:t>
+            </a:r>
+            <a:endParaRPr lang="en-US" sz="19000" dirty="0"/>
+          </a:p>
+        </p:txBody>
+      </p:sp>
+      <p:sp>
+        <p:nvSpPr>
+          <p:cNvPr id="9" name="Shape 7"/>
+          <p:cNvSpPr/>
+          <p:nvPr/>
+        </p:nvSpPr>
+        <p:spPr>
+          <a:xfrm>
+            <a:off x="594360" y="4343400"/>
+            <a:ext cx="256032" cy="256032"/>
+          </a:xfrm>
+          <a:prstGeom prst="ellipse">
+            <a:avLst/>
           </a:prstGeom>
           <a:solidFill>
             <a:srgbClr val="C89B3C"/>
@@ -9580,14 +12624,164 @@
       </p:sp>
       <p:sp>
         <p:nvSpPr>
-          <p:cNvPr id="14" name="Text 11"/>
-          <p:cNvSpPr/>
-          <p:nvPr/>
-        </p:nvSpPr>
-        <p:spPr>
-          <a:xfrm>
-            <a:off x="6583680" y="5074920"/>
-            <a:ext cx="5059375" cy="914400"/>
+          <p:cNvPr id="10" name="Shape 8"/>
+          <p:cNvSpPr/>
+          <p:nvPr/>
+        </p:nvSpPr>
+        <p:spPr>
+          <a:xfrm>
+            <a:off x="978408" y="4343400"/>
+            <a:ext cx="256032" cy="256032"/>
+          </a:xfrm>
+          <a:prstGeom prst="ellipse">
+            <a:avLst/>
+          </a:prstGeom>
+          <a:solidFill>
+            <a:srgbClr val="C89B3C"/>
+          </a:solidFill>
+          <a:ln w="12700">
+            <a:solidFill>
+              <a:srgbClr val="C89B3C"/>
+            </a:solidFill>
+            <a:prstDash val="solid"/>
+          </a:ln>
+        </p:spPr>
+      </p:sp>
+      <p:sp>
+        <p:nvSpPr>
+          <p:cNvPr id="11" name="Shape 9"/>
+          <p:cNvSpPr/>
+          <p:nvPr/>
+        </p:nvSpPr>
+        <p:spPr>
+          <a:xfrm>
+            <a:off x="1362456" y="4343400"/>
+            <a:ext cx="256032" cy="256032"/>
+          </a:xfrm>
+          <a:prstGeom prst="ellipse">
+            <a:avLst/>
+          </a:prstGeom>
+          <a:solidFill>
+            <a:srgbClr val="C89B3C"/>
+          </a:solidFill>
+          <a:ln w="12700">
+            <a:solidFill>
+              <a:srgbClr val="C89B3C"/>
+            </a:solidFill>
+            <a:prstDash val="solid"/>
+          </a:ln>
+        </p:spPr>
+      </p:sp>
+      <p:sp>
+        <p:nvSpPr>
+          <p:cNvPr id="12" name="Shape 10"/>
+          <p:cNvSpPr/>
+          <p:nvPr/>
+        </p:nvSpPr>
+        <p:spPr>
+          <a:xfrm>
+            <a:off x="1746504" y="4343400"/>
+            <a:ext cx="256032" cy="256032"/>
+          </a:xfrm>
+          <a:prstGeom prst="ellipse">
+            <a:avLst/>
+          </a:prstGeom>
+          <a:solidFill>
+            <a:srgbClr val="C89B3C"/>
+          </a:solidFill>
+          <a:ln w="12700">
+            <a:solidFill>
+              <a:srgbClr val="C89B3C"/>
+            </a:solidFill>
+            <a:prstDash val="solid"/>
+          </a:ln>
+        </p:spPr>
+      </p:sp>
+      <p:sp>
+        <p:nvSpPr>
+          <p:cNvPr id="13" name="Shape 11"/>
+          <p:cNvSpPr/>
+          <p:nvPr/>
+        </p:nvSpPr>
+        <p:spPr>
+          <a:xfrm>
+            <a:off x="2130552" y="4343400"/>
+            <a:ext cx="256032" cy="256032"/>
+          </a:xfrm>
+          <a:prstGeom prst="ellipse">
+            <a:avLst/>
+          </a:prstGeom>
+          <a:solidFill>
+            <a:srgbClr val="C89B3C"/>
+          </a:solidFill>
+          <a:ln w="12700">
+            <a:solidFill>
+              <a:srgbClr val="C89B3C"/>
+            </a:solidFill>
+            <a:prstDash val="solid"/>
+          </a:ln>
+        </p:spPr>
+      </p:sp>
+      <p:sp>
+        <p:nvSpPr>
+          <p:cNvPr id="14" name="Shape 12"/>
+          <p:cNvSpPr/>
+          <p:nvPr/>
+        </p:nvSpPr>
+        <p:spPr>
+          <a:xfrm>
+            <a:off x="2514600" y="4343400"/>
+            <a:ext cx="256032" cy="256032"/>
+          </a:xfrm>
+          <a:prstGeom prst="ellipse">
+            <a:avLst/>
+          </a:prstGeom>
+          <a:solidFill>
+            <a:srgbClr val="C89B3C"/>
+          </a:solidFill>
+          <a:ln w="12700">
+            <a:solidFill>
+              <a:srgbClr val="C89B3C"/>
+            </a:solidFill>
+            <a:prstDash val="solid"/>
+          </a:ln>
+        </p:spPr>
+      </p:sp>
+      <p:sp>
+        <p:nvSpPr>
+          <p:cNvPr id="15" name="Shape 13"/>
+          <p:cNvSpPr/>
+          <p:nvPr/>
+        </p:nvSpPr>
+        <p:spPr>
+          <a:xfrm>
+            <a:off x="2898648" y="4343400"/>
+            <a:ext cx="256032" cy="256032"/>
+          </a:xfrm>
+          <a:prstGeom prst="ellipse">
+            <a:avLst/>
+          </a:prstGeom>
+          <a:solidFill>
+            <a:srgbClr val="14342B"/>
+          </a:solidFill>
+          <a:ln w="12700">
+            <a:solidFill>
+              <a:srgbClr val="C89B3C"/>
+            </a:solidFill>
+            <a:prstDash val="solid"/>
+          </a:ln>
+        </p:spPr>
+      </p:sp>
+      <p:sp>
+        <p:nvSpPr>
+          <p:cNvPr id="16" name="Text 14"/>
+          <p:cNvSpPr/>
+          <p:nvPr/>
+        </p:nvSpPr>
+        <p:spPr>
+          <a:xfrm>
+            <a:off x="548640" y="4663440"/>
+            <a:ext cx="2651760" cy="365760"/>
           </a:xfrm>
           <a:prstGeom prst="rect">
             <a:avLst/>
@@ -9600,43 +12794,926 @@
           <a:lstStyle/>
           <a:p>
             <a:pPr algn="ctr" indent="0" marL="0">
+              <a:buNone/>
+            </a:pPr>
+            <a:r>
+              <a:rPr lang="en-US" sz="1400" spc="200" kern="0" dirty="0">
+                <a:solidFill>
+                  <a:srgbClr val="A8BDB2"/>
+                </a:solidFill>
+                <a:latin typeface="Fraunces" pitchFamily="34" charset="0"/>
+                <a:ea typeface="Fraunces" pitchFamily="34" charset="-122"/>
+                <a:cs typeface="Fraunces" pitchFamily="34" charset="-120"/>
+              </a:rPr>
+              <a:t>HINT 6 / 7</a:t>
+            </a:r>
+            <a:endParaRPr lang="en-US" sz="1400" dirty="0"/>
+          </a:p>
+        </p:txBody>
+      </p:sp>
+      <p:sp>
+        <p:nvSpPr>
+          <p:cNvPr id="17" name="Shape 15"/>
+          <p:cNvSpPr/>
+          <p:nvPr/>
+        </p:nvSpPr>
+        <p:spPr>
+          <a:xfrm>
+            <a:off x="3246120" y="1463040"/>
+            <a:ext cx="0" cy="4297680"/>
+          </a:xfrm>
+          <a:prstGeom prst="line">
+            <a:avLst/>
+          </a:prstGeom>
+          <a:noFill/>
+          <a:ln w="9525">
+            <a:solidFill>
+              <a:srgbClr val="DCC07F">
+                <a:alpha val="40000"/>
+              </a:srgbClr>
+            </a:solidFill>
+            <a:prstDash val="solid"/>
+          </a:ln>
+        </p:spPr>
+      </p:sp>
+      <p:sp>
+        <p:nvSpPr>
+          <p:cNvPr id="18" name="Text 16"/>
+          <p:cNvSpPr/>
+          <p:nvPr/>
+        </p:nvSpPr>
+        <p:spPr>
+          <a:xfrm>
+            <a:off x="3611880" y="868680"/>
+            <a:ext cx="7315200" cy="411480"/>
+          </a:xfrm>
+          <a:prstGeom prst="rect">
+            <a:avLst/>
+          </a:prstGeom>
+          <a:noFill/>
+          <a:ln/>
+        </p:spPr>
+        <p:txBody>
+          <a:bodyPr wrap="square" rtlCol="0" anchor="ctr"/>
+          <a:lstStyle/>
+          <a:p>
+            <a:pPr indent="0" marL="0">
+              <a:buNone/>
+            </a:pPr>
+            <a:r>
+              <a:rPr lang="en-US" sz="1800" spc="300" kern="0" dirty="0">
+                <a:solidFill>
+                  <a:srgbClr val="C89B3C"/>
+                </a:solidFill>
+                <a:latin typeface="Fraunces" pitchFamily="34" charset="0"/>
+                <a:ea typeface="Fraunces" pitchFamily="34" charset="-122"/>
+                <a:cs typeface="Fraunces" pitchFamily="34" charset="-120"/>
+              </a:rPr>
+              <a:t>HINT · 힌트 · PISTA</a:t>
+            </a:r>
+            <a:endParaRPr lang="en-US" sz="1800" dirty="0"/>
+          </a:p>
+        </p:txBody>
+      </p:sp>
+      <p:sp>
+        <p:nvSpPr>
+          <p:cNvPr id="19" name="Shape 17"/>
+          <p:cNvSpPr/>
+          <p:nvPr/>
+        </p:nvSpPr>
+        <p:spPr>
+          <a:xfrm>
+            <a:off x="3611880" y="1380744"/>
+            <a:ext cx="329184" cy="329184"/>
+          </a:xfrm>
+          <a:prstGeom prst="ellipse">
+            <a:avLst/>
+          </a:prstGeom>
+          <a:solidFill>
+            <a:srgbClr val="14342B"/>
+          </a:solidFill>
+          <a:ln w="12700">
+            <a:solidFill>
+              <a:srgbClr val="DCC07F"/>
+            </a:solidFill>
+            <a:prstDash val="solid"/>
+          </a:ln>
+        </p:spPr>
+      </p:sp>
+      <p:sp>
+        <p:nvSpPr>
+          <p:cNvPr id="20" name="Text 18"/>
+          <p:cNvSpPr/>
+          <p:nvPr/>
+        </p:nvSpPr>
+        <p:spPr>
+          <a:xfrm>
+            <a:off x="3611880" y="1380744"/>
+            <a:ext cx="329184" cy="329184"/>
+          </a:xfrm>
+          <a:prstGeom prst="rect">
+            <a:avLst/>
+          </a:prstGeom>
+          <a:noFill/>
+          <a:ln/>
+        </p:spPr>
+        <p:txBody>
+          <a:bodyPr wrap="square" rtlCol="0" anchor="ctr"/>
+          <a:lstStyle/>
+          <a:p>
+            <a:pPr algn="ctr" indent="0" marL="0">
+              <a:buNone/>
+            </a:pPr>
+            <a:r>
+              <a:rPr lang="en-US" sz="1200" b="1" dirty="0">
+                <a:solidFill>
+                  <a:srgbClr val="DCC07F"/>
+                </a:solidFill>
+                <a:latin typeface="Fraunces" pitchFamily="34" charset="0"/>
+                <a:ea typeface="Fraunces" pitchFamily="34" charset="-122"/>
+                <a:cs typeface="Fraunces" pitchFamily="34" charset="-120"/>
+              </a:rPr>
+              <a:t>1</a:t>
+            </a:r>
+            <a:endParaRPr lang="en-US" sz="1200" dirty="0"/>
+          </a:p>
+        </p:txBody>
+      </p:sp>
+      <p:sp>
+        <p:nvSpPr>
+          <p:cNvPr id="21" name="Text 19"/>
+          <p:cNvSpPr/>
+          <p:nvPr/>
+        </p:nvSpPr>
+        <p:spPr>
+          <a:xfrm>
+            <a:off x="4114800" y="1325880"/>
+            <a:ext cx="7528255" cy="621792"/>
+          </a:xfrm>
+          <a:prstGeom prst="rect">
+            <a:avLst/>
+          </a:prstGeom>
+          <a:noFill/>
+          <a:ln/>
+        </p:spPr>
+        <p:txBody>
+          <a:bodyPr wrap="square" rtlCol="0" anchor="t"/>
+          <a:lstStyle/>
+          <a:p>
+            <a:pPr indent="0" marL="0">
               <a:lnSpc>
-                <a:spcPct val="105000"/>
+                <a:spcPct val="100000"/>
               </a:lnSpc>
               <a:buNone/>
             </a:pPr>
             <a:r>
-              <a:rPr lang="en-US" sz="2200" b="1" dirty="0">
+              <a:rPr lang="en-US" sz="1200" dirty="0">
+                <a:solidFill>
+                  <a:srgbClr val="E7EAE3"/>
+                </a:solidFill>
+                <a:latin typeface="Noto Sans KR" pitchFamily="34" charset="0"/>
+                <a:ea typeface="Noto Sans KR" pitchFamily="34" charset="-122"/>
+                <a:cs typeface="Noto Sans KR" pitchFamily="34" charset="-120"/>
+              </a:rPr>
+              <a:t>제 삶의 모토는 — “현재에 만족하고 최선을 다하자”</a:t>
+            </a:r>
+            <a:endParaRPr lang="en-US" sz="1200" dirty="0"/>
+          </a:p>
+          <a:p>
+            <a:pPr indent="0" marL="0">
+              <a:lnSpc>
+                <a:spcPct val="100000"/>
+              </a:lnSpc>
+              <a:buNone/>
+            </a:pPr>
+            <a:r>
+              <a:rPr lang="en-US" sz="900" dirty="0">
+                <a:solidFill>
+                  <a:srgbClr val="A8BDB2"/>
+                </a:solidFill>
+                <a:latin typeface="Noto Sans KR" pitchFamily="34" charset="0"/>
+                <a:ea typeface="Noto Sans KR" pitchFamily="34" charset="-122"/>
+                <a:cs typeface="Noto Sans KR" pitchFamily="34" charset="-120"/>
+              </a:rPr>
+              <a:t>My life motto: “Be content with today, and give it my best.”</a:t>
+            </a:r>
+            <a:endParaRPr lang="en-US" sz="1200" dirty="0"/>
+          </a:p>
+          <a:p>
+            <a:pPr indent="0" marL="0">
+              <a:lnSpc>
+                <a:spcPct val="100000"/>
+              </a:lnSpc>
+              <a:buNone/>
+            </a:pPr>
+            <a:r>
+              <a:rPr lang="en-US" sz="900" dirty="0">
+                <a:solidFill>
+                  <a:srgbClr val="A8BDB2"/>
+                </a:solidFill>
+                <a:latin typeface="Noto Sans KR" pitchFamily="34" charset="0"/>
+                <a:ea typeface="Noto Sans KR" pitchFamily="34" charset="-122"/>
+                <a:cs typeface="Noto Sans KR" pitchFamily="34" charset="-120"/>
+              </a:rPr>
+              <a:t>Mi lema: «Estar en paz con el presente y dar lo mejor de mí».</a:t>
+            </a:r>
+            <a:endParaRPr lang="en-US" sz="1200" dirty="0"/>
+          </a:p>
+        </p:txBody>
+      </p:sp>
+      <p:sp>
+        <p:nvSpPr>
+          <p:cNvPr id="22" name="Shape 20"/>
+          <p:cNvSpPr/>
+          <p:nvPr/>
+        </p:nvSpPr>
+        <p:spPr>
+          <a:xfrm>
+            <a:off x="3611880" y="2002536"/>
+            <a:ext cx="329184" cy="329184"/>
+          </a:xfrm>
+          <a:prstGeom prst="ellipse">
+            <a:avLst/>
+          </a:prstGeom>
+          <a:solidFill>
+            <a:srgbClr val="14342B"/>
+          </a:solidFill>
+          <a:ln w="12700">
+            <a:solidFill>
+              <a:srgbClr val="DCC07F"/>
+            </a:solidFill>
+            <a:prstDash val="solid"/>
+          </a:ln>
+        </p:spPr>
+      </p:sp>
+      <p:sp>
+        <p:nvSpPr>
+          <p:cNvPr id="23" name="Text 21"/>
+          <p:cNvSpPr/>
+          <p:nvPr/>
+        </p:nvSpPr>
+        <p:spPr>
+          <a:xfrm>
+            <a:off x="3611880" y="2002536"/>
+            <a:ext cx="329184" cy="329184"/>
+          </a:xfrm>
+          <a:prstGeom prst="rect">
+            <a:avLst/>
+          </a:prstGeom>
+          <a:noFill/>
+          <a:ln/>
+        </p:spPr>
+        <p:txBody>
+          <a:bodyPr wrap="square" rtlCol="0" anchor="ctr"/>
+          <a:lstStyle/>
+          <a:p>
+            <a:pPr algn="ctr" indent="0" marL="0">
+              <a:buNone/>
+            </a:pPr>
+            <a:r>
+              <a:rPr lang="en-US" sz="1200" b="1" dirty="0">
+                <a:solidFill>
+                  <a:srgbClr val="DCC07F"/>
+                </a:solidFill>
+                <a:latin typeface="Fraunces" pitchFamily="34" charset="0"/>
+                <a:ea typeface="Fraunces" pitchFamily="34" charset="-122"/>
+                <a:cs typeface="Fraunces" pitchFamily="34" charset="-120"/>
+              </a:rPr>
+              <a:t>2</a:t>
+            </a:r>
+            <a:endParaRPr lang="en-US" sz="1200" dirty="0"/>
+          </a:p>
+        </p:txBody>
+      </p:sp>
+      <p:sp>
+        <p:nvSpPr>
+          <p:cNvPr id="24" name="Text 22"/>
+          <p:cNvSpPr/>
+          <p:nvPr/>
+        </p:nvSpPr>
+        <p:spPr>
+          <a:xfrm>
+            <a:off x="4114800" y="1947672"/>
+            <a:ext cx="7528255" cy="621792"/>
+          </a:xfrm>
+          <a:prstGeom prst="rect">
+            <a:avLst/>
+          </a:prstGeom>
+          <a:noFill/>
+          <a:ln/>
+        </p:spPr>
+        <p:txBody>
+          <a:bodyPr wrap="square" rtlCol="0" anchor="t"/>
+          <a:lstStyle/>
+          <a:p>
+            <a:pPr indent="0" marL="0">
+              <a:lnSpc>
+                <a:spcPct val="100000"/>
+              </a:lnSpc>
+              <a:buNone/>
+            </a:pPr>
+            <a:r>
+              <a:rPr lang="en-US" sz="1200" dirty="0">
+                <a:solidFill>
+                  <a:srgbClr val="E7EAE3"/>
+                </a:solidFill>
+                <a:latin typeface="Noto Sans KR" pitchFamily="34" charset="0"/>
+                <a:ea typeface="Noto Sans KR" pitchFamily="34" charset="-122"/>
+                <a:cs typeface="Noto Sans KR" pitchFamily="34" charset="-120"/>
+              </a:rPr>
+              <a:t>가장 좋아하는 음식은 냉면입니다.</a:t>
+            </a:r>
+            <a:endParaRPr lang="en-US" sz="1200" dirty="0"/>
+          </a:p>
+          <a:p>
+            <a:pPr indent="0" marL="0">
+              <a:lnSpc>
+                <a:spcPct val="100000"/>
+              </a:lnSpc>
+              <a:buNone/>
+            </a:pPr>
+            <a:r>
+              <a:rPr lang="en-US" sz="900" dirty="0">
+                <a:solidFill>
+                  <a:srgbClr val="A8BDB2"/>
+                </a:solidFill>
+                <a:latin typeface="Noto Sans KR" pitchFamily="34" charset="0"/>
+                <a:ea typeface="Noto Sans KR" pitchFamily="34" charset="-122"/>
+                <a:cs typeface="Noto Sans KR" pitchFamily="34" charset="-120"/>
+              </a:rPr>
+              <a:t>My favorite food is naengmyeon — Korean cold noodles.</a:t>
+            </a:r>
+            <a:endParaRPr lang="en-US" sz="1200" dirty="0"/>
+          </a:p>
+          <a:p>
+            <a:pPr indent="0" marL="0">
+              <a:lnSpc>
+                <a:spcPct val="100000"/>
+              </a:lnSpc>
+              <a:buNone/>
+            </a:pPr>
+            <a:r>
+              <a:rPr lang="en-US" sz="900" dirty="0">
+                <a:solidFill>
+                  <a:srgbClr val="A8BDB2"/>
+                </a:solidFill>
+                <a:latin typeface="Noto Sans KR" pitchFamily="34" charset="0"/>
+                <a:ea typeface="Noto Sans KR" pitchFamily="34" charset="-122"/>
+                <a:cs typeface="Noto Sans KR" pitchFamily="34" charset="-120"/>
+              </a:rPr>
+              <a:t>Mi comida favorita es el naengmyeon, fideos fríos coreanos.</a:t>
+            </a:r>
+            <a:endParaRPr lang="en-US" sz="1200" dirty="0"/>
+          </a:p>
+        </p:txBody>
+      </p:sp>
+      <p:sp>
+        <p:nvSpPr>
+          <p:cNvPr id="25" name="Shape 23"/>
+          <p:cNvSpPr/>
+          <p:nvPr/>
+        </p:nvSpPr>
+        <p:spPr>
+          <a:xfrm>
+            <a:off x="3611880" y="2624328"/>
+            <a:ext cx="329184" cy="329184"/>
+          </a:xfrm>
+          <a:prstGeom prst="ellipse">
+            <a:avLst/>
+          </a:prstGeom>
+          <a:solidFill>
+            <a:srgbClr val="14342B"/>
+          </a:solidFill>
+          <a:ln w="12700">
+            <a:solidFill>
+              <a:srgbClr val="DCC07F"/>
+            </a:solidFill>
+            <a:prstDash val="solid"/>
+          </a:ln>
+        </p:spPr>
+      </p:sp>
+      <p:sp>
+        <p:nvSpPr>
+          <p:cNvPr id="26" name="Text 24"/>
+          <p:cNvSpPr/>
+          <p:nvPr/>
+        </p:nvSpPr>
+        <p:spPr>
+          <a:xfrm>
+            <a:off x="3611880" y="2624328"/>
+            <a:ext cx="329184" cy="329184"/>
+          </a:xfrm>
+          <a:prstGeom prst="rect">
+            <a:avLst/>
+          </a:prstGeom>
+          <a:noFill/>
+          <a:ln/>
+        </p:spPr>
+        <p:txBody>
+          <a:bodyPr wrap="square" rtlCol="0" anchor="ctr"/>
+          <a:lstStyle/>
+          <a:p>
+            <a:pPr algn="ctr" indent="0" marL="0">
+              <a:buNone/>
+            </a:pPr>
+            <a:r>
+              <a:rPr lang="en-US" sz="1200" b="1" dirty="0">
+                <a:solidFill>
+                  <a:srgbClr val="DCC07F"/>
+                </a:solidFill>
+                <a:latin typeface="Fraunces" pitchFamily="34" charset="0"/>
+                <a:ea typeface="Fraunces" pitchFamily="34" charset="-122"/>
+                <a:cs typeface="Fraunces" pitchFamily="34" charset="-120"/>
+              </a:rPr>
+              <a:t>3</a:t>
+            </a:r>
+            <a:endParaRPr lang="en-US" sz="1200" dirty="0"/>
+          </a:p>
+        </p:txBody>
+      </p:sp>
+      <p:sp>
+        <p:nvSpPr>
+          <p:cNvPr id="27" name="Text 25"/>
+          <p:cNvSpPr/>
+          <p:nvPr/>
+        </p:nvSpPr>
+        <p:spPr>
+          <a:xfrm>
+            <a:off x="4114800" y="2569464"/>
+            <a:ext cx="7528255" cy="457200"/>
+          </a:xfrm>
+          <a:prstGeom prst="rect">
+            <a:avLst/>
+          </a:prstGeom>
+          <a:noFill/>
+          <a:ln/>
+        </p:spPr>
+        <p:txBody>
+          <a:bodyPr wrap="square" rtlCol="0" anchor="t"/>
+          <a:lstStyle/>
+          <a:p>
+            <a:pPr indent="0" marL="0">
+              <a:lnSpc>
+                <a:spcPct val="100000"/>
+              </a:lnSpc>
+              <a:buNone/>
+            </a:pPr>
+            <a:r>
+              <a:rPr lang="en-US" sz="1200" dirty="0">
+                <a:solidFill>
+                  <a:srgbClr val="E7EAE3"/>
+                </a:solidFill>
+                <a:latin typeface="Noto Sans KR" pitchFamily="34" charset="0"/>
+                <a:ea typeface="Noto Sans KR" pitchFamily="34" charset="-122"/>
+                <a:cs typeface="Noto Sans KR" pitchFamily="34" charset="-120"/>
+              </a:rPr>
+              <a:t>경기도 안성에서 태어났습니다.</a:t>
+            </a:r>
+            <a:endParaRPr lang="en-US" sz="1200" dirty="0"/>
+          </a:p>
+          <a:p>
+            <a:pPr indent="0" marL="0">
+              <a:lnSpc>
+                <a:spcPct val="100000"/>
+              </a:lnSpc>
+              <a:buNone/>
+            </a:pPr>
+            <a:r>
+              <a:rPr lang="en-US" sz="900" dirty="0">
+                <a:solidFill>
+                  <a:srgbClr val="A8BDB2"/>
+                </a:solidFill>
+                <a:latin typeface="Noto Sans KR" pitchFamily="34" charset="0"/>
+                <a:ea typeface="Noto Sans KR" pitchFamily="34" charset="-122"/>
+                <a:cs typeface="Noto Sans KR" pitchFamily="34" charset="-120"/>
+              </a:rPr>
+              <a:t>I was born in Anseong, Gyeonggi Province, Korea.   ·   Nací en Anseong, provincia de Gyeonggi, Corea.</a:t>
+            </a:r>
+            <a:endParaRPr lang="en-US" sz="1200" dirty="0"/>
+          </a:p>
+        </p:txBody>
+      </p:sp>
+      <p:sp>
+        <p:nvSpPr>
+          <p:cNvPr id="28" name="Shape 26"/>
+          <p:cNvSpPr/>
+          <p:nvPr/>
+        </p:nvSpPr>
+        <p:spPr>
+          <a:xfrm>
+            <a:off x="3611880" y="3081528"/>
+            <a:ext cx="329184" cy="329184"/>
+          </a:xfrm>
+          <a:prstGeom prst="ellipse">
+            <a:avLst/>
+          </a:prstGeom>
+          <a:solidFill>
+            <a:srgbClr val="14342B"/>
+          </a:solidFill>
+          <a:ln w="12700">
+            <a:solidFill>
+              <a:srgbClr val="DCC07F"/>
+            </a:solidFill>
+            <a:prstDash val="solid"/>
+          </a:ln>
+        </p:spPr>
+      </p:sp>
+      <p:sp>
+        <p:nvSpPr>
+          <p:cNvPr id="29" name="Text 27"/>
+          <p:cNvSpPr/>
+          <p:nvPr/>
+        </p:nvSpPr>
+        <p:spPr>
+          <a:xfrm>
+            <a:off x="3611880" y="3081528"/>
+            <a:ext cx="329184" cy="329184"/>
+          </a:xfrm>
+          <a:prstGeom prst="rect">
+            <a:avLst/>
+          </a:prstGeom>
+          <a:noFill/>
+          <a:ln/>
+        </p:spPr>
+        <p:txBody>
+          <a:bodyPr wrap="square" rtlCol="0" anchor="ctr"/>
+          <a:lstStyle/>
+          <a:p>
+            <a:pPr algn="ctr" indent="0" marL="0">
+              <a:buNone/>
+            </a:pPr>
+            <a:r>
+              <a:rPr lang="en-US" sz="1200" b="1" dirty="0">
+                <a:solidFill>
+                  <a:srgbClr val="DCC07F"/>
+                </a:solidFill>
+                <a:latin typeface="Fraunces" pitchFamily="34" charset="0"/>
+                <a:ea typeface="Fraunces" pitchFamily="34" charset="-122"/>
+                <a:cs typeface="Fraunces" pitchFamily="34" charset="-120"/>
+              </a:rPr>
+              <a:t>4</a:t>
+            </a:r>
+            <a:endParaRPr lang="en-US" sz="1200" dirty="0"/>
+          </a:p>
+        </p:txBody>
+      </p:sp>
+      <p:sp>
+        <p:nvSpPr>
+          <p:cNvPr id="30" name="Text 28"/>
+          <p:cNvSpPr/>
+          <p:nvPr/>
+        </p:nvSpPr>
+        <p:spPr>
+          <a:xfrm>
+            <a:off x="4114800" y="3026664"/>
+            <a:ext cx="7528255" cy="621792"/>
+          </a:xfrm>
+          <a:prstGeom prst="rect">
+            <a:avLst/>
+          </a:prstGeom>
+          <a:noFill/>
+          <a:ln/>
+        </p:spPr>
+        <p:txBody>
+          <a:bodyPr wrap="square" rtlCol="0" anchor="t"/>
+          <a:lstStyle/>
+          <a:p>
+            <a:pPr indent="0" marL="0">
+              <a:lnSpc>
+                <a:spcPct val="100000"/>
+              </a:lnSpc>
+              <a:buNone/>
+            </a:pPr>
+            <a:r>
+              <a:rPr lang="en-US" sz="1200" dirty="0">
+                <a:solidFill>
+                  <a:srgbClr val="E7EAE3"/>
+                </a:solidFill>
+                <a:latin typeface="Noto Sans KR" pitchFamily="34" charset="0"/>
+                <a:ea typeface="Noto Sans KR" pitchFamily="34" charset="-122"/>
+                <a:cs typeface="Noto Sans KR" pitchFamily="34" charset="-120"/>
+              </a:rPr>
+              <a:t>좋아하는 곳은 시온성전, 좋아하는 시간은 점심 교제와 구역예배입니다.</a:t>
+            </a:r>
+            <a:endParaRPr lang="en-US" sz="1200" dirty="0"/>
+          </a:p>
+          <a:p>
+            <a:pPr indent="0" marL="0">
+              <a:lnSpc>
+                <a:spcPct val="100000"/>
+              </a:lnSpc>
+              <a:buNone/>
+            </a:pPr>
+            <a:r>
+              <a:rPr lang="en-US" sz="900" dirty="0">
+                <a:solidFill>
+                  <a:srgbClr val="A8BDB2"/>
+                </a:solidFill>
+                <a:latin typeface="Noto Sans KR" pitchFamily="34" charset="0"/>
+                <a:ea typeface="Noto Sans KR" pitchFamily="34" charset="-122"/>
+                <a:cs typeface="Noto Sans KR" pitchFamily="34" charset="-120"/>
+              </a:rPr>
+              <a:t>Favorite place: the Zion Sanctuary. Favorite time: lunch fellowship and district worship.</a:t>
+            </a:r>
+            <a:endParaRPr lang="en-US" sz="1200" dirty="0"/>
+          </a:p>
+          <a:p>
+            <a:pPr indent="0" marL="0">
+              <a:lnSpc>
+                <a:spcPct val="100000"/>
+              </a:lnSpc>
+              <a:buNone/>
+            </a:pPr>
+            <a:r>
+              <a:rPr lang="en-US" sz="900" dirty="0">
+                <a:solidFill>
+                  <a:srgbClr val="A8BDB2"/>
+                </a:solidFill>
+                <a:latin typeface="Noto Sans KR" pitchFamily="34" charset="0"/>
+                <a:ea typeface="Noto Sans KR" pitchFamily="34" charset="-122"/>
+                <a:cs typeface="Noto Sans KR" pitchFamily="34" charset="-120"/>
+              </a:rPr>
+              <a:t>Lugar favorito: el Santuario Sion. Momento favorito: el almuerzo y el culto de distrito.</a:t>
+            </a:r>
+            <a:endParaRPr lang="en-US" sz="1200" dirty="0"/>
+          </a:p>
+        </p:txBody>
+      </p:sp>
+      <p:sp>
+        <p:nvSpPr>
+          <p:cNvPr id="31" name="Shape 29"/>
+          <p:cNvSpPr/>
+          <p:nvPr/>
+        </p:nvSpPr>
+        <p:spPr>
+          <a:xfrm>
+            <a:off x="3611880" y="3703320"/>
+            <a:ext cx="329184" cy="329184"/>
+          </a:xfrm>
+          <a:prstGeom prst="ellipse">
+            <a:avLst/>
+          </a:prstGeom>
+          <a:solidFill>
+            <a:srgbClr val="14342B"/>
+          </a:solidFill>
+          <a:ln w="12700">
+            <a:solidFill>
+              <a:srgbClr val="DCC07F"/>
+            </a:solidFill>
+            <a:prstDash val="solid"/>
+          </a:ln>
+        </p:spPr>
+      </p:sp>
+      <p:sp>
+        <p:nvSpPr>
+          <p:cNvPr id="32" name="Text 30"/>
+          <p:cNvSpPr/>
+          <p:nvPr/>
+        </p:nvSpPr>
+        <p:spPr>
+          <a:xfrm>
+            <a:off x="3611880" y="3703320"/>
+            <a:ext cx="329184" cy="329184"/>
+          </a:xfrm>
+          <a:prstGeom prst="rect">
+            <a:avLst/>
+          </a:prstGeom>
+          <a:noFill/>
+          <a:ln/>
+        </p:spPr>
+        <p:txBody>
+          <a:bodyPr wrap="square" rtlCol="0" anchor="ctr"/>
+          <a:lstStyle/>
+          <a:p>
+            <a:pPr algn="ctr" indent="0" marL="0">
+              <a:buNone/>
+            </a:pPr>
+            <a:r>
+              <a:rPr lang="en-US" sz="1200" b="1" dirty="0">
+                <a:solidFill>
+                  <a:srgbClr val="DCC07F"/>
+                </a:solidFill>
+                <a:latin typeface="Fraunces" pitchFamily="34" charset="0"/>
+                <a:ea typeface="Fraunces" pitchFamily="34" charset="-122"/>
+                <a:cs typeface="Fraunces" pitchFamily="34" charset="-120"/>
+              </a:rPr>
+              <a:t>5</a:t>
+            </a:r>
+            <a:endParaRPr lang="en-US" sz="1200" dirty="0"/>
+          </a:p>
+        </p:txBody>
+      </p:sp>
+      <p:sp>
+        <p:nvSpPr>
+          <p:cNvPr id="33" name="Text 31"/>
+          <p:cNvSpPr/>
+          <p:nvPr/>
+        </p:nvSpPr>
+        <p:spPr>
+          <a:xfrm>
+            <a:off x="4114800" y="3648456"/>
+            <a:ext cx="7528255" cy="457200"/>
+          </a:xfrm>
+          <a:prstGeom prst="rect">
+            <a:avLst/>
+          </a:prstGeom>
+          <a:noFill/>
+          <a:ln/>
+        </p:spPr>
+        <p:txBody>
+          <a:bodyPr wrap="square" rtlCol="0" anchor="t"/>
+          <a:lstStyle/>
+          <a:p>
+            <a:pPr indent="0" marL="0">
+              <a:lnSpc>
+                <a:spcPct val="100000"/>
+              </a:lnSpc>
+              <a:buNone/>
+            </a:pPr>
+            <a:r>
+              <a:rPr lang="en-US" sz="1200" dirty="0">
+                <a:solidFill>
+                  <a:srgbClr val="E7EAE3"/>
+                </a:solidFill>
+                <a:latin typeface="Noto Sans KR" pitchFamily="34" charset="0"/>
+                <a:ea typeface="Noto Sans KR" pitchFamily="34" charset="-122"/>
+                <a:cs typeface="Noto Sans KR" pitchFamily="34" charset="-120"/>
+              </a:rPr>
+              <a:t>지금은 관리부에서 봉사하고 있습니다.</a:t>
+            </a:r>
+            <a:endParaRPr lang="en-US" sz="1200" dirty="0"/>
+          </a:p>
+          <a:p>
+            <a:pPr indent="0" marL="0">
+              <a:lnSpc>
+                <a:spcPct val="100000"/>
+              </a:lnSpc>
+              <a:buNone/>
+            </a:pPr>
+            <a:r>
+              <a:rPr lang="en-US" sz="900" dirty="0">
+                <a:solidFill>
+                  <a:srgbClr val="A8BDB2"/>
+                </a:solidFill>
+                <a:latin typeface="Noto Sans KR" pitchFamily="34" charset="0"/>
+                <a:ea typeface="Noto Sans KR" pitchFamily="34" charset="-122"/>
+                <a:cs typeface="Noto Sans KR" pitchFamily="34" charset="-120"/>
+              </a:rPr>
+              <a:t>I currently serve on the Facilities Team.   ·   Actualmente sirvo en el equipo de mantenimiento.</a:t>
+            </a:r>
+            <a:endParaRPr lang="en-US" sz="1200" dirty="0"/>
+          </a:p>
+        </p:txBody>
+      </p:sp>
+      <p:sp>
+        <p:nvSpPr>
+          <p:cNvPr id="34" name="Shape 32"/>
+          <p:cNvSpPr/>
+          <p:nvPr/>
+        </p:nvSpPr>
+        <p:spPr>
+          <a:xfrm>
+            <a:off x="3611880" y="4398264"/>
+            <a:ext cx="640080" cy="640080"/>
+          </a:xfrm>
+          <a:prstGeom prst="ellipse">
+            <a:avLst/>
+          </a:prstGeom>
+          <a:solidFill>
+            <a:srgbClr val="C89B3C"/>
+          </a:solidFill>
+          <a:ln w="12700">
+            <a:solidFill>
+              <a:srgbClr val="C89B3C"/>
+            </a:solidFill>
+            <a:prstDash val="solid"/>
+          </a:ln>
+        </p:spPr>
+      </p:sp>
+      <p:sp>
+        <p:nvSpPr>
+          <p:cNvPr id="35" name="Text 33"/>
+          <p:cNvSpPr/>
+          <p:nvPr/>
+        </p:nvSpPr>
+        <p:spPr>
+          <a:xfrm>
+            <a:off x="3611880" y="4398264"/>
+            <a:ext cx="640080" cy="640080"/>
+          </a:xfrm>
+          <a:prstGeom prst="rect">
+            <a:avLst/>
+          </a:prstGeom>
+          <a:noFill/>
+          <a:ln/>
+        </p:spPr>
+        <p:txBody>
+          <a:bodyPr wrap="square" rtlCol="0" anchor="ctr"/>
+          <a:lstStyle/>
+          <a:p>
+            <a:pPr algn="ctr" indent="0" marL="0">
+              <a:buNone/>
+            </a:pPr>
+            <a:r>
+              <a:rPr lang="en-US" sz="2600" b="1" dirty="0">
                 <a:solidFill>
                   <a:srgbClr val="0E241D"/>
+                </a:solidFill>
+                <a:latin typeface="Fraunces" pitchFamily="34" charset="0"/>
+                <a:ea typeface="Fraunces" pitchFamily="34" charset="-122"/>
+                <a:cs typeface="Fraunces" pitchFamily="34" charset="-120"/>
+              </a:rPr>
+              <a:t>6</a:t>
+            </a:r>
+            <a:endParaRPr lang="en-US" sz="2600" dirty="0"/>
+          </a:p>
+        </p:txBody>
+      </p:sp>
+      <p:sp>
+        <p:nvSpPr>
+          <p:cNvPr id="36" name="Text 34"/>
+          <p:cNvSpPr/>
+          <p:nvPr/>
+        </p:nvSpPr>
+        <p:spPr>
+          <a:xfrm>
+            <a:off x="4480560" y="4288536"/>
+            <a:ext cx="7162495" cy="1792224"/>
+          </a:xfrm>
+          <a:prstGeom prst="rect">
+            <a:avLst/>
+          </a:prstGeom>
+          <a:noFill/>
+          <a:ln/>
+        </p:spPr>
+        <p:txBody>
+          <a:bodyPr wrap="square" rtlCol="0" anchor="t"/>
+          <a:lstStyle/>
+          <a:p>
+            <a:pPr indent="0" marL="0">
+              <a:lnSpc>
+                <a:spcPct val="115000"/>
+              </a:lnSpc>
+              <a:spcAft>
+                <a:spcPts val="800"/>
+              </a:spcAft>
+              <a:buNone/>
+            </a:pPr>
+            <a:r>
+              <a:rPr lang="en-US" sz="2400" b="1" dirty="0">
+                <a:solidFill>
+                  <a:srgbClr val="F6F1E7"/>
                 </a:solidFill>
                 <a:latin typeface="Nanum Myeongjo" pitchFamily="34" charset="0"/>
                 <a:ea typeface="Nanum Myeongjo" pitchFamily="34" charset="-122"/>
                 <a:cs typeface="Nanum Myeongjo" pitchFamily="34" charset="-120"/>
               </a:rPr>
-              <a:t>큰 박수! 앞으로 나와 주세요</a:t>
-            </a:r>
-            <a:endParaRPr lang="en-US" sz="2200" dirty="0"/>
-          </a:p>
-          <a:p>
-            <a:pPr algn="ctr" indent="0" marL="0">
+              <a:t>늘푸른교회에 처음 온 것은 2018년 8월입니다.</a:t>
+            </a:r>
+            <a:endParaRPr lang="en-US" sz="2400" dirty="0"/>
+          </a:p>
+          <a:p>
+            <a:pPr indent="0" marL="0">
               <a:lnSpc>
-                <a:spcPct val="105000"/>
+                <a:spcPct val="115000"/>
               </a:lnSpc>
-              <a:buNone/>
-            </a:pPr>
-            <a:r>
-              <a:rPr lang="en-US" sz="1400" dirty="0">
-                <a:solidFill>
-                  <a:srgbClr val="0E241D"/>
-                </a:solidFill>
-                <a:latin typeface="Fraunces" pitchFamily="34" charset="0"/>
-                <a:ea typeface="Fraunces" pitchFamily="34" charset="-122"/>
-                <a:cs typeface="Fraunces" pitchFamily="34" charset="-120"/>
-              </a:rPr>
-              <a:t>Applause! Please come up · ¡Aplausos! Pase al frente</a:t>
-            </a:r>
-            <a:endParaRPr lang="en-US" sz="2200" dirty="0"/>
+              <a:spcAft>
+                <a:spcPts val="400"/>
+              </a:spcAft>
+              <a:buNone/>
+            </a:pPr>
+            <a:r>
+              <a:rPr lang="en-US" sz="1700" dirty="0">
+                <a:solidFill>
+                  <a:srgbClr val="DCC07F"/>
+                </a:solidFill>
+                <a:latin typeface="Noto Sans KR" pitchFamily="34" charset="0"/>
+                <a:ea typeface="Noto Sans KR" pitchFamily="34" charset="-122"/>
+                <a:cs typeface="Noto Sans KR" pitchFamily="34" charset="-120"/>
+              </a:rPr>
+              <a:t>I first came to Evergreen in August 2018.</a:t>
+            </a:r>
+            <a:endParaRPr lang="en-US" sz="2400" dirty="0"/>
+          </a:p>
+          <a:p>
+            <a:pPr indent="0" marL="0">
+              <a:lnSpc>
+                <a:spcPct val="115000"/>
+              </a:lnSpc>
+              <a:buNone/>
+            </a:pPr>
+            <a:r>
+              <a:rPr lang="en-US" sz="1500" dirty="0">
+                <a:solidFill>
+                  <a:srgbClr val="E7EAE3"/>
+                </a:solidFill>
+                <a:latin typeface="Noto Sans KR" pitchFamily="34" charset="0"/>
+                <a:ea typeface="Noto Sans KR" pitchFamily="34" charset="-122"/>
+                <a:cs typeface="Noto Sans KR" pitchFamily="34" charset="-120"/>
+              </a:rPr>
+              <a:t>Llegué a Evergreen por primera vez en agosto de 2018.</a:t>
+            </a:r>
+            <a:endParaRPr lang="en-US" sz="2400" dirty="0"/>
           </a:p>
         </p:txBody>
       </p:sp>
